--- a/docs/pitch/out/BlockID-Business-Passport-3min.pptx
+++ b/docs/pitch/out/BlockID-Business-Passport-3min.pptx
@@ -1214,7 +1214,7 @@
           <a:p>
             <a:r>
               <a:rPr lang="en-US" dirty="0"/>
-              <a:t>[2:40–3:00] This is live today: thirteen businesses listed, thirty-eight share records on blockchain and eighty-seven billion dollars of fair value checked by people. Businesses pay a listing fee and a share-register subscription, plus a small fee per transfer and per dividend round. We're looking for pilot businesses, investor communities and licensed partners. Scan to try it, or scan to connect with me. Know the business you invest in. Thank you.</a:t>
+              <a:t>[2:40–3:00] The whole flow works today on testnet, with fourteen sample listings built from public information and forty-two share records on three blockchains. We have no real users yet: that is the next step. Businesses pay a listing fee and a share-register subscription, plus a small fee per transfer and per dividend round. We're looking for pilot businesses, investor communities and licensed partners. Scan to try it, or scan to connect with me. Know the business you invest in. Thank you.</a:t>
             </a:r>
             <a:endParaRPr lang="en-US" dirty="0"/>
           </a:p>
@@ -1929,7 +1929,7 @@
                 <a:ea typeface="Arial" pitchFamily="34" charset="-122"/>
                 <a:cs typeface="Arial" pitchFamily="34" charset="-120"/>
               </a:rPr>
-              <a:t>13</a:t>
+              <a:t>14</a:t>
             </a:r>
             <a:endParaRPr lang="en-US" sz="2200" dirty="0"/>
           </a:p>
@@ -1968,7 +1968,7 @@
                 <a:ea typeface="Calibri" pitchFamily="34" charset="-122"/>
                 <a:cs typeface="Calibri" pitchFamily="34" charset="-120"/>
               </a:rPr>
-              <a:t>businesses listed</a:t>
+              <a:t>sample listings (demo data)</a:t>
             </a:r>
             <a:endParaRPr lang="en-US" sz="1100" dirty="0"/>
           </a:p>
@@ -2034,7 +2034,7 @@
                 <a:ea typeface="Arial" pitchFamily="34" charset="-122"/>
                 <a:cs typeface="Arial" pitchFamily="34" charset="-120"/>
               </a:rPr>
-              <a:t>38</a:t>
+              <a:t>42</a:t>
             </a:r>
             <a:endParaRPr lang="en-US" sz="2200" dirty="0"/>
           </a:p>
@@ -2139,7 +2139,7 @@
                 <a:ea typeface="Arial" pitchFamily="34" charset="-122"/>
                 <a:cs typeface="Arial" pitchFamily="34" charset="-120"/>
               </a:rPr>
-              <a:t>A$87B</a:t>
+              <a:t>3</a:t>
             </a:r>
             <a:endParaRPr lang="en-US" sz="2200" dirty="0"/>
           </a:p>
@@ -2178,7 +2178,7 @@
                 <a:ea typeface="Calibri" pitchFamily="34" charset="-122"/>
                 <a:cs typeface="Calibri" pitchFamily="34" charset="-120"/>
               </a:rPr>
-              <a:t>fair value checked by people</a:t>
+              <a:t>blockchains, every record checkable</a:t>
             </a:r>
             <a:endParaRPr lang="en-US" sz="1100" dirty="0"/>
           </a:p>
@@ -2217,7 +2217,7 @@
                 <a:ea typeface="Calibri" pitchFamily="34" charset="-122"/>
                 <a:cs typeface="Calibri" pitchFamily="34" charset="-120"/>
               </a:rPr>
-              <a:t>Live today at eth.blockid.au</a:t>
+              <a:t>Working end to end on testnet at eth.blockid.au</a:t>
             </a:r>
             <a:endParaRPr lang="en-US" sz="1300" dirty="0"/>
           </a:p>
@@ -5095,7 +5095,7 @@
                 <a:ea typeface="Calibri" pitchFamily="34" charset="-122"/>
                 <a:cs typeface="Calibri" pitchFamily="34" charset="-120"/>
               </a:rPr>
-              <a:t>13 businesses listed · 38 share records on blockchain</a:t>
+              <a:t>14 sample listings · 42 share records on blockchain</a:t>
             </a:r>
             <a:endParaRPr lang="en-US" sz="1500" dirty="0"/>
           </a:p>
@@ -9659,7 +9659,7 @@
                 <a:ea typeface="Calibri" pitchFamily="34" charset="-122"/>
                 <a:cs typeface="Calibri" pitchFamily="34" charset="-120"/>
               </a:rPr>
-              <a:t>9 / 9   ·   LIVE TODAY · THE ASK</a:t>
+              <a:t>9 / 9   ·   WORKING TODAY · THE ASK</a:t>
             </a:r>
             <a:endParaRPr lang="en-US" sz="1150" dirty="0"/>
           </a:p>
@@ -9698,7 +9698,7 @@
                 <a:ea typeface="Arial" pitchFamily="34" charset="-122"/>
                 <a:cs typeface="Arial" pitchFamily="34" charset="-120"/>
               </a:rPr>
-              <a:t>Live today. Looking for pilot businesses and partners.</a:t>
+              <a:t>Working on testnet. Looking for our first pilot businesses.</a:t>
             </a:r>
             <a:endParaRPr lang="en-US" sz="3000" dirty="0"/>
           </a:p>
@@ -9764,7 +9764,7 @@
                 <a:ea typeface="Arial" pitchFamily="34" charset="-122"/>
                 <a:cs typeface="Arial" pitchFamily="34" charset="-120"/>
               </a:rPr>
-              <a:t>13</a:t>
+              <a:t>14</a:t>
             </a:r>
             <a:endParaRPr lang="en-US" sz="2800" dirty="0"/>
           </a:p>
@@ -9803,7 +9803,7 @@
                 <a:ea typeface="Calibri" pitchFamily="34" charset="-122"/>
                 <a:cs typeface="Calibri" pitchFamily="34" charset="-120"/>
               </a:rPr>
-              <a:t>businesses listed</a:t>
+              <a:t>sample listings built from public data</a:t>
             </a:r>
             <a:endParaRPr lang="en-US" sz="1150" dirty="0"/>
           </a:p>
@@ -9869,7 +9869,7 @@
                 <a:ea typeface="Arial" pitchFamily="34" charset="-122"/>
                 <a:cs typeface="Arial" pitchFamily="34" charset="-120"/>
               </a:rPr>
-              <a:t>38</a:t>
+              <a:t>42</a:t>
             </a:r>
             <a:endParaRPr lang="en-US" sz="2800" dirty="0"/>
           </a:p>
@@ -9974,7 +9974,7 @@
                 <a:ea typeface="Arial" pitchFamily="34" charset="-122"/>
                 <a:cs typeface="Arial" pitchFamily="34" charset="-120"/>
               </a:rPr>
-              <a:t>A$87B</a:t>
+              <a:t>3</a:t>
             </a:r>
             <a:endParaRPr lang="en-US" sz="2800" dirty="0"/>
           </a:p>
@@ -10013,7 +10013,7 @@
                 <a:ea typeface="Calibri" pitchFamily="34" charset="-122"/>
                 <a:cs typeface="Calibri" pitchFamily="34" charset="-120"/>
               </a:rPr>
-              <a:t>fair value checked by people</a:t>
+              <a:t>blockchains, every record checkable</a:t>
             </a:r>
             <a:endParaRPr lang="en-US" sz="1150" dirty="0"/>
           </a:p>
@@ -10079,7 +10079,7 @@
                 <a:ea typeface="Arial" pitchFamily="34" charset="-122"/>
                 <a:cs typeface="Arial" pitchFamily="34" charset="-120"/>
               </a:rPr>
-              <a:t>3</a:t>
+              <a:t>Next</a:t>
             </a:r>
             <a:endParaRPr lang="en-US" sz="2800" dirty="0"/>
           </a:p>
@@ -10118,7 +10118,7 @@
                 <a:ea typeface="Calibri" pitchFamily="34" charset="-122"/>
                 <a:cs typeface="Calibri" pitchFamily="34" charset="-120"/>
               </a:rPr>
-              <a:t>blockchains, every record checkable</a:t>
+              <a:t>first real pilots in AU · VN</a:t>
             </a:r>
             <a:endParaRPr lang="en-US" sz="1150" dirty="0"/>
           </a:p>

--- a/docs/pitch/out/BlockID-Business-Passport-3min.pptx
+++ b/docs/pitch/out/BlockID-Business-Passport-3min.pptx
@@ -17,9 +17,10 @@
     <p:sldId id="265" r:id="rId11"/>
     <p:sldId id="266" r:id="rId12"/>
     <p:sldId id="267" r:id="rId13"/>
+    <p:sldId id="268" r:id="rId14"/>
   </p:sldIdLst>
   <p:notesMasterIdLst>
-    <p:notesMasterId r:id="rId14"/>
+    <p:notesMasterId r:id="rId15"/>
   </p:notesMasterIdLst>
   <p:sldSz cx="12192000" cy="6858000"/>
   <p:notesSz cx="6858000" cy="12192000"/>
@@ -1392,7 +1393,7 @@
           <a:p>
             <a:r>
               <a:rPr lang="en-US" dirty="0"/>
-              <a:t>[2:15–2:35] Under the hood, only approved actions reach the chain. AI runs with no keys, an admin wallet signs one approval, and only then does the isolated issuer act. Our AgentProvenance contract on HashKey Chain records who proposed and who approved. Agents propose. Humans approve. Chains prove.</a:t>
+              <a:t>[2:15–2:30] Under the hood, only approved actions reach the chain. AI runs with no keys, an admin wallet signs one approval, and only then does the isolated issuer act. Our AgentProvenance contract on HashKey Chain records who proposed and who approved. Agents propose. Humans approve. Chains prove.</a:t>
             </a:r>
             <a:endParaRPr lang="en-US" dirty="0"/>
           </a:p>
@@ -1480,7 +1481,7 @@
           <a:p>
             <a:r>
               <a:rPr lang="en-US" dirty="0"/>
-              <a:t>[2:35–3:00] The whole flow works on testnet today, with fourteen sample listings built from public information and forty-two token contracts on three chains. We have no real users yet. Next: pilot businesses in Australia and Vietnam, investor communities and licensed custody partners. Businesses pay a listing fee, a register subscription, and small transfer and dividend fees. Try it at eth.blockid.au. Thank you.</a:t>
+              <a:t>[2:30–2:45] Who builds it? Founder Do Van Long and co-founder Truong Quoc Tuan are both former CTOs of major Vietnamese corporations and hold Australia's Global Talent visa. A strong tech team in Vietnam and a business team in Sydney built this whole system in house, ready to grow globally.</a:t>
             </a:r>
             <a:endParaRPr lang="en-US" dirty="0"/>
           </a:p>
@@ -1504,6 +1505,94 @@
             <a:fld id="{F7021451-1387-4CA6-816F-3879F97B5CBC}" type="slidenum">
               <a:rPr lang="en-US"/>
               <a:t>12</a:t>
+            </a:fld>
+            <a:endParaRPr lang="en-US"/>
+          </a:p>
+        </p:txBody>
+      </p:sp>
+    </p:spTree>
+    <p:extLst>
+      <p:ext uri="{BB962C8B-B14F-4D97-AF65-F5344CB8AC3E}">
+        <p14:creationId xmlns:p14="http://schemas.microsoft.com/office/powerpoint/2010/main" val="1024086991"/>
+      </p:ext>
+    </p:extLst>
+  </p:cSld>
+  <p:clrMapOvr>
+    <a:masterClrMapping/>
+  </p:clrMapOvr>
+</p:notes>
+</file>
+
+<file path=ppt/notesSlides/notesSlide13.xml><?xml version="1.0" encoding="utf-8"?>
+<p:notes xmlns:a="http://schemas.openxmlformats.org/drawingml/2006/main" xmlns:r="http://schemas.openxmlformats.org/officeDocument/2006/relationships" xmlns:p="http://schemas.openxmlformats.org/presentationml/2006/main">
+  <p:cSld>
+    <p:spTree>
+      <p:nvGrpSpPr>
+        <p:cNvPr id="1" name=""/>
+        <p:cNvGrpSpPr/>
+        <p:nvPr/>
+      </p:nvGrpSpPr>
+      <p:grpSpPr>
+        <a:xfrm>
+          <a:off x="0" y="0"/>
+          <a:ext cx="0" cy="0"/>
+          <a:chOff x="0" y="0"/>
+          <a:chExt cx="0" cy="0"/>
+        </a:xfrm>
+      </p:grpSpPr>
+      <p:sp>
+        <p:nvSpPr>
+          <p:cNvPr id="2" name="Slide Image Placeholder 1"/>
+          <p:cNvSpPr>
+            <a:spLocks noGrp="1" noRot="1" noChangeAspect="1"/>
+          </p:cNvSpPr>
+          <p:nvPr>
+            <p:ph type="sldImg"/>
+          </p:nvPr>
+        </p:nvSpPr>
+        <p:spPr/>
+      </p:sp>
+      <p:sp>
+        <p:nvSpPr>
+          <p:cNvPr id="3" name="Notes Placeholder 2"/>
+          <p:cNvSpPr>
+            <a:spLocks noGrp="1"/>
+          </p:cNvSpPr>
+          <p:nvPr>
+            <p:ph type="body" idx="1"/>
+          </p:nvPr>
+        </p:nvSpPr>
+        <p:spPr/>
+        <p:txBody>
+          <a:bodyPr/>
+          <a:lstStyle/>
+          <a:p>
+            <a:r>
+              <a:rPr lang="en-US" dirty="0"/>
+              <a:t>[2:45–3:00] The whole flow works on testnet today: fourteen sample listings and forty-two token contracts on three chains, with no real users yet. Next: pilot businesses in Australia and Vietnam, investor communities and licensed custody partners. Businesses pay a listing fee, a register subscription and small transfer and dividend fees. Try it at eth.blockid.au. Thank you.</a:t>
+            </a:r>
+            <a:endParaRPr lang="en-US" dirty="0"/>
+          </a:p>
+        </p:txBody>
+      </p:sp>
+      <p:sp>
+        <p:nvSpPr>
+          <p:cNvPr id="4" name="Slide Number Placeholder 3"/>
+          <p:cNvSpPr>
+            <a:spLocks noGrp="1"/>
+          </p:cNvSpPr>
+          <p:nvPr>
+            <p:ph type="sldNum" sz="quarter" idx="10"/>
+          </p:nvPr>
+        </p:nvSpPr>
+        <p:spPr/>
+        <p:txBody>
+          <a:bodyPr/>
+          <a:lstStyle/>
+          <a:p>
+            <a:fld id="{F7021451-1387-4CA6-816F-3879F97B5CBC}" type="slidenum">
+              <a:rPr lang="en-US"/>
+              <a:t>13</a:t>
             </a:fld>
             <a:endParaRPr lang="en-US"/>
           </a:p>
@@ -2789,35 +2878,201 @@
         </p:nvSpPr>
         <p:spPr>
           <a:xfrm>
-            <a:off x="5989320" y="1371600"/>
-            <a:ext cx="5806440" cy="2433003"/>
+            <a:off x="6227064" y="1335024"/>
+            <a:ext cx="5330952" cy="3633597"/>
           </a:xfrm>
           <a:prstGeom prst="roundRect">
             <a:avLst>
-              <a:gd name="adj" fmla="val 3007"/>
+              <a:gd name="adj" fmla="val 1762"/>
             </a:avLst>
           </a:prstGeom>
           <a:solidFill>
-            <a:srgbClr val="25403A"/>
-          </a:solidFill>
-          <a:ln w="12700">
-            <a:solidFill>
-              <a:srgbClr val="25403A"/>
+            <a:srgbClr val="D9DFDD"/>
+          </a:solidFill>
+          <a:ln w="12700">
+            <a:solidFill>
+              <a:srgbClr val="D9DFDD"/>
             </a:solidFill>
             <a:prstDash val="solid"/>
           </a:ln>
           <a:effectLst>
-            <a:outerShdw sx="100000" sy="100000" kx="0" ky="0" algn="bl" rotWithShape="0" blurRad="177800" dist="63500" dir="5400000">
+            <a:outerShdw sx="100000" sy="100000" kx="0" ky="0" algn="bl" rotWithShape="0" blurRad="203200" dist="76200" dir="5400000">
               <a:srgbClr val="000000">
-                <a:alpha val="50000"/>
+                <a:alpha val="55000"/>
               </a:srgbClr>
             </a:outerShdw>
           </a:effectLst>
         </p:spPr>
       </p:sp>
+      <p:sp>
+        <p:nvSpPr>
+          <p:cNvPr id="9" name="Shape 6"/>
+          <p:cNvSpPr/>
+          <p:nvPr/>
+        </p:nvSpPr>
+        <p:spPr>
+          <a:xfrm>
+            <a:off x="6263640" y="1371600"/>
+            <a:ext cx="5257800" cy="274320"/>
+          </a:xfrm>
+          <a:prstGeom prst="rect">
+            <a:avLst/>
+          </a:prstGeom>
+          <a:solidFill>
+            <a:srgbClr val="ECEFEE"/>
+          </a:solidFill>
+          <a:ln w="12700">
+            <a:solidFill>
+              <a:srgbClr val="ECEFEE"/>
+            </a:solidFill>
+            <a:prstDash val="solid"/>
+          </a:ln>
+        </p:spPr>
+      </p:sp>
+      <p:sp>
+        <p:nvSpPr>
+          <p:cNvPr id="10" name="Shape 7"/>
+          <p:cNvSpPr/>
+          <p:nvPr/>
+        </p:nvSpPr>
+        <p:spPr>
+          <a:xfrm>
+            <a:off x="6373368" y="1458468"/>
+            <a:ext cx="100584" cy="100584"/>
+          </a:xfrm>
+          <a:prstGeom prst="ellipse">
+            <a:avLst/>
+          </a:prstGeom>
+          <a:solidFill>
+            <a:srgbClr val="FF5F57"/>
+          </a:solidFill>
+          <a:ln w="12700">
+            <a:solidFill>
+              <a:srgbClr val="FF5F57"/>
+            </a:solidFill>
+            <a:prstDash val="solid"/>
+          </a:ln>
+        </p:spPr>
+      </p:sp>
+      <p:sp>
+        <p:nvSpPr>
+          <p:cNvPr id="11" name="Shape 8"/>
+          <p:cNvSpPr/>
+          <p:nvPr/>
+        </p:nvSpPr>
+        <p:spPr>
+          <a:xfrm>
+            <a:off x="6528816" y="1458468"/>
+            <a:ext cx="100584" cy="100584"/>
+          </a:xfrm>
+          <a:prstGeom prst="ellipse">
+            <a:avLst/>
+          </a:prstGeom>
+          <a:solidFill>
+            <a:srgbClr val="FEBC2E"/>
+          </a:solidFill>
+          <a:ln w="12700">
+            <a:solidFill>
+              <a:srgbClr val="FEBC2E"/>
+            </a:solidFill>
+            <a:prstDash val="solid"/>
+          </a:ln>
+        </p:spPr>
+      </p:sp>
+      <p:sp>
+        <p:nvSpPr>
+          <p:cNvPr id="12" name="Shape 9"/>
+          <p:cNvSpPr/>
+          <p:nvPr/>
+        </p:nvSpPr>
+        <p:spPr>
+          <a:xfrm>
+            <a:off x="6684264" y="1458468"/>
+            <a:ext cx="100584" cy="100584"/>
+          </a:xfrm>
+          <a:prstGeom prst="ellipse">
+            <a:avLst/>
+          </a:prstGeom>
+          <a:solidFill>
+            <a:srgbClr val="28C840"/>
+          </a:solidFill>
+          <a:ln w="12700">
+            <a:solidFill>
+              <a:srgbClr val="28C840"/>
+            </a:solidFill>
+            <a:prstDash val="solid"/>
+          </a:ln>
+        </p:spPr>
+      </p:sp>
+      <p:sp>
+        <p:nvSpPr>
+          <p:cNvPr id="13" name="Shape 10"/>
+          <p:cNvSpPr/>
+          <p:nvPr/>
+        </p:nvSpPr>
+        <p:spPr>
+          <a:xfrm>
+            <a:off x="6903720" y="1417320"/>
+            <a:ext cx="3840480" cy="182880"/>
+          </a:xfrm>
+          <a:prstGeom prst="roundRect">
+            <a:avLst>
+              <a:gd name="adj" fmla="val 25000"/>
+            </a:avLst>
+          </a:prstGeom>
+          <a:solidFill>
+            <a:srgbClr val="FFFFFF"/>
+          </a:solidFill>
+          <a:ln w="12700">
+            <a:solidFill>
+              <a:srgbClr val="D9DFDD"/>
+            </a:solidFill>
+            <a:prstDash val="solid"/>
+          </a:ln>
+        </p:spPr>
+      </p:sp>
+      <p:sp>
+        <p:nvSpPr>
+          <p:cNvPr id="14" name="Text 11"/>
+          <p:cNvSpPr txBox="1"/>
+          <p:nvPr/>
+        </p:nvSpPr>
+        <p:spPr>
+          <a:xfrm>
+            <a:off x="6995160" y="1417320"/>
+            <a:ext cx="3657600" cy="182880"/>
+          </a:xfrm>
+          <a:prstGeom prst="rect">
+            <a:avLst/>
+          </a:prstGeom>
+          <a:noFill/>
+          <a:ln/>
+        </p:spPr>
+        <p:txBody>
+          <a:bodyPr wrap="square" lIns="0" tIns="0" rIns="0" bIns="0" rtlCol="0" anchor="ctr"/>
+          <a:lstStyle/>
+          <a:p>
+            <a:pPr indent="0" marL="0">
+              <a:buNone/>
+            </a:pPr>
+            <a:r>
+              <a:rPr lang="en-US" sz="850" dirty="0">
+                <a:solidFill>
+                  <a:srgbClr val="4A5A56"/>
+                </a:solidFill>
+                <a:latin typeface="Calibri" pitchFamily="34" charset="0"/>
+                <a:ea typeface="Calibri" pitchFamily="34" charset="-122"/>
+                <a:cs typeface="Calibri" pitchFamily="34" charset="-120"/>
+              </a:rPr>
+              <a:t>eth.blockid.au/i  ·  demo investor account</a:t>
+            </a:r>
+            <a:endParaRPr lang="en-US" sz="850" dirty="0"/>
+          </a:p>
+        </p:txBody>
+      </p:sp>
       <p:pic>
         <p:nvPicPr>
-          <p:cNvPr id="9" name="Image 1" descr="preencoded.png">    </p:cNvPr>
+          <p:cNvPr id="15" name="Image 1" descr="preencoded.png">    </p:cNvPr>
           <p:cNvPicPr>
             <a:picLocks noChangeAspect="1"/>
           </p:cNvPicPr>
@@ -2831,8 +3086,8 @@
         </p:blipFill>
         <p:spPr>
           <a:xfrm>
-            <a:off x="6035040" y="1417320"/>
-            <a:ext cx="5715000" cy="2341563"/>
+            <a:off x="6263640" y="1645920"/>
+            <a:ext cx="5257800" cy="3286125"/>
           </a:xfrm>
           <a:prstGeom prst="rect">
             <a:avLst/>
@@ -2841,13 +3096,13 @@
       </p:pic>
       <p:sp>
         <p:nvSpPr>
-          <p:cNvPr id="10" name="Shape 6"/>
-          <p:cNvSpPr/>
-          <p:nvPr/>
-        </p:nvSpPr>
-        <p:spPr>
-          <a:xfrm>
-            <a:off x="6035040" y="4033203"/>
+          <p:cNvPr id="16" name="Shape 12"/>
+          <p:cNvSpPr/>
+          <p:nvPr/>
+        </p:nvSpPr>
+        <p:spPr>
+          <a:xfrm>
+            <a:off x="6035040" y="5160645"/>
             <a:ext cx="1819656" cy="960120"/>
           </a:xfrm>
           <a:prstGeom prst="roundRect">
@@ -2868,13 +3123,13 @@
       </p:sp>
       <p:sp>
         <p:nvSpPr>
-          <p:cNvPr id="11" name="Text 7"/>
-          <p:cNvSpPr txBox="1"/>
-          <p:nvPr/>
-        </p:nvSpPr>
-        <p:spPr>
-          <a:xfrm>
-            <a:off x="6172200" y="4106355"/>
+          <p:cNvPr id="17" name="Text 13"/>
+          <p:cNvSpPr txBox="1"/>
+          <p:nvPr/>
+        </p:nvSpPr>
+        <p:spPr>
+          <a:xfrm>
+            <a:off x="6172200" y="5233797"/>
             <a:ext cx="1554480" cy="457200"/>
           </a:xfrm>
           <a:prstGeom prst="rect">
@@ -2907,13 +3162,13 @@
       </p:sp>
       <p:sp>
         <p:nvSpPr>
-          <p:cNvPr id="12" name="Text 8"/>
-          <p:cNvSpPr txBox="1"/>
-          <p:nvPr/>
-        </p:nvSpPr>
-        <p:spPr>
-          <a:xfrm>
-            <a:off x="6172200" y="4563555"/>
+          <p:cNvPr id="18" name="Text 14"/>
+          <p:cNvSpPr txBox="1"/>
+          <p:nvPr/>
+        </p:nvSpPr>
+        <p:spPr>
+          <a:xfrm>
+            <a:off x="6172200" y="5690997"/>
             <a:ext cx="1600200" cy="365760"/>
           </a:xfrm>
           <a:prstGeom prst="rect">
@@ -2946,13 +3201,13 @@
       </p:sp>
       <p:sp>
         <p:nvSpPr>
-          <p:cNvPr id="13" name="Shape 9"/>
-          <p:cNvSpPr/>
-          <p:nvPr/>
-        </p:nvSpPr>
-        <p:spPr>
-          <a:xfrm>
-            <a:off x="7982712" y="4033203"/>
+          <p:cNvPr id="19" name="Shape 15"/>
+          <p:cNvSpPr/>
+          <p:nvPr/>
+        </p:nvSpPr>
+        <p:spPr>
+          <a:xfrm>
+            <a:off x="7982712" y="5160645"/>
             <a:ext cx="1819656" cy="960120"/>
           </a:xfrm>
           <a:prstGeom prst="roundRect">
@@ -2973,13 +3228,13 @@
       </p:sp>
       <p:sp>
         <p:nvSpPr>
-          <p:cNvPr id="14" name="Text 10"/>
-          <p:cNvSpPr txBox="1"/>
-          <p:nvPr/>
-        </p:nvSpPr>
-        <p:spPr>
-          <a:xfrm>
-            <a:off x="8119872" y="4106355"/>
+          <p:cNvPr id="20" name="Text 16"/>
+          <p:cNvSpPr txBox="1"/>
+          <p:nvPr/>
+        </p:nvSpPr>
+        <p:spPr>
+          <a:xfrm>
+            <a:off x="8119872" y="5233797"/>
             <a:ext cx="1554480" cy="457200"/>
           </a:xfrm>
           <a:prstGeom prst="rect">
@@ -3012,13 +3267,13 @@
       </p:sp>
       <p:sp>
         <p:nvSpPr>
-          <p:cNvPr id="15" name="Text 11"/>
-          <p:cNvSpPr txBox="1"/>
-          <p:nvPr/>
-        </p:nvSpPr>
-        <p:spPr>
-          <a:xfrm>
-            <a:off x="8119872" y="4563555"/>
+          <p:cNvPr id="21" name="Text 17"/>
+          <p:cNvSpPr txBox="1"/>
+          <p:nvPr/>
+        </p:nvSpPr>
+        <p:spPr>
+          <a:xfrm>
+            <a:off x="8119872" y="5690997"/>
             <a:ext cx="1600200" cy="365760"/>
           </a:xfrm>
           <a:prstGeom prst="rect">
@@ -3051,13 +3306,13 @@
       </p:sp>
       <p:sp>
         <p:nvSpPr>
-          <p:cNvPr id="16" name="Shape 12"/>
-          <p:cNvSpPr/>
-          <p:nvPr/>
-        </p:nvSpPr>
-        <p:spPr>
-          <a:xfrm>
-            <a:off x="9930384" y="4033203"/>
+          <p:cNvPr id="22" name="Shape 18"/>
+          <p:cNvSpPr/>
+          <p:nvPr/>
+        </p:nvSpPr>
+        <p:spPr>
+          <a:xfrm>
+            <a:off x="9930384" y="5160645"/>
             <a:ext cx="1819656" cy="960120"/>
           </a:xfrm>
           <a:prstGeom prst="roundRect">
@@ -3078,13 +3333,13 @@
       </p:sp>
       <p:sp>
         <p:nvSpPr>
-          <p:cNvPr id="17" name="Text 13"/>
-          <p:cNvSpPr txBox="1"/>
-          <p:nvPr/>
-        </p:nvSpPr>
-        <p:spPr>
-          <a:xfrm>
-            <a:off x="10067544" y="4106355"/>
+          <p:cNvPr id="23" name="Text 19"/>
+          <p:cNvSpPr txBox="1"/>
+          <p:nvPr/>
+        </p:nvSpPr>
+        <p:spPr>
+          <a:xfrm>
+            <a:off x="10067544" y="5233797"/>
             <a:ext cx="1554480" cy="457200"/>
           </a:xfrm>
           <a:prstGeom prst="rect">
@@ -3117,13 +3372,13 @@
       </p:sp>
       <p:sp>
         <p:nvSpPr>
-          <p:cNvPr id="18" name="Text 14"/>
-          <p:cNvSpPr txBox="1"/>
-          <p:nvPr/>
-        </p:nvSpPr>
-        <p:spPr>
-          <a:xfrm>
-            <a:off x="10067544" y="4563555"/>
+          <p:cNvPr id="24" name="Text 20"/>
+          <p:cNvSpPr txBox="1"/>
+          <p:nvPr/>
+        </p:nvSpPr>
+        <p:spPr>
+          <a:xfrm>
+            <a:off x="10067544" y="5690997"/>
             <a:ext cx="1600200" cy="365760"/>
           </a:xfrm>
           <a:prstGeom prst="rect">
@@ -3156,13 +3411,13 @@
       </p:sp>
       <p:sp>
         <p:nvSpPr>
-          <p:cNvPr id="19" name="Text 15"/>
-          <p:cNvSpPr txBox="1"/>
-          <p:nvPr/>
-        </p:nvSpPr>
-        <p:spPr>
-          <a:xfrm>
-            <a:off x="6035040" y="5130483"/>
+          <p:cNvPr id="25" name="Text 21"/>
+          <p:cNvSpPr txBox="1"/>
+          <p:nvPr/>
+        </p:nvSpPr>
+        <p:spPr>
+          <a:xfrm>
+            <a:off x="6035040" y="6257925"/>
             <a:ext cx="5715000" cy="320040"/>
           </a:xfrm>
           <a:prstGeom prst="rect">
@@ -3195,7 +3450,7 @@
       </p:sp>
       <p:sp>
         <p:nvSpPr>
-          <p:cNvPr id="20" name="Text 16"/>
+          <p:cNvPr id="26" name="Text 22"/>
           <p:cNvSpPr txBox="1"/>
           <p:nvPr/>
         </p:nvSpPr>
@@ -3297,7 +3552,7 @@
                 <a:ea typeface="Calibri" pitchFamily="34" charset="-122"/>
                 <a:cs typeface="Calibri" pitchFamily="34" charset="-120"/>
               </a:rPr>
-              <a:t>10 / 12   ·   CUSTODY · TOKENISED ASSETS</a:t>
+              <a:t>10 / 13   ·   CUSTODY · TOKENISED ASSETS</a:t>
             </a:r>
             <a:endParaRPr lang="en-US" sz="1150" dirty="0"/>
           </a:p>
@@ -3945,7 +4200,7 @@
                 <a:ea typeface="Calibri" pitchFamily="34" charset="-122"/>
                 <a:cs typeface="Calibri" pitchFamily="34" charset="-120"/>
               </a:rPr>
-              <a:t>11 / 12   ·   HOW IT'S BUILT</a:t>
+              <a:t>11 / 13   ·   HOW IT'S BUILT</a:t>
             </a:r>
             <a:endParaRPr lang="en-US" sz="1150" dirty="0"/>
           </a:p>
@@ -3984,7 +4239,7 @@
                 <a:ea typeface="Arial" pitchFamily="34" charset="-122"/>
                 <a:cs typeface="Arial" pitchFamily="34" charset="-120"/>
               </a:rPr>
-              <a:t>Two blockchain layers. Only approved actions reach them.</a:t>
+              <a:t>Agents propose. Humans approve. Chains prove.</a:t>
             </a:r>
             <a:endParaRPr lang="en-US" sz="3000" dirty="0"/>
           </a:p>
@@ -3998,35 +4253,169 @@
         </p:nvSpPr>
         <p:spPr>
           <a:xfrm>
-            <a:off x="502920" y="1481328"/>
-            <a:ext cx="1600200" cy="658368"/>
+            <a:off x="466344" y="1563624"/>
+            <a:ext cx="5605272" cy="3805047"/>
           </a:xfrm>
           <a:prstGeom prst="roundRect">
             <a:avLst>
-              <a:gd name="adj" fmla="val 11111"/>
+              <a:gd name="adj" fmla="val 1682"/>
             </a:avLst>
           </a:prstGeom>
           <a:solidFill>
-            <a:srgbClr val="172A26"/>
-          </a:solidFill>
-          <a:ln w="12700">
-            <a:solidFill>
-              <a:srgbClr val="7FE0C2"/>
-            </a:solidFill>
-            <a:prstDash val="solid"/>
-          </a:ln>
-        </p:spPr>
-      </p:sp>
-      <p:sp>
-        <p:nvSpPr>
-          <p:cNvPr id="5" name="Text 3"/>
-          <p:cNvSpPr txBox="1"/>
-          <p:nvPr/>
-        </p:nvSpPr>
-        <p:spPr>
-          <a:xfrm>
-            <a:off x="566928" y="1481328"/>
-            <a:ext cx="1481328" cy="658368"/>
+            <a:srgbClr val="D9DFDD"/>
+          </a:solidFill>
+          <a:ln w="12700">
+            <a:solidFill>
+              <a:srgbClr val="D9DFDD"/>
+            </a:solidFill>
+            <a:prstDash val="solid"/>
+          </a:ln>
+          <a:effectLst>
+            <a:outerShdw sx="100000" sy="100000" kx="0" ky="0" algn="bl" rotWithShape="0" blurRad="203200" dist="76200" dir="5400000">
+              <a:srgbClr val="000000">
+                <a:alpha val="55000"/>
+              </a:srgbClr>
+            </a:outerShdw>
+          </a:effectLst>
+        </p:spPr>
+      </p:sp>
+      <p:sp>
+        <p:nvSpPr>
+          <p:cNvPr id="5" name="Shape 3"/>
+          <p:cNvSpPr/>
+          <p:nvPr/>
+        </p:nvSpPr>
+        <p:spPr>
+          <a:xfrm>
+            <a:off x="502920" y="1600200"/>
+            <a:ext cx="5532120" cy="274320"/>
+          </a:xfrm>
+          <a:prstGeom prst="rect">
+            <a:avLst/>
+          </a:prstGeom>
+          <a:solidFill>
+            <a:srgbClr val="ECEFEE"/>
+          </a:solidFill>
+          <a:ln w="12700">
+            <a:solidFill>
+              <a:srgbClr val="ECEFEE"/>
+            </a:solidFill>
+            <a:prstDash val="solid"/>
+          </a:ln>
+        </p:spPr>
+      </p:sp>
+      <p:sp>
+        <p:nvSpPr>
+          <p:cNvPr id="6" name="Shape 4"/>
+          <p:cNvSpPr/>
+          <p:nvPr/>
+        </p:nvSpPr>
+        <p:spPr>
+          <a:xfrm>
+            <a:off x="612648" y="1687068"/>
+            <a:ext cx="100584" cy="100584"/>
+          </a:xfrm>
+          <a:prstGeom prst="ellipse">
+            <a:avLst/>
+          </a:prstGeom>
+          <a:solidFill>
+            <a:srgbClr val="FF5F57"/>
+          </a:solidFill>
+          <a:ln w="12700">
+            <a:solidFill>
+              <a:srgbClr val="FF5F57"/>
+            </a:solidFill>
+            <a:prstDash val="solid"/>
+          </a:ln>
+        </p:spPr>
+      </p:sp>
+      <p:sp>
+        <p:nvSpPr>
+          <p:cNvPr id="7" name="Shape 5"/>
+          <p:cNvSpPr/>
+          <p:nvPr/>
+        </p:nvSpPr>
+        <p:spPr>
+          <a:xfrm>
+            <a:off x="768096" y="1687068"/>
+            <a:ext cx="100584" cy="100584"/>
+          </a:xfrm>
+          <a:prstGeom prst="ellipse">
+            <a:avLst/>
+          </a:prstGeom>
+          <a:solidFill>
+            <a:srgbClr val="FEBC2E"/>
+          </a:solidFill>
+          <a:ln w="12700">
+            <a:solidFill>
+              <a:srgbClr val="FEBC2E"/>
+            </a:solidFill>
+            <a:prstDash val="solid"/>
+          </a:ln>
+        </p:spPr>
+      </p:sp>
+      <p:sp>
+        <p:nvSpPr>
+          <p:cNvPr id="8" name="Shape 6"/>
+          <p:cNvSpPr/>
+          <p:nvPr/>
+        </p:nvSpPr>
+        <p:spPr>
+          <a:xfrm>
+            <a:off x="923544" y="1687068"/>
+            <a:ext cx="100584" cy="100584"/>
+          </a:xfrm>
+          <a:prstGeom prst="ellipse">
+            <a:avLst/>
+          </a:prstGeom>
+          <a:solidFill>
+            <a:srgbClr val="28C840"/>
+          </a:solidFill>
+          <a:ln w="12700">
+            <a:solidFill>
+              <a:srgbClr val="28C840"/>
+            </a:solidFill>
+            <a:prstDash val="solid"/>
+          </a:ln>
+        </p:spPr>
+      </p:sp>
+      <p:sp>
+        <p:nvSpPr>
+          <p:cNvPr id="9" name="Shape 7"/>
+          <p:cNvSpPr/>
+          <p:nvPr/>
+        </p:nvSpPr>
+        <p:spPr>
+          <a:xfrm>
+            <a:off x="1143000" y="1645920"/>
+            <a:ext cx="3840480" cy="182880"/>
+          </a:xfrm>
+          <a:prstGeom prst="roundRect">
+            <a:avLst>
+              <a:gd name="adj" fmla="val 25000"/>
+            </a:avLst>
+          </a:prstGeom>
+          <a:solidFill>
+            <a:srgbClr val="FFFFFF"/>
+          </a:solidFill>
+          <a:ln w="12700">
+            <a:solidFill>
+              <a:srgbClr val="D9DFDD"/>
+            </a:solidFill>
+            <a:prstDash val="solid"/>
+          </a:ln>
+        </p:spPr>
+      </p:sp>
+      <p:sp>
+        <p:nvSpPr>
+          <p:cNvPr id="10" name="Text 8"/>
+          <p:cNvSpPr txBox="1"/>
+          <p:nvPr/>
+        </p:nvSpPr>
+        <p:spPr>
+          <a:xfrm>
+            <a:off x="1234440" y="1645920"/>
+            <a:ext cx="3657600" cy="182880"/>
           </a:xfrm>
           <a:prstGeom prst="rect">
             <a:avLst/>
@@ -4038,2355 +4427,27 @@
           <a:bodyPr wrap="square" lIns="0" tIns="0" rIns="0" bIns="0" rtlCol="0" anchor="ctr"/>
           <a:lstStyle/>
           <a:p>
-            <a:pPr algn="ctr" indent="0" marL="0">
-              <a:spcBef>
-                <a:spcPts val="200"/>
-              </a:spcBef>
-              <a:buNone/>
-            </a:pPr>
-            <a:r>
-              <a:rPr lang="en-US" sz="1250" b="1" dirty="0">
-                <a:solidFill>
-                  <a:srgbClr val="7FE0C2"/>
-                </a:solidFill>
-                <a:latin typeface="Arial" pitchFamily="34" charset="0"/>
-                <a:ea typeface="Arial" pitchFamily="34" charset="-122"/>
-                <a:cs typeface="Arial" pitchFamily="34" charset="-120"/>
-              </a:rPr>
-              <a:t>PEOPLE</a:t>
-            </a:r>
-            <a:endParaRPr lang="en-US" sz="1250" dirty="0"/>
-          </a:p>
-          <a:p>
-            <a:pPr algn="ctr" indent="0" marL="0">
-              <a:spcBef>
-                <a:spcPts val="200"/>
-              </a:spcBef>
-              <a:buNone/>
-            </a:pPr>
-            <a:r>
-              <a:rPr lang="en-US" sz="950" dirty="0">
-                <a:solidFill>
-                  <a:srgbClr val="A9BDB7"/>
+            <a:pPr indent="0" marL="0">
+              <a:buNone/>
+            </a:pPr>
+            <a:r>
+              <a:rPr lang="en-US" sz="850" dirty="0">
+                <a:solidFill>
+                  <a:srgbClr val="4A5A56"/>
                 </a:solidFill>
                 <a:latin typeface="Calibri" pitchFamily="34" charset="0"/>
                 <a:ea typeface="Calibri" pitchFamily="34" charset="-122"/>
                 <a:cs typeface="Calibri" pitchFamily="34" charset="-120"/>
               </a:rPr>
-              <a:t>who uses it</a:t>
-            </a:r>
-            <a:endParaRPr lang="en-US" sz="1250" dirty="0"/>
-          </a:p>
-        </p:txBody>
-      </p:sp>
-      <p:sp>
-        <p:nvSpPr>
-          <p:cNvPr id="6" name="Shape 4"/>
-          <p:cNvSpPr/>
-          <p:nvPr/>
-        </p:nvSpPr>
-        <p:spPr>
-          <a:xfrm>
-            <a:off x="2286000" y="1481328"/>
-            <a:ext cx="2331720" cy="658368"/>
-          </a:xfrm>
-          <a:prstGeom prst="roundRect">
-            <a:avLst>
-              <a:gd name="adj" fmla="val 11111"/>
-            </a:avLst>
-          </a:prstGeom>
-          <a:solidFill>
-            <a:srgbClr val="12201D"/>
-          </a:solidFill>
-          <a:ln w="12700">
-            <a:solidFill>
-              <a:srgbClr val="7FE0C2"/>
-            </a:solidFill>
-            <a:prstDash val="solid"/>
-          </a:ln>
-        </p:spPr>
-      </p:sp>
-      <p:sp>
-        <p:nvSpPr>
-          <p:cNvPr id="7" name="Text 5"/>
-          <p:cNvSpPr txBox="1"/>
-          <p:nvPr/>
-        </p:nvSpPr>
-        <p:spPr>
-          <a:xfrm>
-            <a:off x="2377440" y="1545336"/>
-            <a:ext cx="2148840" cy="310896"/>
-          </a:xfrm>
-          <a:prstGeom prst="rect">
-            <a:avLst/>
-          </a:prstGeom>
-          <a:noFill/>
-          <a:ln/>
-        </p:spPr>
-        <p:txBody>
-          <a:bodyPr wrap="square" lIns="0" tIns="0" rIns="0" bIns="0" rtlCol="0" anchor="ctr"/>
-          <a:lstStyle/>
-          <a:p>
-            <a:pPr algn="ctr" indent="0" marL="0">
-              <a:buNone/>
-            </a:pPr>
-            <a:r>
-              <a:rPr lang="en-US" sz="1250" b="1" dirty="0">
-                <a:solidFill>
-                  <a:srgbClr val="7FE0C2"/>
-                </a:solidFill>
-                <a:latin typeface="Arial" pitchFamily="34" charset="0"/>
-                <a:ea typeface="Arial" pitchFamily="34" charset="-122"/>
-                <a:cs typeface="Arial" pitchFamily="34" charset="-120"/>
-              </a:rPr>
-              <a:t>Investors</a:t>
-            </a:r>
-            <a:endParaRPr lang="en-US" sz="1250" dirty="0"/>
-          </a:p>
-        </p:txBody>
-      </p:sp>
-      <p:sp>
-        <p:nvSpPr>
-          <p:cNvPr id="8" name="Text 6"/>
-          <p:cNvSpPr txBox="1"/>
-          <p:nvPr/>
-        </p:nvSpPr>
-        <p:spPr>
-          <a:xfrm>
-            <a:off x="2377440" y="1847088"/>
-            <a:ext cx="2148840" cy="246888"/>
-          </a:xfrm>
-          <a:prstGeom prst="rect">
-            <a:avLst/>
-          </a:prstGeom>
-          <a:noFill/>
-          <a:ln/>
-        </p:spPr>
-        <p:txBody>
-          <a:bodyPr wrap="square" lIns="0" tIns="0" rIns="0" bIns="0" rtlCol="0" anchor="t"/>
-          <a:lstStyle/>
-          <a:p>
-            <a:pPr algn="ctr" indent="0" marL="0">
-              <a:buNone/>
-            </a:pPr>
-            <a:r>
-              <a:rPr lang="en-US" sz="950" dirty="0">
-                <a:solidFill>
-                  <a:srgbClr val="F2F7F5"/>
-                </a:solidFill>
-                <a:latin typeface="Calibri" pitchFamily="34" charset="0"/>
-                <a:ea typeface="Calibri" pitchFamily="34" charset="-122"/>
-                <a:cs typeface="Calibri" pitchFamily="34" charset="-120"/>
-              </a:rPr>
-              <a:t>portfolio · updates · dividends</a:t>
-            </a:r>
-            <a:endParaRPr lang="en-US" sz="950" dirty="0"/>
-          </a:p>
-        </p:txBody>
-      </p:sp>
-      <p:sp>
-        <p:nvSpPr>
-          <p:cNvPr id="9" name="Shape 7"/>
-          <p:cNvSpPr/>
-          <p:nvPr/>
-        </p:nvSpPr>
-        <p:spPr>
-          <a:xfrm>
-            <a:off x="4754880" y="1481328"/>
-            <a:ext cx="2331720" cy="658368"/>
-          </a:xfrm>
-          <a:prstGeom prst="roundRect">
-            <a:avLst>
-              <a:gd name="adj" fmla="val 11111"/>
-            </a:avLst>
-          </a:prstGeom>
-          <a:solidFill>
-            <a:srgbClr val="12201D"/>
-          </a:solidFill>
-          <a:ln w="12700">
-            <a:solidFill>
-              <a:srgbClr val="7FE0C2"/>
-            </a:solidFill>
-            <a:prstDash val="solid"/>
-          </a:ln>
-        </p:spPr>
-      </p:sp>
-      <p:sp>
-        <p:nvSpPr>
-          <p:cNvPr id="10" name="Text 8"/>
-          <p:cNvSpPr txBox="1"/>
-          <p:nvPr/>
-        </p:nvSpPr>
-        <p:spPr>
-          <a:xfrm>
-            <a:off x="4846320" y="1545336"/>
-            <a:ext cx="2148840" cy="310896"/>
-          </a:xfrm>
-          <a:prstGeom prst="rect">
-            <a:avLst/>
-          </a:prstGeom>
-          <a:noFill/>
-          <a:ln/>
-        </p:spPr>
-        <p:txBody>
-          <a:bodyPr wrap="square" lIns="0" tIns="0" rIns="0" bIns="0" rtlCol="0" anchor="ctr"/>
-          <a:lstStyle/>
-          <a:p>
-            <a:pPr algn="ctr" indent="0" marL="0">
-              <a:buNone/>
-            </a:pPr>
-            <a:r>
-              <a:rPr lang="en-US" sz="1250" b="1" dirty="0">
-                <a:solidFill>
-                  <a:srgbClr val="7FE0C2"/>
-                </a:solidFill>
-                <a:latin typeface="Arial" pitchFamily="34" charset="0"/>
-                <a:ea typeface="Arial" pitchFamily="34" charset="-122"/>
-                <a:cs typeface="Arial" pitchFamily="34" charset="-120"/>
-              </a:rPr>
-              <a:t>Businesses</a:t>
-            </a:r>
-            <a:endParaRPr lang="en-US" sz="1250" dirty="0"/>
-          </a:p>
-        </p:txBody>
-      </p:sp>
-      <p:sp>
-        <p:nvSpPr>
-          <p:cNvPr id="11" name="Text 9"/>
-          <p:cNvSpPr txBox="1"/>
-          <p:nvPr/>
-        </p:nvSpPr>
-        <p:spPr>
-          <a:xfrm>
-            <a:off x="4846320" y="1847088"/>
-            <a:ext cx="2148840" cy="246888"/>
-          </a:xfrm>
-          <a:prstGeom prst="rect">
-            <a:avLst/>
-          </a:prstGeom>
-          <a:noFill/>
-          <a:ln/>
-        </p:spPr>
-        <p:txBody>
-          <a:bodyPr wrap="square" lIns="0" tIns="0" rIns="0" bIns="0" rtlCol="0" anchor="t"/>
-          <a:lstStyle/>
-          <a:p>
-            <a:pPr algn="ctr" indent="0" marL="0">
-              <a:buNone/>
-            </a:pPr>
-            <a:r>
-              <a:rPr lang="en-US" sz="950" dirty="0">
-                <a:solidFill>
-                  <a:srgbClr val="F2F7F5"/>
-                </a:solidFill>
-                <a:latin typeface="Calibri" pitchFamily="34" charset="0"/>
-                <a:ea typeface="Calibri" pitchFamily="34" charset="-122"/>
-                <a:cs typeface="Calibri" pitchFamily="34" charset="-120"/>
-              </a:rPr>
-              <a:t>list · shareholders · updates</a:t>
-            </a:r>
-            <a:endParaRPr lang="en-US" sz="950" dirty="0"/>
-          </a:p>
-        </p:txBody>
-      </p:sp>
-      <p:sp>
-        <p:nvSpPr>
-          <p:cNvPr id="12" name="Shape 10"/>
-          <p:cNvSpPr/>
-          <p:nvPr/>
-        </p:nvSpPr>
-        <p:spPr>
-          <a:xfrm>
-            <a:off x="7223760" y="1481328"/>
-            <a:ext cx="2331720" cy="658368"/>
-          </a:xfrm>
-          <a:prstGeom prst="roundRect">
-            <a:avLst>
-              <a:gd name="adj" fmla="val 11111"/>
-            </a:avLst>
-          </a:prstGeom>
-          <a:solidFill>
-            <a:srgbClr val="12201D"/>
-          </a:solidFill>
-          <a:ln w="12700">
-            <a:solidFill>
-              <a:srgbClr val="E3A83A"/>
-            </a:solidFill>
-            <a:prstDash val="solid"/>
-          </a:ln>
-        </p:spPr>
-      </p:sp>
-      <p:sp>
-        <p:nvSpPr>
-          <p:cNvPr id="13" name="Text 11"/>
-          <p:cNvSpPr txBox="1"/>
-          <p:nvPr/>
-        </p:nvSpPr>
-        <p:spPr>
-          <a:xfrm>
-            <a:off x="7315200" y="1545336"/>
-            <a:ext cx="2148840" cy="310896"/>
-          </a:xfrm>
-          <a:prstGeom prst="rect">
-            <a:avLst/>
-          </a:prstGeom>
-          <a:noFill/>
-          <a:ln/>
-        </p:spPr>
-        <p:txBody>
-          <a:bodyPr wrap="square" lIns="0" tIns="0" rIns="0" bIns="0" rtlCol="0" anchor="ctr"/>
-          <a:lstStyle/>
-          <a:p>
-            <a:pPr algn="ctr" indent="0" marL="0">
-              <a:buNone/>
-            </a:pPr>
-            <a:r>
-              <a:rPr lang="en-US" sz="1250" b="1" dirty="0">
-                <a:solidFill>
-                  <a:srgbClr val="E3A83A"/>
-                </a:solidFill>
-                <a:latin typeface="Arial" pitchFamily="34" charset="0"/>
-                <a:ea typeface="Arial" pitchFamily="34" charset="-122"/>
-                <a:cs typeface="Arial" pitchFamily="34" charset="-120"/>
-              </a:rPr>
-              <a:t>Approvers</a:t>
-            </a:r>
-            <a:endParaRPr lang="en-US" sz="1250" dirty="0"/>
-          </a:p>
-        </p:txBody>
-      </p:sp>
-      <p:sp>
-        <p:nvSpPr>
-          <p:cNvPr id="14" name="Text 12"/>
-          <p:cNvSpPr txBox="1"/>
-          <p:nvPr/>
-        </p:nvSpPr>
-        <p:spPr>
-          <a:xfrm>
-            <a:off x="7315200" y="1847088"/>
-            <a:ext cx="2148840" cy="246888"/>
-          </a:xfrm>
-          <a:prstGeom prst="rect">
-            <a:avLst/>
-          </a:prstGeom>
-          <a:noFill/>
-          <a:ln/>
-        </p:spPr>
-        <p:txBody>
-          <a:bodyPr wrap="square" lIns="0" tIns="0" rIns="0" bIns="0" rtlCol="0" anchor="t"/>
-          <a:lstStyle/>
-          <a:p>
-            <a:pPr algn="ctr" indent="0" marL="0">
-              <a:buNone/>
-            </a:pPr>
-            <a:r>
-              <a:rPr lang="en-US" sz="950" dirty="0">
-                <a:solidFill>
-                  <a:srgbClr val="F2F7F5"/>
-                </a:solidFill>
-                <a:latin typeface="Calibri" pitchFamily="34" charset="0"/>
-                <a:ea typeface="Calibri" pitchFamily="34" charset="-122"/>
-                <a:cs typeface="Calibri" pitchFamily="34" charset="-120"/>
-              </a:rPr>
-              <a:t>a person signs every step</a:t>
-            </a:r>
-            <a:endParaRPr lang="en-US" sz="950" dirty="0"/>
-          </a:p>
-        </p:txBody>
-      </p:sp>
-      <p:sp>
-        <p:nvSpPr>
-          <p:cNvPr id="15" name="Shape 13"/>
-          <p:cNvSpPr/>
-          <p:nvPr/>
-        </p:nvSpPr>
-        <p:spPr>
-          <a:xfrm>
-            <a:off x="502920" y="2395728"/>
-            <a:ext cx="1600200" cy="960120"/>
-          </a:xfrm>
-          <a:prstGeom prst="roundRect">
-            <a:avLst>
-              <a:gd name="adj" fmla="val 7619"/>
-            </a:avLst>
-          </a:prstGeom>
-          <a:solidFill>
-            <a:srgbClr val="172A26"/>
-          </a:solidFill>
-          <a:ln w="12700">
-            <a:solidFill>
-              <a:srgbClr val="22A07F"/>
-            </a:solidFill>
-            <a:prstDash val="solid"/>
-          </a:ln>
-        </p:spPr>
-      </p:sp>
-      <p:sp>
-        <p:nvSpPr>
-          <p:cNvPr id="16" name="Text 14"/>
-          <p:cNvSpPr txBox="1"/>
-          <p:nvPr/>
-        </p:nvSpPr>
-        <p:spPr>
-          <a:xfrm>
-            <a:off x="566928" y="2395728"/>
-            <a:ext cx="1481328" cy="960120"/>
-          </a:xfrm>
-          <a:prstGeom prst="rect">
-            <a:avLst/>
-          </a:prstGeom>
-          <a:noFill/>
-          <a:ln/>
-        </p:spPr>
-        <p:txBody>
-          <a:bodyPr wrap="square" lIns="0" tIns="0" rIns="0" bIns="0" rtlCol="0" anchor="ctr"/>
-          <a:lstStyle/>
-          <a:p>
-            <a:pPr algn="ctr" indent="0" marL="0">
-              <a:spcBef>
-                <a:spcPts val="200"/>
-              </a:spcBef>
-              <a:buNone/>
-            </a:pPr>
-            <a:r>
-              <a:rPr lang="en-US" sz="1250" b="1" dirty="0">
-                <a:solidFill>
-                  <a:srgbClr val="22A07F"/>
-                </a:solidFill>
-                <a:latin typeface="Arial" pitchFamily="34" charset="0"/>
-                <a:ea typeface="Arial" pitchFamily="34" charset="-122"/>
-                <a:cs typeface="Arial" pitchFamily="34" charset="-120"/>
-              </a:rPr>
-              <a:t>APP &amp; SERVICES</a:t>
-            </a:r>
-            <a:endParaRPr lang="en-US" sz="1250" dirty="0"/>
-          </a:p>
-          <a:p>
-            <a:pPr algn="ctr" indent="0" marL="0">
-              <a:spcBef>
-                <a:spcPts val="200"/>
-              </a:spcBef>
-              <a:buNone/>
-            </a:pPr>
-            <a:r>
-              <a:rPr lang="en-US" sz="950" dirty="0">
-                <a:solidFill>
-                  <a:srgbClr val="A9BDB7"/>
-                </a:solidFill>
-                <a:latin typeface="Calibri" pitchFamily="34" charset="0"/>
-                <a:ea typeface="Calibri" pitchFamily="34" charset="-122"/>
-                <a:cs typeface="Calibri" pitchFamily="34" charset="-120"/>
-              </a:rPr>
-              <a:t>off-chain, no keys except issuer</a:t>
-            </a:r>
-            <a:endParaRPr lang="en-US" sz="1250" dirty="0"/>
-          </a:p>
-        </p:txBody>
-      </p:sp>
-      <p:sp>
-        <p:nvSpPr>
-          <p:cNvPr id="17" name="Shape 15"/>
-          <p:cNvSpPr/>
-          <p:nvPr/>
-        </p:nvSpPr>
-        <p:spPr>
-          <a:xfrm>
-            <a:off x="2286000" y="2395728"/>
-            <a:ext cx="1737360" cy="960120"/>
-          </a:xfrm>
-          <a:prstGeom prst="roundRect">
-            <a:avLst>
-              <a:gd name="adj" fmla="val 7619"/>
-            </a:avLst>
-          </a:prstGeom>
-          <a:solidFill>
-            <a:srgbClr val="12201D"/>
-          </a:solidFill>
-          <a:ln w="12700">
-            <a:solidFill>
-              <a:srgbClr val="22A07F"/>
-            </a:solidFill>
-            <a:prstDash val="solid"/>
-          </a:ln>
-        </p:spPr>
-      </p:sp>
-      <p:sp>
-        <p:nvSpPr>
-          <p:cNvPr id="18" name="Text 16"/>
-          <p:cNvSpPr txBox="1"/>
-          <p:nvPr/>
-        </p:nvSpPr>
-        <p:spPr>
-          <a:xfrm>
-            <a:off x="2377440" y="2459736"/>
-            <a:ext cx="1554480" cy="310896"/>
-          </a:xfrm>
-          <a:prstGeom prst="rect">
-            <a:avLst/>
-          </a:prstGeom>
-          <a:noFill/>
-          <a:ln/>
-        </p:spPr>
-        <p:txBody>
-          <a:bodyPr wrap="square" lIns="0" tIns="0" rIns="0" bIns="0" rtlCol="0" anchor="ctr"/>
-          <a:lstStyle/>
-          <a:p>
-            <a:pPr algn="ctr" indent="0" marL="0">
-              <a:buNone/>
-            </a:pPr>
-            <a:r>
-              <a:rPr lang="en-US" sz="1250" b="1" dirty="0">
-                <a:solidFill>
-                  <a:srgbClr val="22A07F"/>
-                </a:solidFill>
-                <a:latin typeface="Arial" pitchFamily="34" charset="0"/>
-                <a:ea typeface="Arial" pitchFamily="34" charset="-122"/>
-                <a:cs typeface="Arial" pitchFamily="34" charset="-120"/>
-              </a:rPr>
-              <a:t>Web app</a:t>
-            </a:r>
-            <a:endParaRPr lang="en-US" sz="1250" dirty="0"/>
-          </a:p>
-        </p:txBody>
-      </p:sp>
-      <p:sp>
-        <p:nvSpPr>
-          <p:cNvPr id="19" name="Text 17"/>
-          <p:cNvSpPr txBox="1"/>
-          <p:nvPr/>
-        </p:nvSpPr>
-        <p:spPr>
-          <a:xfrm>
-            <a:off x="2377440" y="2761488"/>
-            <a:ext cx="1554480" cy="548640"/>
-          </a:xfrm>
-          <a:prstGeom prst="rect">
-            <a:avLst/>
-          </a:prstGeom>
-          <a:noFill/>
-          <a:ln/>
-        </p:spPr>
-        <p:txBody>
-          <a:bodyPr wrap="square" lIns="0" tIns="0" rIns="0" bIns="0" rtlCol="0" anchor="t"/>
-          <a:lstStyle/>
-          <a:p>
-            <a:pPr algn="ctr" indent="0" marL="0">
-              <a:buNone/>
-            </a:pPr>
-            <a:r>
-              <a:rPr lang="en-US" sz="950" dirty="0">
-                <a:solidFill>
-                  <a:srgbClr val="F2F7F5"/>
-                </a:solidFill>
-                <a:latin typeface="Calibri" pitchFamily="34" charset="0"/>
-                <a:ea typeface="Calibri" pitchFamily="34" charset="-122"/>
-                <a:cs typeface="Calibri" pitchFamily="34" charset="-120"/>
-              </a:rPr>
-              <a:t>eth.blockid.au</a:t>
-            </a:r>
-            <a:endParaRPr lang="en-US" sz="950" dirty="0"/>
-          </a:p>
-          <a:p>
-            <a:pPr algn="ctr" indent="0" marL="0">
-              <a:buNone/>
-            </a:pPr>
-            <a:r>
-              <a:rPr lang="en-US" sz="950" dirty="0">
-                <a:solidFill>
-                  <a:srgbClr val="F2F7F5"/>
-                </a:solidFill>
-                <a:latin typeface="Calibri" pitchFamily="34" charset="0"/>
-                <a:ea typeface="Calibri" pitchFamily="34" charset="-122"/>
-                <a:cs typeface="Calibri" pitchFamily="34" charset="-120"/>
-              </a:rPr>
-              <a:t>Google · browser key · MetaMask</a:t>
-            </a:r>
-            <a:endParaRPr lang="en-US" sz="950" dirty="0"/>
-          </a:p>
-        </p:txBody>
-      </p:sp>
-      <p:sp>
-        <p:nvSpPr>
-          <p:cNvPr id="20" name="Shape 18"/>
-          <p:cNvSpPr/>
-          <p:nvPr/>
-        </p:nvSpPr>
-        <p:spPr>
-          <a:xfrm>
-            <a:off x="4160520" y="2395728"/>
-            <a:ext cx="1737360" cy="960120"/>
-          </a:xfrm>
-          <a:prstGeom prst="roundRect">
-            <a:avLst>
-              <a:gd name="adj" fmla="val 7619"/>
-            </a:avLst>
-          </a:prstGeom>
-          <a:solidFill>
-            <a:srgbClr val="12201D"/>
-          </a:solidFill>
-          <a:ln w="12700">
-            <a:solidFill>
-              <a:srgbClr val="22A07F"/>
-            </a:solidFill>
-            <a:prstDash val="solid"/>
-          </a:ln>
-        </p:spPr>
-      </p:sp>
-      <p:sp>
-        <p:nvSpPr>
-          <p:cNvPr id="21" name="Text 19"/>
-          <p:cNvSpPr txBox="1"/>
-          <p:nvPr/>
-        </p:nvSpPr>
-        <p:spPr>
-          <a:xfrm>
-            <a:off x="4251960" y="2459736"/>
-            <a:ext cx="1554480" cy="310896"/>
-          </a:xfrm>
-          <a:prstGeom prst="rect">
-            <a:avLst/>
-          </a:prstGeom>
-          <a:noFill/>
-          <a:ln/>
-        </p:spPr>
-        <p:txBody>
-          <a:bodyPr wrap="square" lIns="0" tIns="0" rIns="0" bIns="0" rtlCol="0" anchor="ctr"/>
-          <a:lstStyle/>
-          <a:p>
-            <a:pPr algn="ctr" indent="0" marL="0">
-              <a:buNone/>
-            </a:pPr>
-            <a:r>
-              <a:rPr lang="en-US" sz="1250" b="1" dirty="0">
-                <a:solidFill>
-                  <a:srgbClr val="22A07F"/>
-                </a:solidFill>
-                <a:latin typeface="Arial" pitchFamily="34" charset="0"/>
-                <a:ea typeface="Arial" pitchFamily="34" charset="-122"/>
-                <a:cs typeface="Arial" pitchFamily="34" charset="-120"/>
-              </a:rPr>
-              <a:t>Analysis</a:t>
-            </a:r>
-            <a:endParaRPr lang="en-US" sz="1250" dirty="0"/>
-          </a:p>
-        </p:txBody>
-      </p:sp>
-      <p:sp>
-        <p:nvSpPr>
-          <p:cNvPr id="22" name="Text 20"/>
-          <p:cNvSpPr txBox="1"/>
-          <p:nvPr/>
-        </p:nvSpPr>
-        <p:spPr>
-          <a:xfrm>
-            <a:off x="4251960" y="2761488"/>
-            <a:ext cx="1554480" cy="548640"/>
-          </a:xfrm>
-          <a:prstGeom prst="rect">
-            <a:avLst/>
-          </a:prstGeom>
-          <a:noFill/>
-          <a:ln/>
-        </p:spPr>
-        <p:txBody>
-          <a:bodyPr wrap="square" lIns="0" tIns="0" rIns="0" bIns="0" rtlCol="0" anchor="t"/>
-          <a:lstStyle/>
-          <a:p>
-            <a:pPr algn="ctr" indent="0" marL="0">
-              <a:buNone/>
-            </a:pPr>
-            <a:r>
-              <a:rPr lang="en-US" sz="950" dirty="0">
-                <a:solidFill>
-                  <a:srgbClr val="F2F7F5"/>
-                </a:solidFill>
-                <a:latin typeface="Calibri" pitchFamily="34" charset="0"/>
-                <a:ea typeface="Calibri" pitchFamily="34" charset="-122"/>
-                <a:cs typeface="Calibri" pitchFamily="34" charset="-120"/>
-              </a:rPr>
-              <a:t>AI reads sources,</a:t>
-            </a:r>
-            <a:endParaRPr lang="en-US" sz="950" dirty="0"/>
-          </a:p>
-          <a:p>
-            <a:pPr algn="ctr" indent="0" marL="0">
-              <a:buNone/>
-            </a:pPr>
-            <a:r>
-              <a:rPr lang="en-US" sz="950" dirty="0">
-                <a:solidFill>
-                  <a:srgbClr val="F2F7F5"/>
-                </a:solidFill>
-                <a:latin typeface="Calibri" pitchFamily="34" charset="0"/>
-                <a:ea typeface="Calibri" pitchFamily="34" charset="-122"/>
-                <a:cs typeface="Calibri" pitchFamily="34" charset="-120"/>
-              </a:rPr>
-              <a:t>formula sets value</a:t>
-            </a:r>
-            <a:endParaRPr lang="en-US" sz="950" dirty="0"/>
-          </a:p>
-          <a:p>
-            <a:pPr algn="ctr" indent="0" marL="0">
-              <a:buNone/>
-            </a:pPr>
-            <a:r>
-              <a:rPr lang="en-US" sz="950" dirty="0">
-                <a:solidFill>
-                  <a:srgbClr val="F2F7F5"/>
-                </a:solidFill>
-                <a:latin typeface="Calibri" pitchFamily="34" charset="0"/>
-                <a:ea typeface="Calibri" pitchFamily="34" charset="-122"/>
-                <a:cs typeface="Calibri" pitchFamily="34" charset="-120"/>
-              </a:rPr>
-              <a:t>(no keys)</a:t>
-            </a:r>
-            <a:endParaRPr lang="en-US" sz="950" dirty="0"/>
-          </a:p>
-        </p:txBody>
-      </p:sp>
-      <p:sp>
-        <p:nvSpPr>
-          <p:cNvPr id="23" name="Shape 21"/>
-          <p:cNvSpPr/>
-          <p:nvPr/>
-        </p:nvSpPr>
-        <p:spPr>
-          <a:xfrm>
-            <a:off x="6035040" y="2395728"/>
-            <a:ext cx="1600200" cy="960120"/>
-          </a:xfrm>
-          <a:prstGeom prst="roundRect">
-            <a:avLst>
-              <a:gd name="adj" fmla="val 7619"/>
-            </a:avLst>
-          </a:prstGeom>
-          <a:solidFill>
-            <a:srgbClr val="12201D"/>
-          </a:solidFill>
-          <a:ln w="12700">
-            <a:solidFill>
-              <a:srgbClr val="E3A83A"/>
-            </a:solidFill>
-            <a:prstDash val="solid"/>
-          </a:ln>
-        </p:spPr>
-      </p:sp>
-      <p:sp>
-        <p:nvSpPr>
-          <p:cNvPr id="24" name="Text 22"/>
-          <p:cNvSpPr txBox="1"/>
-          <p:nvPr/>
-        </p:nvSpPr>
-        <p:spPr>
-          <a:xfrm>
-            <a:off x="6126480" y="2459736"/>
-            <a:ext cx="1417320" cy="310896"/>
-          </a:xfrm>
-          <a:prstGeom prst="rect">
-            <a:avLst/>
-          </a:prstGeom>
-          <a:noFill/>
-          <a:ln/>
-        </p:spPr>
-        <p:txBody>
-          <a:bodyPr wrap="square" lIns="0" tIns="0" rIns="0" bIns="0" rtlCol="0" anchor="ctr"/>
-          <a:lstStyle/>
-          <a:p>
-            <a:pPr algn="ctr" indent="0" marL="0">
-              <a:buNone/>
-            </a:pPr>
-            <a:r>
-              <a:rPr lang="en-US" sz="1250" b="1" dirty="0">
-                <a:solidFill>
-                  <a:srgbClr val="E3A83A"/>
-                </a:solidFill>
-                <a:latin typeface="Arial" pitchFamily="34" charset="0"/>
-                <a:ea typeface="Arial" pitchFamily="34" charset="-122"/>
-                <a:cs typeface="Arial" pitchFamily="34" charset="-120"/>
-              </a:rPr>
-              <a:t>Approval</a:t>
-            </a:r>
-            <a:endParaRPr lang="en-US" sz="1250" dirty="0"/>
-          </a:p>
-        </p:txBody>
-      </p:sp>
-      <p:sp>
-        <p:nvSpPr>
-          <p:cNvPr id="25" name="Text 23"/>
-          <p:cNvSpPr txBox="1"/>
-          <p:nvPr/>
-        </p:nvSpPr>
-        <p:spPr>
-          <a:xfrm>
-            <a:off x="6126480" y="2761488"/>
-            <a:ext cx="1417320" cy="548640"/>
-          </a:xfrm>
-          <a:prstGeom prst="rect">
-            <a:avLst/>
-          </a:prstGeom>
-          <a:noFill/>
-          <a:ln/>
-        </p:spPr>
-        <p:txBody>
-          <a:bodyPr wrap="square" lIns="0" tIns="0" rIns="0" bIns="0" rtlCol="0" anchor="t"/>
-          <a:lstStyle/>
-          <a:p>
-            <a:pPr algn="ctr" indent="0" marL="0">
-              <a:buNone/>
-            </a:pPr>
-            <a:r>
-              <a:rPr lang="en-US" sz="950" dirty="0">
-                <a:solidFill>
-                  <a:srgbClr val="F2F7F5"/>
-                </a:solidFill>
-                <a:latin typeface="Calibri" pitchFamily="34" charset="0"/>
-                <a:ea typeface="Calibri" pitchFamily="34" charset="-122"/>
-                <a:cs typeface="Calibri" pitchFamily="34" charset="-120"/>
-              </a:rPr>
-              <a:t>admin wallet signs</a:t>
-            </a:r>
-            <a:endParaRPr lang="en-US" sz="950" dirty="0"/>
-          </a:p>
-          <a:p>
-            <a:pPr algn="ctr" indent="0" marL="0">
-              <a:buNone/>
-            </a:pPr>
-            <a:r>
-              <a:rPr lang="en-US" sz="950" dirty="0">
-                <a:solidFill>
-                  <a:srgbClr val="F2F7F5"/>
-                </a:solidFill>
-                <a:latin typeface="Calibri" pitchFamily="34" charset="0"/>
-                <a:ea typeface="Calibri" pitchFamily="34" charset="-122"/>
-                <a:cs typeface="Calibri" pitchFamily="34" charset="-120"/>
-              </a:rPr>
-              <a:t>one approval</a:t>
-            </a:r>
-            <a:endParaRPr lang="en-US" sz="950" dirty="0"/>
-          </a:p>
-        </p:txBody>
-      </p:sp>
-      <p:sp>
-        <p:nvSpPr>
-          <p:cNvPr id="26" name="Shape 24"/>
-          <p:cNvSpPr/>
-          <p:nvPr/>
-        </p:nvSpPr>
-        <p:spPr>
-          <a:xfrm>
-            <a:off x="7772400" y="2395728"/>
-            <a:ext cx="1783080" cy="960120"/>
-          </a:xfrm>
-          <a:prstGeom prst="roundRect">
-            <a:avLst>
-              <a:gd name="adj" fmla="val 7619"/>
-            </a:avLst>
-          </a:prstGeom>
-          <a:solidFill>
-            <a:srgbClr val="12201D"/>
-          </a:solidFill>
-          <a:ln w="12700">
-            <a:solidFill>
-              <a:srgbClr val="E4675A"/>
-            </a:solidFill>
-            <a:prstDash val="solid"/>
-          </a:ln>
-        </p:spPr>
-      </p:sp>
-      <p:sp>
-        <p:nvSpPr>
-          <p:cNvPr id="27" name="Text 25"/>
-          <p:cNvSpPr txBox="1"/>
-          <p:nvPr/>
-        </p:nvSpPr>
-        <p:spPr>
-          <a:xfrm>
-            <a:off x="7863840" y="2459736"/>
-            <a:ext cx="1600200" cy="310896"/>
-          </a:xfrm>
-          <a:prstGeom prst="rect">
-            <a:avLst/>
-          </a:prstGeom>
-          <a:noFill/>
-          <a:ln/>
-        </p:spPr>
-        <p:txBody>
-          <a:bodyPr wrap="square" lIns="0" tIns="0" rIns="0" bIns="0" rtlCol="0" anchor="ctr"/>
-          <a:lstStyle/>
-          <a:p>
-            <a:pPr algn="ctr" indent="0" marL="0">
-              <a:buNone/>
-            </a:pPr>
-            <a:r>
-              <a:rPr lang="en-US" sz="1250" b="1" dirty="0">
-                <a:solidFill>
-                  <a:srgbClr val="E4675A"/>
-                </a:solidFill>
-                <a:latin typeface="Arial" pitchFamily="34" charset="0"/>
-                <a:ea typeface="Arial" pitchFamily="34" charset="-122"/>
-                <a:cs typeface="Arial" pitchFamily="34" charset="-120"/>
-              </a:rPr>
-              <a:t>Issuer</a:t>
-            </a:r>
-            <a:endParaRPr lang="en-US" sz="1250" dirty="0"/>
-          </a:p>
-        </p:txBody>
-      </p:sp>
-      <p:sp>
-        <p:nvSpPr>
-          <p:cNvPr id="28" name="Text 26"/>
-          <p:cNvSpPr txBox="1"/>
-          <p:nvPr/>
-        </p:nvSpPr>
-        <p:spPr>
-          <a:xfrm>
-            <a:off x="7863840" y="2761488"/>
-            <a:ext cx="1600200" cy="548640"/>
-          </a:xfrm>
-          <a:prstGeom prst="rect">
-            <a:avLst/>
-          </a:prstGeom>
-          <a:noFill/>
-          <a:ln/>
-        </p:spPr>
-        <p:txBody>
-          <a:bodyPr wrap="square" lIns="0" tIns="0" rIns="0" bIns="0" rtlCol="0" anchor="t"/>
-          <a:lstStyle/>
-          <a:p>
-            <a:pPr algn="ctr" indent="0" marL="0">
-              <a:buNone/>
-            </a:pPr>
-            <a:r>
-              <a:rPr lang="en-US" sz="950" dirty="0">
-                <a:solidFill>
-                  <a:srgbClr val="F2F7F5"/>
-                </a:solidFill>
-                <a:latin typeface="Calibri" pitchFamily="34" charset="0"/>
-                <a:ea typeface="Calibri" pitchFamily="34" charset="-122"/>
-                <a:cs typeface="Calibri" pitchFamily="34" charset="-120"/>
-              </a:rPr>
-              <a:t>only key holder</a:t>
-            </a:r>
-            <a:endParaRPr lang="en-US" sz="950" dirty="0"/>
-          </a:p>
-          <a:p>
-            <a:pPr algn="ctr" indent="0" marL="0">
-              <a:buNone/>
-            </a:pPr>
-            <a:r>
-              <a:rPr lang="en-US" sz="950" dirty="0">
-                <a:solidFill>
-                  <a:srgbClr val="F2F7F5"/>
-                </a:solidFill>
-                <a:latin typeface="Calibri" pitchFamily="34" charset="0"/>
-                <a:ea typeface="Calibri" pitchFamily="34" charset="-122"/>
-                <a:cs typeface="Calibri" pitchFamily="34" charset="-120"/>
-              </a:rPr>
-              <a:t>isolated network</a:t>
-            </a:r>
-            <a:endParaRPr lang="en-US" sz="950" dirty="0"/>
-          </a:p>
-          <a:p>
-            <a:pPr algn="ctr" indent="0" marL="0">
-              <a:buNone/>
-            </a:pPr>
-            <a:r>
-              <a:rPr lang="en-US" sz="950" dirty="0">
-                <a:solidFill>
-                  <a:srgbClr val="F2F7F5"/>
-                </a:solidFill>
-                <a:latin typeface="Calibri" pitchFamily="34" charset="0"/>
-                <a:ea typeface="Calibri" pitchFamily="34" charset="-122"/>
-                <a:cs typeface="Calibri" pitchFamily="34" charset="-120"/>
-              </a:rPr>
-              <a:t>acts on approved rows</a:t>
-            </a:r>
-            <a:endParaRPr lang="en-US" sz="950" dirty="0"/>
-          </a:p>
-        </p:txBody>
-      </p:sp>
-      <p:sp>
-        <p:nvSpPr>
-          <p:cNvPr id="29" name="Shape 27"/>
-          <p:cNvSpPr/>
-          <p:nvPr/>
-        </p:nvSpPr>
-        <p:spPr>
-          <a:xfrm>
-            <a:off x="4032504" y="2880360"/>
-            <a:ext cx="118872" cy="914"/>
-          </a:xfrm>
-          <a:prstGeom prst="line">
-            <a:avLst/>
-          </a:prstGeom>
-          <a:noFill/>
-          <a:ln w="22225">
-            <a:solidFill>
-              <a:srgbClr val="A9BDB7"/>
-            </a:solidFill>
-            <a:prstDash val="solid"/>
-            <a:tailEnd type="triangle"/>
-          </a:ln>
-        </p:spPr>
-      </p:sp>
-      <p:sp>
-        <p:nvSpPr>
-          <p:cNvPr id="30" name="Shape 28"/>
-          <p:cNvSpPr/>
-          <p:nvPr/>
-        </p:nvSpPr>
-        <p:spPr>
-          <a:xfrm>
-            <a:off x="5907024" y="2880360"/>
-            <a:ext cx="118872" cy="914"/>
-          </a:xfrm>
-          <a:prstGeom prst="line">
-            <a:avLst/>
-          </a:prstGeom>
-          <a:noFill/>
-          <a:ln w="22225">
-            <a:solidFill>
-              <a:srgbClr val="A9BDB7"/>
-            </a:solidFill>
-            <a:prstDash val="solid"/>
-            <a:tailEnd type="triangle"/>
-          </a:ln>
-        </p:spPr>
-      </p:sp>
-      <p:sp>
-        <p:nvSpPr>
-          <p:cNvPr id="31" name="Shape 29"/>
-          <p:cNvSpPr/>
-          <p:nvPr/>
-        </p:nvSpPr>
-        <p:spPr>
-          <a:xfrm>
-            <a:off x="7644384" y="2880360"/>
-            <a:ext cx="118872" cy="914"/>
-          </a:xfrm>
-          <a:prstGeom prst="line">
-            <a:avLst/>
-          </a:prstGeom>
-          <a:noFill/>
-          <a:ln w="22225">
-            <a:solidFill>
-              <a:srgbClr val="A9BDB7"/>
-            </a:solidFill>
-            <a:prstDash val="solid"/>
-            <a:tailEnd type="triangle"/>
-          </a:ln>
-        </p:spPr>
-      </p:sp>
-      <p:sp>
-        <p:nvSpPr>
-          <p:cNvPr id="32" name="Shape 30"/>
-          <p:cNvSpPr/>
-          <p:nvPr/>
-        </p:nvSpPr>
-        <p:spPr>
-          <a:xfrm>
-            <a:off x="3154680" y="2148840"/>
-            <a:ext cx="914" cy="237744"/>
-          </a:xfrm>
-          <a:prstGeom prst="line">
-            <a:avLst/>
-          </a:prstGeom>
-          <a:noFill/>
-          <a:ln w="22225">
-            <a:solidFill>
-              <a:srgbClr val="A9BDB7"/>
-            </a:solidFill>
-            <a:prstDash val="solid"/>
-            <a:headEnd type="triangle"/>
-            <a:tailEnd type="triangle"/>
-          </a:ln>
-        </p:spPr>
-      </p:sp>
-      <p:sp>
-        <p:nvSpPr>
-          <p:cNvPr id="33" name="Shape 31"/>
-          <p:cNvSpPr/>
-          <p:nvPr/>
-        </p:nvSpPr>
-        <p:spPr>
-          <a:xfrm>
-            <a:off x="5916168" y="2148840"/>
-            <a:ext cx="914" cy="237744"/>
-          </a:xfrm>
-          <a:prstGeom prst="line">
-            <a:avLst/>
-          </a:prstGeom>
-          <a:noFill/>
-          <a:ln w="22225">
-            <a:solidFill>
-              <a:srgbClr val="A9BDB7"/>
-            </a:solidFill>
-            <a:prstDash val="solid"/>
-            <a:headEnd type="triangle"/>
-            <a:tailEnd type="triangle"/>
-          </a:ln>
-        </p:spPr>
-      </p:sp>
-      <p:sp>
-        <p:nvSpPr>
-          <p:cNvPr id="34" name="Shape 32"/>
-          <p:cNvSpPr/>
-          <p:nvPr/>
-        </p:nvSpPr>
-        <p:spPr>
-          <a:xfrm>
-            <a:off x="8385048" y="2148840"/>
-            <a:ext cx="914" cy="237744"/>
-          </a:xfrm>
-          <a:prstGeom prst="line">
-            <a:avLst/>
-          </a:prstGeom>
-          <a:noFill/>
-          <a:ln w="22225">
-            <a:solidFill>
-              <a:srgbClr val="A9BDB7"/>
-            </a:solidFill>
-            <a:prstDash val="solid"/>
-            <a:headEnd type="triangle"/>
-            <a:tailEnd type="triangle"/>
-          </a:ln>
-        </p:spPr>
-      </p:sp>
-      <p:sp>
-        <p:nvSpPr>
-          <p:cNvPr id="35" name="Shape 33"/>
-          <p:cNvSpPr/>
-          <p:nvPr/>
-        </p:nvSpPr>
-        <p:spPr>
-          <a:xfrm>
-            <a:off x="502920" y="3630168"/>
-            <a:ext cx="1600200" cy="1097280"/>
-          </a:xfrm>
-          <a:prstGeom prst="roundRect">
-            <a:avLst>
-              <a:gd name="adj" fmla="val 6667"/>
-            </a:avLst>
-          </a:prstGeom>
-          <a:solidFill>
-            <a:srgbClr val="172A26"/>
-          </a:solidFill>
-          <a:ln w="12700">
-            <a:solidFill>
-              <a:srgbClr val="22A07F"/>
-            </a:solidFill>
-            <a:prstDash val="solid"/>
-          </a:ln>
-        </p:spPr>
-      </p:sp>
-      <p:sp>
-        <p:nvSpPr>
-          <p:cNvPr id="36" name="Text 34"/>
-          <p:cNvSpPr txBox="1"/>
-          <p:nvPr/>
-        </p:nvSpPr>
-        <p:spPr>
-          <a:xfrm>
-            <a:off x="566928" y="3630168"/>
-            <a:ext cx="1481328" cy="1097280"/>
-          </a:xfrm>
-          <a:prstGeom prst="rect">
-            <a:avLst/>
-          </a:prstGeom>
-          <a:noFill/>
-          <a:ln/>
-        </p:spPr>
-        <p:txBody>
-          <a:bodyPr wrap="square" lIns="0" tIns="0" rIns="0" bIns="0" rtlCol="0" anchor="ctr"/>
-          <a:lstStyle/>
-          <a:p>
-            <a:pPr algn="ctr" indent="0" marL="0">
-              <a:spcBef>
-                <a:spcPts val="200"/>
-              </a:spcBef>
-              <a:buNone/>
-            </a:pPr>
-            <a:r>
-              <a:rPr lang="en-US" sz="1250" b="1" dirty="0">
-                <a:solidFill>
-                  <a:srgbClr val="22A07F"/>
-                </a:solidFill>
-                <a:latin typeface="Arial" pitchFamily="34" charset="0"/>
-                <a:ea typeface="Arial" pitchFamily="34" charset="-122"/>
-                <a:cs typeface="Arial" pitchFamily="34" charset="-120"/>
-              </a:rPr>
-              <a:t>LAYER 1</a:t>
-            </a:r>
-            <a:endParaRPr lang="en-US" sz="1250" dirty="0"/>
-          </a:p>
-          <a:p>
-            <a:pPr algn="ctr" indent="0" marL="0">
-              <a:spcBef>
-                <a:spcPts val="200"/>
-              </a:spcBef>
-              <a:buNone/>
-            </a:pPr>
-            <a:r>
-              <a:rPr lang="en-US" sz="950" dirty="0">
-                <a:solidFill>
-                  <a:srgbClr val="A9BDB7"/>
-                </a:solidFill>
-                <a:latin typeface="Calibri" pitchFamily="34" charset="0"/>
-                <a:ea typeface="Calibri" pitchFamily="34" charset="-122"/>
-                <a:cs typeface="Calibri" pitchFamily="34" charset="-120"/>
-              </a:rPr>
-              <a:t>BlockID EVM · chain 262626</a:t>
-            </a:r>
-            <a:endParaRPr lang="en-US" sz="1250" dirty="0"/>
-          </a:p>
-        </p:txBody>
-      </p:sp>
-      <p:sp>
-        <p:nvSpPr>
-          <p:cNvPr id="37" name="Shape 35"/>
-          <p:cNvSpPr/>
-          <p:nvPr/>
-        </p:nvSpPr>
-        <p:spPr>
-          <a:xfrm>
-            <a:off x="2286000" y="3630168"/>
-            <a:ext cx="7269480" cy="1097280"/>
-          </a:xfrm>
-          <a:prstGeom prst="roundRect">
-            <a:avLst>
-              <a:gd name="adj" fmla="val 6667"/>
-            </a:avLst>
-          </a:prstGeom>
-          <a:solidFill>
-            <a:srgbClr val="10302A"/>
-          </a:solidFill>
-          <a:ln w="12700">
-            <a:solidFill>
-              <a:srgbClr val="22A07F"/>
-            </a:solidFill>
-            <a:prstDash val="solid"/>
-          </a:ln>
-        </p:spPr>
-      </p:sp>
-      <p:sp>
-        <p:nvSpPr>
-          <p:cNvPr id="38" name="Text 36"/>
-          <p:cNvSpPr txBox="1"/>
-          <p:nvPr/>
-        </p:nvSpPr>
-        <p:spPr>
-          <a:xfrm>
-            <a:off x="2423160" y="3675888"/>
-            <a:ext cx="7040880" cy="310896"/>
-          </a:xfrm>
-          <a:prstGeom prst="rect">
-            <a:avLst/>
-          </a:prstGeom>
-          <a:noFill/>
-          <a:ln/>
-        </p:spPr>
-        <p:txBody>
-          <a:bodyPr wrap="square" lIns="0" tIns="0" rIns="0" bIns="0" rtlCol="0" anchor="ctr"/>
-          <a:lstStyle/>
-          <a:p>
-            <a:pPr indent="0" marL="0">
-              <a:buNone/>
-            </a:pPr>
-            <a:r>
-              <a:rPr lang="en-US" sz="1300" b="1" dirty="0">
-                <a:solidFill>
-                  <a:srgbClr val="22A07F"/>
-                </a:solidFill>
-                <a:latin typeface="Arial" pitchFamily="34" charset="0"/>
-                <a:ea typeface="Arial" pitchFamily="34" charset="-122"/>
-                <a:cs typeface="Arial" pitchFamily="34" charset="-120"/>
-              </a:rPr>
-              <a:t>BlockID Chain — the share register of record  ·  gas price 0</a:t>
-            </a:r>
-            <a:endParaRPr lang="en-US" sz="1300" dirty="0"/>
-          </a:p>
-        </p:txBody>
-      </p:sp>
-      <p:sp>
-        <p:nvSpPr>
-          <p:cNvPr id="39" name="Shape 37"/>
-          <p:cNvSpPr/>
-          <p:nvPr/>
-        </p:nvSpPr>
-        <p:spPr>
-          <a:xfrm>
-            <a:off x="2423160" y="4041648"/>
-            <a:ext cx="1645920" cy="594360"/>
-          </a:xfrm>
-          <a:prstGeom prst="roundRect">
-            <a:avLst>
-              <a:gd name="adj" fmla="val 9231"/>
-            </a:avLst>
-          </a:prstGeom>
-          <a:solidFill>
-            <a:srgbClr val="172A26"/>
-          </a:solidFill>
-          <a:ln w="12700">
-            <a:solidFill>
-              <a:srgbClr val="25403A"/>
-            </a:solidFill>
-            <a:prstDash val="solid"/>
-          </a:ln>
-        </p:spPr>
-      </p:sp>
-      <p:sp>
-        <p:nvSpPr>
-          <p:cNvPr id="40" name="Text 38"/>
-          <p:cNvSpPr txBox="1"/>
-          <p:nvPr/>
-        </p:nvSpPr>
-        <p:spPr>
-          <a:xfrm>
-            <a:off x="2423160" y="4041648"/>
-            <a:ext cx="1645920" cy="594360"/>
-          </a:xfrm>
-          <a:prstGeom prst="rect">
-            <a:avLst/>
-          </a:prstGeom>
-          <a:noFill/>
-          <a:ln/>
-        </p:spPr>
-        <p:txBody>
-          <a:bodyPr wrap="square" lIns="0" tIns="0" rIns="0" bIns="0" rtlCol="0" anchor="ctr"/>
-          <a:lstStyle/>
-          <a:p>
-            <a:pPr algn="ctr" indent="0" marL="0">
-              <a:buNone/>
-            </a:pPr>
-            <a:r>
-              <a:rPr lang="en-US" sz="1000" dirty="0">
-                <a:solidFill>
-                  <a:srgbClr val="F2F7F5"/>
-                </a:solidFill>
-                <a:latin typeface="Calibri" pitchFamily="34" charset="0"/>
-                <a:ea typeface="Calibri" pitchFamily="34" charset="-122"/>
-                <a:cs typeface="Calibri" pitchFamily="34" charset="-120"/>
-              </a:rPr>
-              <a:t>Identity registry</a:t>
-            </a:r>
-            <a:endParaRPr lang="en-US" sz="1000" dirty="0"/>
-          </a:p>
-          <a:p>
-            <a:pPr algn="ctr" indent="0" marL="0">
-              <a:buNone/>
-            </a:pPr>
-            <a:r>
-              <a:rPr lang="en-US" sz="1000" dirty="0">
-                <a:solidFill>
-                  <a:srgbClr val="F2F7F5"/>
-                </a:solidFill>
-                <a:latin typeface="Calibri" pitchFamily="34" charset="0"/>
-                <a:ea typeface="Calibri" pitchFamily="34" charset="-122"/>
-                <a:cs typeface="Calibri" pitchFamily="34" charset="-120"/>
-              </a:rPr>
-              <a:t>(KYC holders)</a:t>
-            </a:r>
-            <a:endParaRPr lang="en-US" sz="1000" dirty="0"/>
-          </a:p>
-        </p:txBody>
-      </p:sp>
-      <p:sp>
-        <p:nvSpPr>
-          <p:cNvPr id="41" name="Shape 39"/>
-          <p:cNvSpPr/>
-          <p:nvPr/>
-        </p:nvSpPr>
-        <p:spPr>
-          <a:xfrm>
-            <a:off x="4206240" y="4041648"/>
-            <a:ext cx="1645920" cy="594360"/>
-          </a:xfrm>
-          <a:prstGeom prst="roundRect">
-            <a:avLst>
-              <a:gd name="adj" fmla="val 9231"/>
-            </a:avLst>
-          </a:prstGeom>
-          <a:solidFill>
-            <a:srgbClr val="172A26"/>
-          </a:solidFill>
-          <a:ln w="12700">
-            <a:solidFill>
-              <a:srgbClr val="25403A"/>
-            </a:solidFill>
-            <a:prstDash val="solid"/>
-          </a:ln>
-        </p:spPr>
-      </p:sp>
-      <p:sp>
-        <p:nvSpPr>
-          <p:cNvPr id="42" name="Text 40"/>
-          <p:cNvSpPr txBox="1"/>
-          <p:nvPr/>
-        </p:nvSpPr>
-        <p:spPr>
-          <a:xfrm>
-            <a:off x="4206240" y="4041648"/>
-            <a:ext cx="1645920" cy="594360"/>
-          </a:xfrm>
-          <a:prstGeom prst="rect">
-            <a:avLst/>
-          </a:prstGeom>
-          <a:noFill/>
-          <a:ln/>
-        </p:spPr>
-        <p:txBody>
-          <a:bodyPr wrap="square" lIns="0" tIns="0" rIns="0" bIns="0" rtlCol="0" anchor="ctr"/>
-          <a:lstStyle/>
-          <a:p>
-            <a:pPr algn="ctr" indent="0" marL="0">
-              <a:buNone/>
-            </a:pPr>
-            <a:r>
-              <a:rPr lang="en-US" sz="1000" dirty="0">
-                <a:solidFill>
-                  <a:srgbClr val="F2F7F5"/>
-                </a:solidFill>
-                <a:latin typeface="Calibri" pitchFamily="34" charset="0"/>
-                <a:ea typeface="Calibri" pitchFamily="34" charset="-122"/>
-                <a:cs typeface="Calibri" pitchFamily="34" charset="-120"/>
-              </a:rPr>
-              <a:t>Share token</a:t>
-            </a:r>
-            <a:endParaRPr lang="en-US" sz="1000" dirty="0"/>
-          </a:p>
-          <a:p>
-            <a:pPr algn="ctr" indent="0" marL="0">
-              <a:buNone/>
-            </a:pPr>
-            <a:r>
-              <a:rPr lang="en-US" sz="1000" dirty="0">
-                <a:solidFill>
-                  <a:srgbClr val="F2F7F5"/>
-                </a:solidFill>
-                <a:latin typeface="Calibri" pitchFamily="34" charset="0"/>
-                <a:ea typeface="Calibri" pitchFamily="34" charset="-122"/>
-                <a:cs typeface="Calibri" pitchFamily="34" charset="-120"/>
-              </a:rPr>
-              <a:t>1 token = 1 share</a:t>
-            </a:r>
-            <a:endParaRPr lang="en-US" sz="1000" dirty="0"/>
-          </a:p>
-        </p:txBody>
-      </p:sp>
-      <p:sp>
-        <p:nvSpPr>
-          <p:cNvPr id="43" name="Shape 41"/>
-          <p:cNvSpPr/>
-          <p:nvPr/>
-        </p:nvSpPr>
-        <p:spPr>
-          <a:xfrm>
-            <a:off x="5989320" y="4041648"/>
-            <a:ext cx="1645920" cy="594360"/>
-          </a:xfrm>
-          <a:prstGeom prst="roundRect">
-            <a:avLst>
-              <a:gd name="adj" fmla="val 9231"/>
-            </a:avLst>
-          </a:prstGeom>
-          <a:solidFill>
-            <a:srgbClr val="172A26"/>
-          </a:solidFill>
-          <a:ln w="12700">
-            <a:solidFill>
-              <a:srgbClr val="25403A"/>
-            </a:solidFill>
-            <a:prstDash val="solid"/>
-          </a:ln>
-        </p:spPr>
-      </p:sp>
-      <p:sp>
-        <p:nvSpPr>
-          <p:cNvPr id="44" name="Text 42"/>
-          <p:cNvSpPr txBox="1"/>
-          <p:nvPr/>
-        </p:nvSpPr>
-        <p:spPr>
-          <a:xfrm>
-            <a:off x="5989320" y="4041648"/>
-            <a:ext cx="1645920" cy="594360"/>
-          </a:xfrm>
-          <a:prstGeom prst="rect">
-            <a:avLst/>
-          </a:prstGeom>
-          <a:noFill/>
-          <a:ln/>
-        </p:spPr>
-        <p:txBody>
-          <a:bodyPr wrap="square" lIns="0" tIns="0" rIns="0" bIns="0" rtlCol="0" anchor="ctr"/>
-          <a:lstStyle/>
-          <a:p>
-            <a:pPr algn="ctr" indent="0" marL="0">
-              <a:buNone/>
-            </a:pPr>
-            <a:r>
-              <a:rPr lang="en-US" sz="1000" dirty="0">
-                <a:solidFill>
-                  <a:srgbClr val="F2F7F5"/>
-                </a:solidFill>
-                <a:latin typeface="Calibri" pitchFamily="34" charset="0"/>
-                <a:ea typeface="Calibri" pitchFamily="34" charset="-122"/>
-                <a:cs typeface="Calibri" pitchFamily="34" charset="-120"/>
-              </a:rPr>
-              <a:t>Dividends</a:t>
-            </a:r>
-            <a:endParaRPr lang="en-US" sz="1000" dirty="0"/>
-          </a:p>
-          <a:p>
-            <a:pPr algn="ctr" indent="0" marL="0">
-              <a:buNone/>
-            </a:pPr>
-            <a:r>
-              <a:rPr lang="en-US" sz="1000" dirty="0">
-                <a:solidFill>
-                  <a:srgbClr val="F2F7F5"/>
-                </a:solidFill>
-                <a:latin typeface="Calibri" pitchFamily="34" charset="0"/>
-                <a:ea typeface="Calibri" pitchFamily="34" charset="-122"/>
-                <a:cs typeface="Calibri" pitchFamily="34" charset="-120"/>
-              </a:rPr>
-              <a:t>paid in mAUD</a:t>
-            </a:r>
-            <a:endParaRPr lang="en-US" sz="1000" dirty="0"/>
-          </a:p>
-        </p:txBody>
-      </p:sp>
-      <p:sp>
-        <p:nvSpPr>
-          <p:cNvPr id="45" name="Shape 43"/>
-          <p:cNvSpPr/>
-          <p:nvPr/>
-        </p:nvSpPr>
-        <p:spPr>
-          <a:xfrm>
-            <a:off x="7772400" y="4041648"/>
-            <a:ext cx="1645920" cy="594360"/>
-          </a:xfrm>
-          <a:prstGeom prst="roundRect">
-            <a:avLst>
-              <a:gd name="adj" fmla="val 9231"/>
-            </a:avLst>
-          </a:prstGeom>
-          <a:solidFill>
-            <a:srgbClr val="172A26"/>
-          </a:solidFill>
-          <a:ln w="12700">
-            <a:solidFill>
-              <a:srgbClr val="25403A"/>
-            </a:solidFill>
-            <a:prstDash val="solid"/>
-          </a:ln>
-        </p:spPr>
-      </p:sp>
-      <p:sp>
-        <p:nvSpPr>
-          <p:cNvPr id="46" name="Text 44"/>
-          <p:cNvSpPr txBox="1"/>
-          <p:nvPr/>
-        </p:nvSpPr>
-        <p:spPr>
-          <a:xfrm>
-            <a:off x="7772400" y="4041648"/>
-            <a:ext cx="1645920" cy="594360"/>
-          </a:xfrm>
-          <a:prstGeom prst="rect">
-            <a:avLst/>
-          </a:prstGeom>
-          <a:noFill/>
-          <a:ln/>
-        </p:spPr>
-        <p:txBody>
-          <a:bodyPr wrap="square" lIns="0" tIns="0" rIns="0" bIns="0" rtlCol="0" anchor="ctr"/>
-          <a:lstStyle/>
-          <a:p>
-            <a:pPr algn="ctr" indent="0" marL="0">
-              <a:buNone/>
-            </a:pPr>
-            <a:r>
-              <a:rPr lang="en-US" sz="1000" dirty="0">
-                <a:solidFill>
-                  <a:srgbClr val="F2F7F5"/>
-                </a:solidFill>
-                <a:latin typeface="Calibri" pitchFamily="34" charset="0"/>
-                <a:ea typeface="Calibri" pitchFamily="34" charset="-122"/>
-                <a:cs typeface="Calibri" pitchFamily="34" charset="-120"/>
-              </a:rPr>
-              <a:t>Report hash</a:t>
-            </a:r>
-            <a:endParaRPr lang="en-US" sz="1000" dirty="0"/>
-          </a:p>
-          <a:p>
-            <a:pPr algn="ctr" indent="0" marL="0">
-              <a:buNone/>
-            </a:pPr>
-            <a:r>
-              <a:rPr lang="en-US" sz="1000" dirty="0">
-                <a:solidFill>
-                  <a:srgbClr val="F2F7F5"/>
-                </a:solidFill>
-                <a:latin typeface="Calibri" pitchFamily="34" charset="0"/>
-                <a:ea typeface="Calibri" pitchFamily="34" charset="-122"/>
-                <a:cs typeface="Calibri" pitchFamily="34" charset="-120"/>
-              </a:rPr>
-              <a:t>fair value proof</a:t>
-            </a:r>
-            <a:endParaRPr lang="en-US" sz="1000" dirty="0"/>
-          </a:p>
-        </p:txBody>
-      </p:sp>
-      <p:sp>
-        <p:nvSpPr>
-          <p:cNvPr id="47" name="Shape 45"/>
-          <p:cNvSpPr/>
-          <p:nvPr/>
-        </p:nvSpPr>
-        <p:spPr>
-          <a:xfrm>
-            <a:off x="8659368" y="3364992"/>
-            <a:ext cx="914" cy="256032"/>
-          </a:xfrm>
-          <a:prstGeom prst="line">
-            <a:avLst/>
-          </a:prstGeom>
-          <a:noFill/>
-          <a:ln w="22225">
-            <a:solidFill>
-              <a:srgbClr val="E4675A"/>
-            </a:solidFill>
-            <a:prstDash val="solid"/>
-            <a:tailEnd type="triangle"/>
-          </a:ln>
-        </p:spPr>
-      </p:sp>
-      <p:sp>
-        <p:nvSpPr>
-          <p:cNvPr id="48" name="Text 46"/>
-          <p:cNvSpPr txBox="1"/>
-          <p:nvPr/>
-        </p:nvSpPr>
-        <p:spPr>
-          <a:xfrm>
-            <a:off x="8686800" y="3364992"/>
-            <a:ext cx="914400" cy="237744"/>
-          </a:xfrm>
-          <a:prstGeom prst="rect">
-            <a:avLst/>
-          </a:prstGeom>
-          <a:noFill/>
-          <a:ln/>
-        </p:spPr>
-        <p:txBody>
-          <a:bodyPr wrap="square" lIns="0" tIns="0" rIns="0" bIns="0" rtlCol="0" anchor="ctr"/>
-          <a:lstStyle/>
-          <a:p>
-            <a:pPr algn="ctr" indent="0" marL="0">
-              <a:buNone/>
-            </a:pPr>
-            <a:r>
-              <a:rPr lang="en-US" sz="900" i="1" dirty="0">
-                <a:solidFill>
-                  <a:srgbClr val="E4675A"/>
-                </a:solidFill>
-                <a:latin typeface="Calibri" pitchFamily="34" charset="0"/>
-                <a:ea typeface="Calibri" pitchFamily="34" charset="-122"/>
-                <a:cs typeface="Calibri" pitchFamily="34" charset="-120"/>
-              </a:rPr>
-              <a:t>signs</a:t>
-            </a:r>
-            <a:endParaRPr lang="en-US" sz="900" dirty="0"/>
-          </a:p>
-        </p:txBody>
-      </p:sp>
-      <p:sp>
-        <p:nvSpPr>
-          <p:cNvPr id="49" name="Shape 47"/>
-          <p:cNvSpPr/>
-          <p:nvPr/>
-        </p:nvSpPr>
-        <p:spPr>
-          <a:xfrm>
-            <a:off x="502920" y="5001768"/>
-            <a:ext cx="1600200" cy="1097280"/>
-          </a:xfrm>
-          <a:prstGeom prst="roundRect">
-            <a:avLst>
-              <a:gd name="adj" fmla="val 6667"/>
-            </a:avLst>
-          </a:prstGeom>
-          <a:solidFill>
-            <a:srgbClr val="172A26"/>
-          </a:solidFill>
-          <a:ln w="12700">
-            <a:solidFill>
-              <a:srgbClr val="E3A83A"/>
-            </a:solidFill>
-            <a:prstDash val="solid"/>
-          </a:ln>
-        </p:spPr>
-      </p:sp>
-      <p:sp>
-        <p:nvSpPr>
-          <p:cNvPr id="50" name="Text 48"/>
-          <p:cNvSpPr txBox="1"/>
-          <p:nvPr/>
-        </p:nvSpPr>
-        <p:spPr>
-          <a:xfrm>
-            <a:off x="566928" y="5001768"/>
-            <a:ext cx="1481328" cy="1097280"/>
-          </a:xfrm>
-          <a:prstGeom prst="rect">
-            <a:avLst/>
-          </a:prstGeom>
-          <a:noFill/>
-          <a:ln/>
-        </p:spPr>
-        <p:txBody>
-          <a:bodyPr wrap="square" lIns="0" tIns="0" rIns="0" bIns="0" rtlCol="0" anchor="ctr"/>
-          <a:lstStyle/>
-          <a:p>
-            <a:pPr algn="ctr" indent="0" marL="0">
-              <a:spcBef>
-                <a:spcPts val="200"/>
-              </a:spcBef>
-              <a:buNone/>
-            </a:pPr>
-            <a:r>
-              <a:rPr lang="en-US" sz="1250" b="1" dirty="0">
-                <a:solidFill>
-                  <a:srgbClr val="E3A83A"/>
-                </a:solidFill>
-                <a:latin typeface="Arial" pitchFamily="34" charset="0"/>
-                <a:ea typeface="Arial" pitchFamily="34" charset="-122"/>
-                <a:cs typeface="Arial" pitchFamily="34" charset="-120"/>
-              </a:rPr>
-              <a:t>LAYER 2</a:t>
-            </a:r>
-            <a:endParaRPr lang="en-US" sz="1250" dirty="0"/>
-          </a:p>
-          <a:p>
-            <a:pPr algn="ctr" indent="0" marL="0">
-              <a:spcBef>
-                <a:spcPts val="200"/>
-              </a:spcBef>
-              <a:buNone/>
-            </a:pPr>
-            <a:r>
-              <a:rPr lang="en-US" sz="950" dirty="0">
-                <a:solidFill>
-                  <a:srgbClr val="A9BDB7"/>
-                </a:solidFill>
-                <a:latin typeface="Calibri" pitchFamily="34" charset="0"/>
-                <a:ea typeface="Calibri" pitchFamily="34" charset="-122"/>
-                <a:cs typeface="Calibri" pitchFamily="34" charset="-120"/>
-              </a:rPr>
-              <a:t>HashKey Chain · chain 133</a:t>
-            </a:r>
-            <a:endParaRPr lang="en-US" sz="1250" dirty="0"/>
-          </a:p>
-        </p:txBody>
-      </p:sp>
-      <p:sp>
-        <p:nvSpPr>
-          <p:cNvPr id="51" name="Shape 49"/>
-          <p:cNvSpPr/>
-          <p:nvPr/>
-        </p:nvSpPr>
-        <p:spPr>
-          <a:xfrm>
-            <a:off x="2286000" y="5001768"/>
-            <a:ext cx="4800600" cy="1097280"/>
-          </a:xfrm>
-          <a:prstGeom prst="roundRect">
-            <a:avLst>
-              <a:gd name="adj" fmla="val 6667"/>
-            </a:avLst>
-          </a:prstGeom>
-          <a:solidFill>
-            <a:srgbClr val="2A2412"/>
-          </a:solidFill>
-          <a:ln w="12700">
-            <a:solidFill>
-              <a:srgbClr val="E3A83A"/>
-            </a:solidFill>
-            <a:prstDash val="solid"/>
-          </a:ln>
-        </p:spPr>
-      </p:sp>
-      <p:sp>
-        <p:nvSpPr>
-          <p:cNvPr id="52" name="Text 50"/>
-          <p:cNvSpPr txBox="1"/>
-          <p:nvPr/>
-        </p:nvSpPr>
-        <p:spPr>
-          <a:xfrm>
-            <a:off x="2423160" y="5047488"/>
-            <a:ext cx="4572000" cy="310896"/>
-          </a:xfrm>
-          <a:prstGeom prst="rect">
-            <a:avLst/>
-          </a:prstGeom>
-          <a:noFill/>
-          <a:ln/>
-        </p:spPr>
-        <p:txBody>
-          <a:bodyPr wrap="square" lIns="0" tIns="0" rIns="0" bIns="0" rtlCol="0" anchor="ctr"/>
-          <a:lstStyle/>
-          <a:p>
-            <a:pPr indent="0" marL="0">
-              <a:buNone/>
-            </a:pPr>
-            <a:r>
-              <a:rPr lang="en-US" sz="1300" b="1" dirty="0">
-                <a:solidFill>
-                  <a:srgbClr val="E3A83A"/>
-                </a:solidFill>
-                <a:latin typeface="Arial" pitchFamily="34" charset="0"/>
-                <a:ea typeface="Arial" pitchFamily="34" charset="-122"/>
-                <a:cs typeface="Arial" pitchFamily="34" charset="-120"/>
-              </a:rPr>
-              <a:t>HashKey Chain — public proof for real-world assets</a:t>
-            </a:r>
-            <a:endParaRPr lang="en-US" sz="1300" dirty="0"/>
-          </a:p>
-        </p:txBody>
-      </p:sp>
-      <p:sp>
-        <p:nvSpPr>
-          <p:cNvPr id="53" name="Shape 51"/>
-          <p:cNvSpPr/>
-          <p:nvPr/>
-        </p:nvSpPr>
-        <p:spPr>
-          <a:xfrm>
-            <a:off x="2423160" y="5413248"/>
-            <a:ext cx="1444752" cy="594360"/>
-          </a:xfrm>
-          <a:prstGeom prst="roundRect">
-            <a:avLst>
-              <a:gd name="adj" fmla="val 9231"/>
-            </a:avLst>
-          </a:prstGeom>
-          <a:solidFill>
-            <a:srgbClr val="172A26"/>
-          </a:solidFill>
-          <a:ln w="12700">
-            <a:solidFill>
-              <a:srgbClr val="25403A"/>
-            </a:solidFill>
-            <a:prstDash val="solid"/>
-          </a:ln>
-        </p:spPr>
-      </p:sp>
-      <p:sp>
-        <p:nvSpPr>
-          <p:cNvPr id="54" name="Text 52"/>
-          <p:cNvSpPr txBox="1"/>
-          <p:nvPr/>
-        </p:nvSpPr>
-        <p:spPr>
-          <a:xfrm>
-            <a:off x="2423160" y="5413248"/>
-            <a:ext cx="1444752" cy="594360"/>
-          </a:xfrm>
-          <a:prstGeom prst="rect">
-            <a:avLst/>
-          </a:prstGeom>
-          <a:noFill/>
-          <a:ln/>
-        </p:spPr>
-        <p:txBody>
-          <a:bodyPr wrap="square" lIns="0" tIns="0" rIns="0" bIns="0" rtlCol="0" anchor="ctr"/>
-          <a:lstStyle/>
-          <a:p>
-            <a:pPr algn="ctr" indent="0" marL="0">
-              <a:buNone/>
-            </a:pPr>
-            <a:r>
-              <a:rPr lang="en-US" sz="950" dirty="0">
-                <a:solidFill>
-                  <a:srgbClr val="F2F7F5"/>
-                </a:solidFill>
-                <a:latin typeface="Calibri" pitchFamily="34" charset="0"/>
-                <a:ea typeface="Calibri" pitchFamily="34" charset="-122"/>
-                <a:cs typeface="Calibri" pitchFamily="34" charset="-120"/>
-              </a:rPr>
-              <a:t>Mirror share token</a:t>
-            </a:r>
-            <a:endParaRPr lang="en-US" sz="950" dirty="0"/>
-          </a:p>
-          <a:p>
-            <a:pPr algn="ctr" indent="0" marL="0">
-              <a:buNone/>
-            </a:pPr>
-            <a:r>
-              <a:rPr lang="en-US" sz="950" dirty="0">
-                <a:solidFill>
-                  <a:srgbClr val="F2F7F5"/>
-                </a:solidFill>
-                <a:latin typeface="Calibri" pitchFamily="34" charset="0"/>
-                <a:ea typeface="Calibri" pitchFamily="34" charset="-122"/>
-                <a:cs typeface="Calibri" pitchFamily="34" charset="-120"/>
-              </a:rPr>
-              <a:t>(same balances)</a:t>
-            </a:r>
-            <a:endParaRPr lang="en-US" sz="950" dirty="0"/>
-          </a:p>
-        </p:txBody>
-      </p:sp>
-      <p:sp>
-        <p:nvSpPr>
-          <p:cNvPr id="55" name="Shape 53"/>
-          <p:cNvSpPr/>
-          <p:nvPr/>
-        </p:nvSpPr>
-        <p:spPr>
-          <a:xfrm>
-            <a:off x="3977640" y="5413248"/>
-            <a:ext cx="1444752" cy="594360"/>
-          </a:xfrm>
-          <a:prstGeom prst="roundRect">
-            <a:avLst>
-              <a:gd name="adj" fmla="val 9231"/>
-            </a:avLst>
-          </a:prstGeom>
-          <a:solidFill>
-            <a:srgbClr val="172A26"/>
-          </a:solidFill>
-          <a:ln w="12700">
-            <a:solidFill>
-              <a:srgbClr val="25403A"/>
-            </a:solidFill>
-            <a:prstDash val="solid"/>
-          </a:ln>
-        </p:spPr>
-      </p:sp>
-      <p:sp>
-        <p:nvSpPr>
-          <p:cNvPr id="56" name="Text 54"/>
-          <p:cNvSpPr txBox="1"/>
-          <p:nvPr/>
-        </p:nvSpPr>
-        <p:spPr>
-          <a:xfrm>
-            <a:off x="3977640" y="5413248"/>
-            <a:ext cx="1444752" cy="594360"/>
-          </a:xfrm>
-          <a:prstGeom prst="rect">
-            <a:avLst/>
-          </a:prstGeom>
-          <a:noFill/>
-          <a:ln/>
-        </p:spPr>
-        <p:txBody>
-          <a:bodyPr wrap="square" lIns="0" tIns="0" rIns="0" bIns="0" rtlCol="0" anchor="ctr"/>
-          <a:lstStyle/>
-          <a:p>
-            <a:pPr algn="ctr" indent="0" marL="0">
-              <a:buNone/>
-            </a:pPr>
-            <a:r>
-              <a:rPr lang="en-US" sz="950" dirty="0">
-                <a:solidFill>
-                  <a:srgbClr val="F2F7F5"/>
-                </a:solidFill>
-                <a:latin typeface="Calibri" pitchFamily="34" charset="0"/>
-                <a:ea typeface="Calibri" pitchFamily="34" charset="-122"/>
-                <a:cs typeface="Calibri" pitchFamily="34" charset="-120"/>
-              </a:rPr>
-              <a:t>Cap-table root</a:t>
-            </a:r>
-            <a:endParaRPr lang="en-US" sz="950" dirty="0"/>
-          </a:p>
-          <a:p>
-            <a:pPr algn="ctr" indent="0" marL="0">
-              <a:buNone/>
-            </a:pPr>
-            <a:r>
-              <a:rPr lang="en-US" sz="950" dirty="0">
-                <a:solidFill>
-                  <a:srgbClr val="F2F7F5"/>
-                </a:solidFill>
-                <a:latin typeface="Calibri" pitchFamily="34" charset="0"/>
-                <a:ea typeface="Calibri" pitchFamily="34" charset="-122"/>
-                <a:cs typeface="Calibri" pitchFamily="34" charset="-120"/>
-              </a:rPr>
-              <a:t>(Merkle)</a:t>
-            </a:r>
-            <a:endParaRPr lang="en-US" sz="950" dirty="0"/>
-          </a:p>
-        </p:txBody>
-      </p:sp>
-      <p:sp>
-        <p:nvSpPr>
-          <p:cNvPr id="57" name="Shape 55"/>
-          <p:cNvSpPr/>
-          <p:nvPr/>
-        </p:nvSpPr>
-        <p:spPr>
-          <a:xfrm>
-            <a:off x="5532120" y="5413248"/>
-            <a:ext cx="1444752" cy="594360"/>
-          </a:xfrm>
-          <a:prstGeom prst="roundRect">
-            <a:avLst>
-              <a:gd name="adj" fmla="val 9231"/>
-            </a:avLst>
-          </a:prstGeom>
-          <a:solidFill>
-            <a:srgbClr val="172A26"/>
-          </a:solidFill>
-          <a:ln w="12700">
-            <a:solidFill>
-              <a:srgbClr val="25403A"/>
-            </a:solidFill>
-            <a:prstDash val="solid"/>
-          </a:ln>
-        </p:spPr>
-      </p:sp>
-      <p:sp>
-        <p:nvSpPr>
-          <p:cNvPr id="58" name="Text 56"/>
-          <p:cNvSpPr txBox="1"/>
-          <p:nvPr/>
-        </p:nvSpPr>
-        <p:spPr>
-          <a:xfrm>
-            <a:off x="5532120" y="5413248"/>
-            <a:ext cx="1444752" cy="594360"/>
-          </a:xfrm>
-          <a:prstGeom prst="rect">
-            <a:avLst/>
-          </a:prstGeom>
-          <a:noFill/>
-          <a:ln/>
-        </p:spPr>
-        <p:txBody>
-          <a:bodyPr wrap="square" lIns="0" tIns="0" rIns="0" bIns="0" rtlCol="0" anchor="ctr"/>
-          <a:lstStyle/>
-          <a:p>
-            <a:pPr algn="ctr" indent="0" marL="0">
-              <a:buNone/>
-            </a:pPr>
-            <a:r>
-              <a:rPr lang="en-US" sz="950" dirty="0">
-                <a:solidFill>
-                  <a:srgbClr val="F2F7F5"/>
-                </a:solidFill>
-                <a:latin typeface="Calibri" pitchFamily="34" charset="0"/>
-                <a:ea typeface="Calibri" pitchFamily="34" charset="-122"/>
-                <a:cs typeface="Calibri" pitchFamily="34" charset="-120"/>
-              </a:rPr>
-              <a:t>Agent provenance</a:t>
-            </a:r>
-            <a:endParaRPr lang="en-US" sz="950" dirty="0"/>
-          </a:p>
-          <a:p>
-            <a:pPr algn="ctr" indent="0" marL="0">
-              <a:buNone/>
-            </a:pPr>
-            <a:r>
-              <a:rPr lang="en-US" sz="950" dirty="0">
-                <a:solidFill>
-                  <a:srgbClr val="F2F7F5"/>
-                </a:solidFill>
-                <a:latin typeface="Calibri" pitchFamily="34" charset="0"/>
-                <a:ea typeface="Calibri" pitchFamily="34" charset="-122"/>
-                <a:cs typeface="Calibri" pitchFamily="34" charset="-120"/>
-              </a:rPr>
-              <a:t>(who proposed)</a:t>
-            </a:r>
-            <a:endParaRPr lang="en-US" sz="950" dirty="0"/>
-          </a:p>
-        </p:txBody>
-      </p:sp>
-      <p:sp>
-        <p:nvSpPr>
-          <p:cNvPr id="59" name="Shape 57"/>
-          <p:cNvSpPr/>
-          <p:nvPr/>
-        </p:nvSpPr>
-        <p:spPr>
-          <a:xfrm>
-            <a:off x="7223760" y="5001768"/>
-            <a:ext cx="2331720" cy="1097280"/>
-          </a:xfrm>
-          <a:prstGeom prst="roundRect">
-            <a:avLst>
-              <a:gd name="adj" fmla="val 6667"/>
-            </a:avLst>
-          </a:prstGeom>
-          <a:solidFill>
-            <a:srgbClr val="12201D"/>
-          </a:solidFill>
-          <a:ln w="12700">
-            <a:solidFill>
-              <a:srgbClr val="5D8AD6"/>
-            </a:solidFill>
-            <a:prstDash val="solid"/>
-          </a:ln>
-        </p:spPr>
-      </p:sp>
-      <p:sp>
-        <p:nvSpPr>
-          <p:cNvPr id="60" name="Text 58"/>
-          <p:cNvSpPr txBox="1"/>
-          <p:nvPr/>
-        </p:nvSpPr>
-        <p:spPr>
-          <a:xfrm>
-            <a:off x="7315200" y="5065776"/>
-            <a:ext cx="2148840" cy="310896"/>
-          </a:xfrm>
-          <a:prstGeom prst="rect">
-            <a:avLst/>
-          </a:prstGeom>
-          <a:noFill/>
-          <a:ln/>
-        </p:spPr>
-        <p:txBody>
-          <a:bodyPr wrap="square" lIns="0" tIns="0" rIns="0" bIns="0" rtlCol="0" anchor="ctr"/>
-          <a:lstStyle/>
-          <a:p>
-            <a:pPr algn="ctr" indent="0" marL="0">
-              <a:buNone/>
-            </a:pPr>
-            <a:r>
-              <a:rPr lang="en-US" sz="1250" b="1" dirty="0">
-                <a:solidFill>
-                  <a:srgbClr val="5D8AD6"/>
-                </a:solidFill>
-                <a:latin typeface="Arial" pitchFamily="34" charset="0"/>
-                <a:ea typeface="Arial" pitchFamily="34" charset="-122"/>
-                <a:cs typeface="Arial" pitchFamily="34" charset="-120"/>
-              </a:rPr>
-              <a:t>Ethereum</a:t>
-            </a:r>
-            <a:endParaRPr lang="en-US" sz="1250" dirty="0"/>
-          </a:p>
-        </p:txBody>
-      </p:sp>
-      <p:sp>
-        <p:nvSpPr>
-          <p:cNvPr id="61" name="Text 59"/>
-          <p:cNvSpPr txBox="1"/>
-          <p:nvPr/>
-        </p:nvSpPr>
-        <p:spPr>
-          <a:xfrm>
-            <a:off x="7315200" y="5367528"/>
-            <a:ext cx="2148840" cy="685800"/>
-          </a:xfrm>
-          <a:prstGeom prst="rect">
-            <a:avLst/>
-          </a:prstGeom>
-          <a:noFill/>
-          <a:ln/>
-        </p:spPr>
-        <p:txBody>
-          <a:bodyPr wrap="square" lIns="0" tIns="0" rIns="0" bIns="0" rtlCol="0" anchor="t"/>
-          <a:lstStyle/>
-          <a:p>
-            <a:pPr algn="ctr" indent="0" marL="0">
-              <a:buNone/>
-            </a:pPr>
-            <a:r>
-              <a:rPr lang="en-US" sz="950" dirty="0">
-                <a:solidFill>
-                  <a:srgbClr val="F2F7F5"/>
-                </a:solidFill>
-                <a:latin typeface="Calibri" pitchFamily="34" charset="0"/>
-                <a:ea typeface="Calibri" pitchFamily="34" charset="-122"/>
-                <a:cs typeface="Calibri" pitchFamily="34" charset="-120"/>
-              </a:rPr>
-              <a:t>Hoodi testnet · chain 560048</a:t>
-            </a:r>
-            <a:endParaRPr lang="en-US" sz="950" dirty="0"/>
-          </a:p>
-          <a:p>
-            <a:pPr algn="ctr" indent="0" marL="0">
-              <a:buNone/>
-            </a:pPr>
-            <a:r>
-              <a:rPr lang="en-US" sz="950" dirty="0">
-                <a:solidFill>
-                  <a:srgbClr val="F2F7F5"/>
-                </a:solidFill>
-                <a:latin typeface="Calibri" pitchFamily="34" charset="0"/>
-                <a:ea typeface="Calibri" pitchFamily="34" charset="-122"/>
-                <a:cs typeface="Calibri" pitchFamily="34" charset="-120"/>
-              </a:rPr>
-              <a:t>mirror token + cap-table root</a:t>
-            </a:r>
-            <a:endParaRPr lang="en-US" sz="950" dirty="0"/>
-          </a:p>
-          <a:p>
-            <a:pPr algn="ctr" indent="0" marL="0">
-              <a:buNone/>
-            </a:pPr>
-            <a:r>
-              <a:rPr lang="en-US" sz="950" dirty="0">
-                <a:solidFill>
-                  <a:srgbClr val="F2F7F5"/>
-                </a:solidFill>
-                <a:latin typeface="Calibri" pitchFamily="34" charset="0"/>
-                <a:ea typeface="Calibri" pitchFamily="34" charset="-122"/>
-                <a:cs typeface="Calibri" pitchFamily="34" charset="-120"/>
-              </a:rPr>
-              <a:t>(public anchor)</a:t>
-            </a:r>
-            <a:endParaRPr lang="en-US" sz="950" dirty="0"/>
-          </a:p>
-        </p:txBody>
-      </p:sp>
-      <p:sp>
-        <p:nvSpPr>
-          <p:cNvPr id="62" name="Shape 60"/>
-          <p:cNvSpPr/>
-          <p:nvPr/>
-        </p:nvSpPr>
-        <p:spPr>
-          <a:xfrm>
-            <a:off x="4663440" y="4736592"/>
-            <a:ext cx="914" cy="256032"/>
-          </a:xfrm>
-          <a:prstGeom prst="line">
-            <a:avLst/>
-          </a:prstGeom>
-          <a:noFill/>
-          <a:ln w="22225">
-            <a:solidFill>
-              <a:srgbClr val="E3A83A"/>
-            </a:solidFill>
-            <a:prstDash val="solid"/>
-            <a:tailEnd type="triangle"/>
-          </a:ln>
-        </p:spPr>
-      </p:sp>
-      <p:sp>
-        <p:nvSpPr>
-          <p:cNvPr id="63" name="Text 61"/>
-          <p:cNvSpPr txBox="1"/>
-          <p:nvPr/>
-        </p:nvSpPr>
-        <p:spPr>
-          <a:xfrm>
-            <a:off x="4754880" y="4736592"/>
-            <a:ext cx="2194560" cy="237744"/>
-          </a:xfrm>
-          <a:prstGeom prst="rect">
-            <a:avLst/>
-          </a:prstGeom>
-          <a:noFill/>
-          <a:ln/>
-        </p:spPr>
-        <p:txBody>
-          <a:bodyPr wrap="square" lIns="0" tIns="0" rIns="0" bIns="0" rtlCol="0" anchor="ctr"/>
-          <a:lstStyle/>
-          <a:p>
-            <a:pPr algn="ctr" indent="0" marL="0">
-              <a:buNone/>
-            </a:pPr>
-            <a:r>
-              <a:rPr lang="en-US" sz="900" i="1" dirty="0">
-                <a:solidFill>
-                  <a:srgbClr val="E3A83A"/>
-                </a:solidFill>
-                <a:latin typeface="Calibri" pitchFamily="34" charset="0"/>
-                <a:ea typeface="Calibri" pitchFamily="34" charset="-122"/>
-                <a:cs typeface="Calibri" pitchFamily="34" charset="-120"/>
-              </a:rPr>
-              <a:t>sync: same balances + root</a:t>
-            </a:r>
-            <a:endParaRPr lang="en-US" sz="900" dirty="0"/>
-          </a:p>
-        </p:txBody>
-      </p:sp>
-      <p:sp>
-        <p:nvSpPr>
-          <p:cNvPr id="64" name="Shape 62"/>
-          <p:cNvSpPr/>
-          <p:nvPr/>
-        </p:nvSpPr>
-        <p:spPr>
-          <a:xfrm>
-            <a:off x="8385048" y="4736592"/>
-            <a:ext cx="914" cy="256032"/>
-          </a:xfrm>
-          <a:prstGeom prst="line">
-            <a:avLst/>
-          </a:prstGeom>
-          <a:noFill/>
-          <a:ln w="22225">
-            <a:solidFill>
-              <a:srgbClr val="5D8AD6"/>
-            </a:solidFill>
-            <a:prstDash val="solid"/>
-            <a:tailEnd type="triangle"/>
-          </a:ln>
-        </p:spPr>
-      </p:sp>
-      <p:sp>
-        <p:nvSpPr>
-          <p:cNvPr id="65" name="Shape 63"/>
-          <p:cNvSpPr/>
-          <p:nvPr/>
-        </p:nvSpPr>
-        <p:spPr>
-          <a:xfrm>
-            <a:off x="9784080" y="1481328"/>
-            <a:ext cx="1920240" cy="4617720"/>
-          </a:xfrm>
-          <a:prstGeom prst="roundRect">
-            <a:avLst>
-              <a:gd name="adj" fmla="val 4762"/>
-            </a:avLst>
-          </a:prstGeom>
-          <a:solidFill>
-            <a:srgbClr val="172A26"/>
-          </a:solidFill>
-          <a:ln w="12700">
-            <a:solidFill>
-              <a:srgbClr val="7FE0C2"/>
-            </a:solidFill>
-            <a:prstDash val="solid"/>
-          </a:ln>
-        </p:spPr>
-      </p:sp>
-      <p:sp>
-        <p:nvSpPr>
-          <p:cNvPr id="66" name="Shape 64"/>
-          <p:cNvSpPr/>
-          <p:nvPr/>
-        </p:nvSpPr>
-        <p:spPr>
-          <a:xfrm>
-            <a:off x="10469880" y="1645920"/>
-            <a:ext cx="548640" cy="548640"/>
-          </a:xfrm>
-          <a:prstGeom prst="ellipse">
-            <a:avLst/>
-          </a:prstGeom>
-          <a:solidFill>
-            <a:srgbClr val="22A07F"/>
-          </a:solidFill>
-          <a:ln w="12700">
-            <a:solidFill>
-              <a:srgbClr val="22A07F"/>
-            </a:solidFill>
-            <a:prstDash val="solid"/>
-          </a:ln>
-        </p:spPr>
+              <a:t>eth.blockid.au/admin  ·  a person approves</a:t>
+            </a:r>
+            <a:endParaRPr lang="en-US" sz="850" dirty="0"/>
+          </a:p>
+        </p:txBody>
       </p:sp>
       <p:pic>
         <p:nvPicPr>
-          <p:cNvPr id="67" name="Image 0" descr="preencoded.png">    </p:cNvPr>
+          <p:cNvPr id="11" name="Image 0" descr="preencoded.png">    </p:cNvPr>
           <p:cNvPicPr>
             <a:picLocks noChangeAspect="1"/>
           </p:cNvPicPr>
@@ -6400,8 +4461,8 @@
         </p:blipFill>
         <p:spPr>
           <a:xfrm>
-            <a:off x="10607040" y="1783080"/>
-            <a:ext cx="274320" cy="274320"/>
+            <a:off x="502920" y="1874520"/>
+            <a:ext cx="5532120" cy="3457575"/>
           </a:xfrm>
           <a:prstGeom prst="rect">
             <a:avLst/>
@@ -6410,14 +4471,175 @@
       </p:pic>
       <p:sp>
         <p:nvSpPr>
-          <p:cNvPr id="68" name="Text 65"/>
-          <p:cNvSpPr txBox="1"/>
-          <p:nvPr/>
-        </p:nvSpPr>
-        <p:spPr>
-          <a:xfrm>
-            <a:off x="9875520" y="2286000"/>
-            <a:ext cx="1737360" cy="320040"/>
+          <p:cNvPr id="12" name="Shape 9"/>
+          <p:cNvSpPr/>
+          <p:nvPr/>
+        </p:nvSpPr>
+        <p:spPr>
+          <a:xfrm>
+            <a:off x="6135624" y="1563624"/>
+            <a:ext cx="5605272" cy="3805047"/>
+          </a:xfrm>
+          <a:prstGeom prst="roundRect">
+            <a:avLst>
+              <a:gd name="adj" fmla="val 1682"/>
+            </a:avLst>
+          </a:prstGeom>
+          <a:solidFill>
+            <a:srgbClr val="D9DFDD"/>
+          </a:solidFill>
+          <a:ln w="12700">
+            <a:solidFill>
+              <a:srgbClr val="D9DFDD"/>
+            </a:solidFill>
+            <a:prstDash val="solid"/>
+          </a:ln>
+          <a:effectLst>
+            <a:outerShdw sx="100000" sy="100000" kx="0" ky="0" algn="bl" rotWithShape="0" blurRad="203200" dist="76200" dir="5400000">
+              <a:srgbClr val="000000">
+                <a:alpha val="55000"/>
+              </a:srgbClr>
+            </a:outerShdw>
+          </a:effectLst>
+        </p:spPr>
+      </p:sp>
+      <p:sp>
+        <p:nvSpPr>
+          <p:cNvPr id="13" name="Shape 10"/>
+          <p:cNvSpPr/>
+          <p:nvPr/>
+        </p:nvSpPr>
+        <p:spPr>
+          <a:xfrm>
+            <a:off x="6172200" y="1600200"/>
+            <a:ext cx="5532120" cy="274320"/>
+          </a:xfrm>
+          <a:prstGeom prst="rect">
+            <a:avLst/>
+          </a:prstGeom>
+          <a:solidFill>
+            <a:srgbClr val="ECEFEE"/>
+          </a:solidFill>
+          <a:ln w="12700">
+            <a:solidFill>
+              <a:srgbClr val="ECEFEE"/>
+            </a:solidFill>
+            <a:prstDash val="solid"/>
+          </a:ln>
+        </p:spPr>
+      </p:sp>
+      <p:sp>
+        <p:nvSpPr>
+          <p:cNvPr id="14" name="Shape 11"/>
+          <p:cNvSpPr/>
+          <p:nvPr/>
+        </p:nvSpPr>
+        <p:spPr>
+          <a:xfrm>
+            <a:off x="6281928" y="1687068"/>
+            <a:ext cx="100584" cy="100584"/>
+          </a:xfrm>
+          <a:prstGeom prst="ellipse">
+            <a:avLst/>
+          </a:prstGeom>
+          <a:solidFill>
+            <a:srgbClr val="FF5F57"/>
+          </a:solidFill>
+          <a:ln w="12700">
+            <a:solidFill>
+              <a:srgbClr val="FF5F57"/>
+            </a:solidFill>
+            <a:prstDash val="solid"/>
+          </a:ln>
+        </p:spPr>
+      </p:sp>
+      <p:sp>
+        <p:nvSpPr>
+          <p:cNvPr id="15" name="Shape 12"/>
+          <p:cNvSpPr/>
+          <p:nvPr/>
+        </p:nvSpPr>
+        <p:spPr>
+          <a:xfrm>
+            <a:off x="6437376" y="1687068"/>
+            <a:ext cx="100584" cy="100584"/>
+          </a:xfrm>
+          <a:prstGeom prst="ellipse">
+            <a:avLst/>
+          </a:prstGeom>
+          <a:solidFill>
+            <a:srgbClr val="FEBC2E"/>
+          </a:solidFill>
+          <a:ln w="12700">
+            <a:solidFill>
+              <a:srgbClr val="FEBC2E"/>
+            </a:solidFill>
+            <a:prstDash val="solid"/>
+          </a:ln>
+        </p:spPr>
+      </p:sp>
+      <p:sp>
+        <p:nvSpPr>
+          <p:cNvPr id="16" name="Shape 13"/>
+          <p:cNvSpPr/>
+          <p:nvPr/>
+        </p:nvSpPr>
+        <p:spPr>
+          <a:xfrm>
+            <a:off x="6592824" y="1687068"/>
+            <a:ext cx="100584" cy="100584"/>
+          </a:xfrm>
+          <a:prstGeom prst="ellipse">
+            <a:avLst/>
+          </a:prstGeom>
+          <a:solidFill>
+            <a:srgbClr val="28C840"/>
+          </a:solidFill>
+          <a:ln w="12700">
+            <a:solidFill>
+              <a:srgbClr val="28C840"/>
+            </a:solidFill>
+            <a:prstDash val="solid"/>
+          </a:ln>
+        </p:spPr>
+      </p:sp>
+      <p:sp>
+        <p:nvSpPr>
+          <p:cNvPr id="17" name="Shape 14"/>
+          <p:cNvSpPr/>
+          <p:nvPr/>
+        </p:nvSpPr>
+        <p:spPr>
+          <a:xfrm>
+            <a:off x="6812280" y="1645920"/>
+            <a:ext cx="3840480" cy="182880"/>
+          </a:xfrm>
+          <a:prstGeom prst="roundRect">
+            <a:avLst>
+              <a:gd name="adj" fmla="val 25000"/>
+            </a:avLst>
+          </a:prstGeom>
+          <a:solidFill>
+            <a:srgbClr val="FFFFFF"/>
+          </a:solidFill>
+          <a:ln w="12700">
+            <a:solidFill>
+              <a:srgbClr val="D9DFDD"/>
+            </a:solidFill>
+            <a:prstDash val="solid"/>
+          </a:ln>
+        </p:spPr>
+      </p:sp>
+      <p:sp>
+        <p:nvSpPr>
+          <p:cNvPr id="18" name="Text 15"/>
+          <p:cNvSpPr txBox="1"/>
+          <p:nvPr/>
+        </p:nvSpPr>
+        <p:spPr>
+          <a:xfrm>
+            <a:off x="6903720" y="1645920"/>
+            <a:ext cx="3657600" cy="182880"/>
           </a:xfrm>
           <a:prstGeom prst="rect">
             <a:avLst/>
@@ -6429,211 +4651,444 @@
           <a:bodyPr wrap="square" lIns="0" tIns="0" rIns="0" bIns="0" rtlCol="0" anchor="ctr"/>
           <a:lstStyle/>
           <a:p>
-            <a:pPr algn="ctr" indent="0" marL="0">
-              <a:buNone/>
-            </a:pPr>
-            <a:r>
-              <a:rPr lang="en-US" sz="1350" b="1" dirty="0">
-                <a:solidFill>
-                  <a:srgbClr val="7FE0C2"/>
+            <a:pPr indent="0" marL="0">
+              <a:buNone/>
+            </a:pPr>
+            <a:r>
+              <a:rPr lang="en-US" sz="850" dirty="0">
+                <a:solidFill>
+                  <a:srgbClr val="4A5A56"/>
+                </a:solidFill>
+                <a:latin typeface="Calibri" pitchFamily="34" charset="0"/>
+                <a:ea typeface="Calibri" pitchFamily="34" charset="-122"/>
+                <a:cs typeface="Calibri" pitchFamily="34" charset="-120"/>
+              </a:rPr>
+              <a:t>eth.blockid.au/hsk  ·  HashKey Chain, chain 133</a:t>
+            </a:r>
+            <a:endParaRPr lang="en-US" sz="850" dirty="0"/>
+          </a:p>
+        </p:txBody>
+      </p:sp>
+      <p:pic>
+        <p:nvPicPr>
+          <p:cNvPr id="19" name="Image 1" descr="preencoded.png">    </p:cNvPr>
+          <p:cNvPicPr>
+            <a:picLocks noChangeAspect="1"/>
+          </p:cNvPicPr>
+          <p:nvPr/>
+        </p:nvPicPr>
+        <p:blipFill>
+          <a:blip r:embed="rId2"/>
+          <a:stretch>
+            <a:fillRect/>
+          </a:stretch>
+        </p:blipFill>
+        <p:spPr>
+          <a:xfrm>
+            <a:off x="6172200" y="1874520"/>
+            <a:ext cx="5532120" cy="3457575"/>
+          </a:xfrm>
+          <a:prstGeom prst="rect">
+            <a:avLst/>
+          </a:prstGeom>
+        </p:spPr>
+      </p:pic>
+      <p:sp>
+        <p:nvSpPr>
+          <p:cNvPr id="20" name="Shape 16"/>
+          <p:cNvSpPr/>
+          <p:nvPr/>
+        </p:nvSpPr>
+        <p:spPr>
+          <a:xfrm>
+            <a:off x="502920" y="5486400"/>
+            <a:ext cx="3611880" cy="749808"/>
+          </a:xfrm>
+          <a:prstGeom prst="roundRect">
+            <a:avLst>
+              <a:gd name="adj" fmla="val 14634"/>
+            </a:avLst>
+          </a:prstGeom>
+          <a:solidFill>
+            <a:srgbClr val="12201D"/>
+          </a:solidFill>
+          <a:ln w="12700">
+            <a:solidFill>
+              <a:srgbClr val="22A07F"/>
+            </a:solidFill>
+            <a:prstDash val="solid"/>
+          </a:ln>
+        </p:spPr>
+      </p:sp>
+      <p:sp>
+        <p:nvSpPr>
+          <p:cNvPr id="21" name="Text 17"/>
+          <p:cNvSpPr txBox="1"/>
+          <p:nvPr/>
+        </p:nvSpPr>
+        <p:spPr>
+          <a:xfrm>
+            <a:off x="667512" y="5522976"/>
+            <a:ext cx="3291840" cy="329184"/>
+          </a:xfrm>
+          <a:prstGeom prst="rect">
+            <a:avLst/>
+          </a:prstGeom>
+          <a:noFill/>
+          <a:ln/>
+        </p:spPr>
+        <p:txBody>
+          <a:bodyPr wrap="square" lIns="0" tIns="0" rIns="0" bIns="0" rtlCol="0" anchor="ctr"/>
+          <a:lstStyle/>
+          <a:p>
+            <a:pPr indent="0" marL="0">
+              <a:buNone/>
+            </a:pPr>
+            <a:r>
+              <a:rPr lang="en-US" sz="1400" b="1" dirty="0">
+                <a:solidFill>
+                  <a:srgbClr val="22A07F"/>
                 </a:solidFill>
                 <a:latin typeface="Arial" pitchFamily="34" charset="0"/>
                 <a:ea typeface="Arial" pitchFamily="34" charset="-122"/>
                 <a:cs typeface="Arial" pitchFamily="34" charset="-120"/>
               </a:rPr>
-              <a:t>Anyone checks</a:t>
-            </a:r>
-            <a:endParaRPr lang="en-US" sz="1350" dirty="0"/>
-          </a:p>
-        </p:txBody>
-      </p:sp>
-      <p:sp>
-        <p:nvSpPr>
-          <p:cNvPr id="69" name="Text 66"/>
-          <p:cNvSpPr txBox="1"/>
-          <p:nvPr/>
-        </p:nvSpPr>
-        <p:spPr>
-          <a:xfrm>
-            <a:off x="9921240" y="2651760"/>
-            <a:ext cx="1645920" cy="3291840"/>
-          </a:xfrm>
-          <a:prstGeom prst="rect">
-            <a:avLst/>
-          </a:prstGeom>
-          <a:noFill/>
-          <a:ln/>
-        </p:spPr>
-        <p:txBody>
-          <a:bodyPr wrap="square" lIns="0" tIns="0" rIns="0" bIns="0" rtlCol="0" anchor="t"/>
-          <a:lstStyle/>
-          <a:p>
-            <a:pPr algn="ctr" indent="0" marL="0">
+              <a:t>AI agents propose</a:t>
+            </a:r>
+            <a:endParaRPr lang="en-US" sz="1400" dirty="0"/>
+          </a:p>
+        </p:txBody>
+      </p:sp>
+      <p:sp>
+        <p:nvSpPr>
+          <p:cNvPr id="22" name="Text 18"/>
+          <p:cNvSpPr txBox="1"/>
+          <p:nvPr/>
+        </p:nvSpPr>
+        <p:spPr>
+          <a:xfrm>
+            <a:off x="667512" y="5852160"/>
+            <a:ext cx="3337560" cy="347472"/>
+          </a:xfrm>
+          <a:prstGeom prst="rect">
+            <a:avLst/>
+          </a:prstGeom>
+          <a:noFill/>
+          <a:ln/>
+        </p:spPr>
+        <p:txBody>
+          <a:bodyPr wrap="square" lIns="0" tIns="0" rIns="0" bIns="0" rtlCol="0" anchor="ctr"/>
+          <a:lstStyle/>
+          <a:p>
+            <a:pPr indent="0" marL="0">
               <a:buNone/>
             </a:pPr>
             <a:r>
               <a:rPr lang="en-US" sz="1050" dirty="0">
                 <a:solidFill>
-                  <a:srgbClr val="F2F7F5"/>
+                  <a:srgbClr val="A9BDB7"/>
                 </a:solidFill>
                 <a:latin typeface="Calibri" pitchFamily="34" charset="0"/>
                 <a:ea typeface="Calibri" pitchFamily="34" charset="-122"/>
                 <a:cs typeface="Calibri" pitchFamily="34" charset="-120"/>
               </a:rPr>
-              <a:t>/verify recomputes the report hash in the browser and reads it from all 3 chains.</a:t>
+              <a:t>research and value; no keys, no network path to keys</a:t>
             </a:r>
             <a:endParaRPr lang="en-US" sz="1050" dirty="0"/>
           </a:p>
+        </p:txBody>
+      </p:sp>
+      <p:sp>
+        <p:nvSpPr>
+          <p:cNvPr id="23" name="Text 19"/>
+          <p:cNvSpPr txBox="1"/>
+          <p:nvPr/>
+        </p:nvSpPr>
+        <p:spPr>
+          <a:xfrm>
+            <a:off x="4096512" y="5486400"/>
+            <a:ext cx="201168" cy="749808"/>
+          </a:xfrm>
+          <a:prstGeom prst="rect">
+            <a:avLst/>
+          </a:prstGeom>
+          <a:noFill/>
+          <a:ln/>
+        </p:spPr>
+        <p:txBody>
+          <a:bodyPr wrap="square" lIns="0" tIns="0" rIns="0" bIns="0" rtlCol="0" anchor="ctr"/>
+          <a:lstStyle/>
           <a:p>
             <a:pPr algn="ctr" indent="0" marL="0">
               <a:buNone/>
             </a:pPr>
-            <a:endParaRPr lang="en-US" sz="1050" dirty="0"/>
-          </a:p>
-          <a:p>
-            <a:pPr algn="ctr" indent="0" marL="0">
-              <a:buNone/>
-            </a:pPr>
-            <a:r>
-              <a:rPr lang="en-US" sz="1050" dirty="0">
-                <a:solidFill>
-                  <a:srgbClr val="F2F7F5"/>
+            <a:r>
+              <a:rPr lang="en-US" sz="1600" b="1" dirty="0">
+                <a:solidFill>
+                  <a:srgbClr val="A9BDB7"/>
                 </a:solidFill>
                 <a:latin typeface="Calibri" pitchFamily="34" charset="0"/>
                 <a:ea typeface="Calibri" pitchFamily="34" charset="-122"/>
                 <a:cs typeface="Calibri" pitchFamily="34" charset="-120"/>
               </a:rPr>
-              <a:t>Explorers:</a:t>
-            </a:r>
-            <a:endParaRPr lang="en-US" sz="1050" dirty="0"/>
-          </a:p>
-          <a:p>
-            <a:pPr algn="ctr" indent="0" marL="0">
+              <a:t>→</a:t>
+            </a:r>
+            <a:endParaRPr lang="en-US" sz="1600" dirty="0"/>
+          </a:p>
+        </p:txBody>
+      </p:sp>
+      <p:sp>
+        <p:nvSpPr>
+          <p:cNvPr id="24" name="Shape 20"/>
+          <p:cNvSpPr/>
+          <p:nvPr/>
+        </p:nvSpPr>
+        <p:spPr>
+          <a:xfrm>
+            <a:off x="4279392" y="5486400"/>
+            <a:ext cx="3611880" cy="749808"/>
+          </a:xfrm>
+          <a:prstGeom prst="roundRect">
+            <a:avLst>
+              <a:gd name="adj" fmla="val 14634"/>
+            </a:avLst>
+          </a:prstGeom>
+          <a:solidFill>
+            <a:srgbClr val="12201D"/>
+          </a:solidFill>
+          <a:ln w="12700">
+            <a:solidFill>
+              <a:srgbClr val="E3A83A"/>
+            </a:solidFill>
+            <a:prstDash val="solid"/>
+          </a:ln>
+        </p:spPr>
+      </p:sp>
+      <p:sp>
+        <p:nvSpPr>
+          <p:cNvPr id="25" name="Text 21"/>
+          <p:cNvSpPr txBox="1"/>
+          <p:nvPr/>
+        </p:nvSpPr>
+        <p:spPr>
+          <a:xfrm>
+            <a:off x="4443984" y="5522976"/>
+            <a:ext cx="3291840" cy="329184"/>
+          </a:xfrm>
+          <a:prstGeom prst="rect">
+            <a:avLst/>
+          </a:prstGeom>
+          <a:noFill/>
+          <a:ln/>
+        </p:spPr>
+        <p:txBody>
+          <a:bodyPr wrap="square" lIns="0" tIns="0" rIns="0" bIns="0" rtlCol="0" anchor="ctr"/>
+          <a:lstStyle/>
+          <a:p>
+            <a:pPr indent="0" marL="0">
+              <a:buNone/>
+            </a:pPr>
+            <a:r>
+              <a:rPr lang="en-US" sz="1400" b="1" dirty="0">
+                <a:solidFill>
+                  <a:srgbClr val="E3A83A"/>
+                </a:solidFill>
+                <a:latin typeface="Arial" pitchFamily="34" charset="0"/>
+                <a:ea typeface="Arial" pitchFamily="34" charset="-122"/>
+                <a:cs typeface="Arial" pitchFamily="34" charset="-120"/>
+              </a:rPr>
+              <a:t>A person approves</a:t>
+            </a:r>
+            <a:endParaRPr lang="en-US" sz="1400" dirty="0"/>
+          </a:p>
+        </p:txBody>
+      </p:sp>
+      <p:sp>
+        <p:nvSpPr>
+          <p:cNvPr id="26" name="Text 22"/>
+          <p:cNvSpPr txBox="1"/>
+          <p:nvPr/>
+        </p:nvSpPr>
+        <p:spPr>
+          <a:xfrm>
+            <a:off x="4443984" y="5852160"/>
+            <a:ext cx="3337560" cy="347472"/>
+          </a:xfrm>
+          <a:prstGeom prst="rect">
+            <a:avLst/>
+          </a:prstGeom>
+          <a:noFill/>
+          <a:ln/>
+        </p:spPr>
+        <p:txBody>
+          <a:bodyPr wrap="square" lIns="0" tIns="0" rIns="0" bIns="0" rtlCol="0" anchor="ctr"/>
+          <a:lstStyle/>
+          <a:p>
+            <a:pPr indent="0" marL="0">
               <a:buNone/>
             </a:pPr>
             <a:r>
               <a:rPr lang="en-US" sz="1050" dirty="0">
                 <a:solidFill>
-                  <a:srgbClr val="F2F7F5"/>
+                  <a:srgbClr val="A9BDB7"/>
                 </a:solidFill>
                 <a:latin typeface="Calibri" pitchFamily="34" charset="0"/>
                 <a:ea typeface="Calibri" pitchFamily="34" charset="-122"/>
                 <a:cs typeface="Calibri" pitchFamily="34" charset="-120"/>
               </a:rPr>
-              <a:t>scan.blockid.au</a:t>
+              <a:t>admin wallet signs one approval, four-eyes rule on chain</a:t>
             </a:r>
             <a:endParaRPr lang="en-US" sz="1050" dirty="0"/>
           </a:p>
+        </p:txBody>
+      </p:sp>
+      <p:sp>
+        <p:nvSpPr>
+          <p:cNvPr id="27" name="Text 23"/>
+          <p:cNvSpPr txBox="1"/>
+          <p:nvPr/>
+        </p:nvSpPr>
+        <p:spPr>
+          <a:xfrm>
+            <a:off x="7872984" y="5486400"/>
+            <a:ext cx="201168" cy="749808"/>
+          </a:xfrm>
+          <a:prstGeom prst="rect">
+            <a:avLst/>
+          </a:prstGeom>
+          <a:noFill/>
+          <a:ln/>
+        </p:spPr>
+        <p:txBody>
+          <a:bodyPr wrap="square" lIns="0" tIns="0" rIns="0" bIns="0" rtlCol="0" anchor="ctr"/>
+          <a:lstStyle/>
           <a:p>
             <a:pPr algn="ctr" indent="0" marL="0">
               <a:buNone/>
             </a:pPr>
             <a:r>
-              <a:rPr lang="en-US" sz="1050" dirty="0">
-                <a:solidFill>
-                  <a:srgbClr val="F2F7F5"/>
+              <a:rPr lang="en-US" sz="1600" b="1" dirty="0">
+                <a:solidFill>
+                  <a:srgbClr val="A9BDB7"/>
                 </a:solidFill>
                 <a:latin typeface="Calibri" pitchFamily="34" charset="0"/>
                 <a:ea typeface="Calibri" pitchFamily="34" charset="-122"/>
                 <a:cs typeface="Calibri" pitchFamily="34" charset="-120"/>
               </a:rPr>
-              <a:t>HashKey · Etherscan</a:t>
-            </a:r>
-            <a:endParaRPr lang="en-US" sz="1050" dirty="0"/>
-          </a:p>
-          <a:p>
-            <a:pPr algn="ctr" indent="0" marL="0">
-              <a:buNone/>
-            </a:pPr>
-            <a:endParaRPr lang="en-US" sz="1050" dirty="0"/>
-          </a:p>
-          <a:p>
-            <a:pPr algn="ctr" indent="0" marL="0">
+              <a:t>→</a:t>
+            </a:r>
+            <a:endParaRPr lang="en-US" sz="1600" dirty="0"/>
+          </a:p>
+        </p:txBody>
+      </p:sp>
+      <p:sp>
+        <p:nvSpPr>
+          <p:cNvPr id="28" name="Shape 24"/>
+          <p:cNvSpPr/>
+          <p:nvPr/>
+        </p:nvSpPr>
+        <p:spPr>
+          <a:xfrm>
+            <a:off x="8055864" y="5486400"/>
+            <a:ext cx="3611880" cy="749808"/>
+          </a:xfrm>
+          <a:prstGeom prst="roundRect">
+            <a:avLst>
+              <a:gd name="adj" fmla="val 14634"/>
+            </a:avLst>
+          </a:prstGeom>
+          <a:solidFill>
+            <a:srgbClr val="12201D"/>
+          </a:solidFill>
+          <a:ln w="12700">
+            <a:solidFill>
+              <a:srgbClr val="9B7BD4"/>
+            </a:solidFill>
+            <a:prstDash val="solid"/>
+          </a:ln>
+        </p:spPr>
+      </p:sp>
+      <p:sp>
+        <p:nvSpPr>
+          <p:cNvPr id="29" name="Text 25"/>
+          <p:cNvSpPr txBox="1"/>
+          <p:nvPr/>
+        </p:nvSpPr>
+        <p:spPr>
+          <a:xfrm>
+            <a:off x="8220456" y="5522976"/>
+            <a:ext cx="3291840" cy="329184"/>
+          </a:xfrm>
+          <a:prstGeom prst="rect">
+            <a:avLst/>
+          </a:prstGeom>
+          <a:noFill/>
+          <a:ln/>
+        </p:spPr>
+        <p:txBody>
+          <a:bodyPr wrap="square" lIns="0" tIns="0" rIns="0" bIns="0" rtlCol="0" anchor="ctr"/>
+          <a:lstStyle/>
+          <a:p>
+            <a:pPr indent="0" marL="0">
+              <a:buNone/>
+            </a:pPr>
+            <a:r>
+              <a:rPr lang="en-US" sz="1400" b="1" dirty="0">
+                <a:solidFill>
+                  <a:srgbClr val="9B7BD4"/>
+                </a:solidFill>
+                <a:latin typeface="Arial" pitchFamily="34" charset="0"/>
+                <a:ea typeface="Arial" pitchFamily="34" charset="-122"/>
+                <a:cs typeface="Arial" pitchFamily="34" charset="-120"/>
+              </a:rPr>
+              <a:t>Isolated issuer acts</a:t>
+            </a:r>
+            <a:endParaRPr lang="en-US" sz="1400" dirty="0"/>
+          </a:p>
+        </p:txBody>
+      </p:sp>
+      <p:sp>
+        <p:nvSpPr>
+          <p:cNvPr id="30" name="Text 26"/>
+          <p:cNvSpPr txBox="1"/>
+          <p:nvPr/>
+        </p:nvSpPr>
+        <p:spPr>
+          <a:xfrm>
+            <a:off x="8220456" y="5852160"/>
+            <a:ext cx="3337560" cy="347472"/>
+          </a:xfrm>
+          <a:prstGeom prst="rect">
+            <a:avLst/>
+          </a:prstGeom>
+          <a:noFill/>
+          <a:ln/>
+        </p:spPr>
+        <p:txBody>
+          <a:bodyPr wrap="square" lIns="0" tIns="0" rIns="0" bIns="0" rtlCol="0" anchor="ctr"/>
+          <a:lstStyle/>
+          <a:p>
+            <a:pPr indent="0" marL="0">
               <a:buNone/>
             </a:pPr>
             <a:r>
               <a:rPr lang="en-US" sz="1050" dirty="0">
                 <a:solidFill>
-                  <a:srgbClr val="F2F7F5"/>
+                  <a:srgbClr val="A9BDB7"/>
                 </a:solidFill>
                 <a:latin typeface="Calibri" pitchFamily="34" charset="0"/>
                 <a:ea typeface="Calibri" pitchFamily="34" charset="-122"/>
                 <a:cs typeface="Calibri" pitchFamily="34" charset="-120"/>
               </a:rPr>
-              <a:t>Match = ✓</a:t>
+              <a:t>only key holder; writes BlockID Chain, mirrors Ethereum + HashKey</a:t>
             </a:r>
             <a:endParaRPr lang="en-US" sz="1050" dirty="0"/>
           </a:p>
-          <a:p>
-            <a:pPr algn="ctr" indent="0" marL="0">
-              <a:buNone/>
-            </a:pPr>
-            <a:r>
-              <a:rPr lang="en-US" sz="1050" dirty="0">
-                <a:solidFill>
-                  <a:srgbClr val="F2F7F5"/>
-                </a:solidFill>
-                <a:latin typeface="Calibri" pitchFamily="34" charset="0"/>
-                <a:ea typeface="Calibri" pitchFamily="34" charset="-122"/>
-                <a:cs typeface="Calibri" pitchFamily="34" charset="-120"/>
-              </a:rPr>
-              <a:t>Any change = ✗</a:t>
-            </a:r>
-            <a:endParaRPr lang="en-US" sz="1050" dirty="0"/>
-          </a:p>
-        </p:txBody>
-      </p:sp>
-      <p:sp>
-        <p:nvSpPr>
-          <p:cNvPr id="70" name="Shape 67"/>
-          <p:cNvSpPr/>
-          <p:nvPr/>
-        </p:nvSpPr>
-        <p:spPr>
-          <a:xfrm>
-            <a:off x="9564624" y="4178808"/>
-            <a:ext cx="210312" cy="914"/>
-          </a:xfrm>
-          <a:prstGeom prst="line">
-            <a:avLst/>
-          </a:prstGeom>
-          <a:noFill/>
-          <a:ln w="22225">
-            <a:solidFill>
-              <a:srgbClr val="7FE0C2"/>
-            </a:solidFill>
-            <a:prstDash val="solid"/>
-            <a:tailEnd type="triangle"/>
-          </a:ln>
-        </p:spPr>
-      </p:sp>
-      <p:sp>
-        <p:nvSpPr>
-          <p:cNvPr id="71" name="Shape 68"/>
-          <p:cNvSpPr/>
-          <p:nvPr/>
-        </p:nvSpPr>
-        <p:spPr>
-          <a:xfrm>
-            <a:off x="9564624" y="5550408"/>
-            <a:ext cx="210312" cy="914"/>
-          </a:xfrm>
-          <a:prstGeom prst="line">
-            <a:avLst/>
-          </a:prstGeom>
-          <a:noFill/>
-          <a:ln w="22225">
-            <a:solidFill>
-              <a:srgbClr val="7FE0C2"/>
-            </a:solidFill>
-            <a:prstDash val="solid"/>
-            <a:tailEnd type="triangle"/>
-          </a:ln>
-        </p:spPr>
-      </p:sp>
-      <p:sp>
-        <p:nvSpPr>
-          <p:cNvPr id="72" name="Text 69"/>
+        </p:txBody>
+      </p:sp>
+      <p:sp>
+        <p:nvSpPr>
+          <p:cNvPr id="31" name="Text 27"/>
           <p:cNvSpPr txBox="1"/>
           <p:nvPr/>
         </p:nvSpPr>
@@ -6729,13 +5184,1478 @@
             <a:r>
               <a:rPr lang="en-US" sz="1150" b="1" spc="300" kern="0" dirty="0">
                 <a:solidFill>
-                  <a:srgbClr val="22A07F"/>
+                  <a:srgbClr val="7FE0C2"/>
                 </a:solidFill>
                 <a:latin typeface="Calibri" pitchFamily="34" charset="0"/>
                 <a:ea typeface="Calibri" pitchFamily="34" charset="-122"/>
                 <a:cs typeface="Calibri" pitchFamily="34" charset="-120"/>
               </a:rPr>
-              <a:t>12 / 12   ·   WORKING TODAY · THE ASK</a:t>
+              <a:t>12 / 13   ·   THE TEAM</a:t>
+            </a:r>
+            <a:endParaRPr lang="en-US" sz="1150" dirty="0"/>
+          </a:p>
+        </p:txBody>
+      </p:sp>
+      <p:sp>
+        <p:nvSpPr>
+          <p:cNvPr id="3" name="Text 1"/>
+          <p:cNvSpPr txBox="1"/>
+          <p:nvPr/>
+        </p:nvSpPr>
+        <p:spPr>
+          <a:xfrm>
+            <a:off x="502920" y="640080"/>
+            <a:ext cx="11155680" cy="731520"/>
+          </a:xfrm>
+          <a:prstGeom prst="rect">
+            <a:avLst/>
+          </a:prstGeom>
+          <a:noFill/>
+          <a:ln/>
+        </p:spPr>
+        <p:txBody>
+          <a:bodyPr wrap="square" lIns="0" tIns="0" rIns="0" bIns="0" rtlCol="0" anchor="ctr"/>
+          <a:lstStyle/>
+          <a:p>
+            <a:pPr indent="0" marL="0">
+              <a:buNone/>
+            </a:pPr>
+            <a:r>
+              <a:rPr lang="en-US" sz="3000" b="1" dirty="0">
+                <a:solidFill>
+                  <a:srgbClr val="F2F7F5"/>
+                </a:solidFill>
+                <a:latin typeface="Arial" pitchFamily="34" charset="0"/>
+                <a:ea typeface="Arial" pitchFamily="34" charset="-122"/>
+                <a:cs typeface="Arial" pitchFamily="34" charset="-120"/>
+              </a:rPr>
+              <a:t>Built by founders who have run tech at scale.</a:t>
+            </a:r>
+            <a:endParaRPr lang="en-US" sz="3000" dirty="0"/>
+          </a:p>
+        </p:txBody>
+      </p:sp>
+      <p:sp>
+        <p:nvSpPr>
+          <p:cNvPr id="4" name="Shape 2"/>
+          <p:cNvSpPr/>
+          <p:nvPr/>
+        </p:nvSpPr>
+        <p:spPr>
+          <a:xfrm>
+            <a:off x="502920" y="1554480"/>
+            <a:ext cx="5532120" cy="2926080"/>
+          </a:xfrm>
+          <a:prstGeom prst="roundRect">
+            <a:avLst>
+              <a:gd name="adj" fmla="val 3750"/>
+            </a:avLst>
+          </a:prstGeom>
+          <a:solidFill>
+            <a:srgbClr val="12201D"/>
+          </a:solidFill>
+          <a:ln w="12700">
+            <a:solidFill>
+              <a:srgbClr val="22A07F"/>
+            </a:solidFill>
+            <a:prstDash val="solid"/>
+          </a:ln>
+        </p:spPr>
+      </p:sp>
+      <p:sp>
+        <p:nvSpPr>
+          <p:cNvPr id="5" name="Shape 3"/>
+          <p:cNvSpPr/>
+          <p:nvPr/>
+        </p:nvSpPr>
+        <p:spPr>
+          <a:xfrm>
+            <a:off x="777240" y="1783080"/>
+            <a:ext cx="868680" cy="868680"/>
+          </a:xfrm>
+          <a:prstGeom prst="ellipse">
+            <a:avLst/>
+          </a:prstGeom>
+          <a:solidFill>
+            <a:srgbClr val="22A07F"/>
+          </a:solidFill>
+          <a:ln w="12700">
+            <a:solidFill>
+              <a:srgbClr val="22A07F"/>
+            </a:solidFill>
+            <a:prstDash val="solid"/>
+          </a:ln>
+        </p:spPr>
+      </p:sp>
+      <p:sp>
+        <p:nvSpPr>
+          <p:cNvPr id="6" name="Text 4"/>
+          <p:cNvSpPr txBox="1"/>
+          <p:nvPr/>
+        </p:nvSpPr>
+        <p:spPr>
+          <a:xfrm>
+            <a:off x="777240" y="1783080"/>
+            <a:ext cx="868680" cy="868680"/>
+          </a:xfrm>
+          <a:prstGeom prst="rect">
+            <a:avLst/>
+          </a:prstGeom>
+          <a:noFill/>
+          <a:ln/>
+        </p:spPr>
+        <p:txBody>
+          <a:bodyPr wrap="square" lIns="0" tIns="0" rIns="0" bIns="0" rtlCol="0" anchor="ctr"/>
+          <a:lstStyle/>
+          <a:p>
+            <a:pPr algn="ctr" indent="0" marL="0">
+              <a:buNone/>
+            </a:pPr>
+            <a:r>
+              <a:rPr lang="en-US" sz="2400" b="1" dirty="0">
+                <a:solidFill>
+                  <a:srgbClr val="0A1311"/>
+                </a:solidFill>
+                <a:latin typeface="Arial" pitchFamily="34" charset="0"/>
+                <a:ea typeface="Arial" pitchFamily="34" charset="-122"/>
+                <a:cs typeface="Arial" pitchFamily="34" charset="-120"/>
+              </a:rPr>
+              <a:t>DL</a:t>
+            </a:r>
+            <a:endParaRPr lang="en-US" sz="2400" dirty="0"/>
+          </a:p>
+        </p:txBody>
+      </p:sp>
+      <p:sp>
+        <p:nvSpPr>
+          <p:cNvPr id="7" name="Text 5"/>
+          <p:cNvSpPr txBox="1"/>
+          <p:nvPr/>
+        </p:nvSpPr>
+        <p:spPr>
+          <a:xfrm>
+            <a:off x="1828800" y="1783080"/>
+            <a:ext cx="4023360" cy="411480"/>
+          </a:xfrm>
+          <a:prstGeom prst="rect">
+            <a:avLst/>
+          </a:prstGeom>
+          <a:noFill/>
+          <a:ln/>
+        </p:spPr>
+        <p:txBody>
+          <a:bodyPr wrap="square" lIns="0" tIns="0" rIns="0" bIns="0" rtlCol="0" anchor="ctr"/>
+          <a:lstStyle/>
+          <a:p>
+            <a:pPr indent="0" marL="0">
+              <a:buNone/>
+            </a:pPr>
+            <a:r>
+              <a:rPr lang="en-US" sz="2100" b="1" dirty="0">
+                <a:solidFill>
+                  <a:srgbClr val="F2F7F5"/>
+                </a:solidFill>
+                <a:latin typeface="Arial" pitchFamily="34" charset="0"/>
+                <a:ea typeface="Arial" pitchFamily="34" charset="-122"/>
+                <a:cs typeface="Arial" pitchFamily="34" charset="-120"/>
+              </a:rPr>
+              <a:t>Do Van Long</a:t>
+            </a:r>
+            <a:endParaRPr lang="en-US" sz="2100" dirty="0"/>
+          </a:p>
+        </p:txBody>
+      </p:sp>
+      <p:sp>
+        <p:nvSpPr>
+          <p:cNvPr id="8" name="Text 6"/>
+          <p:cNvSpPr txBox="1"/>
+          <p:nvPr/>
+        </p:nvSpPr>
+        <p:spPr>
+          <a:xfrm>
+            <a:off x="1828800" y="2212848"/>
+            <a:ext cx="4023360" cy="320040"/>
+          </a:xfrm>
+          <a:prstGeom prst="rect">
+            <a:avLst/>
+          </a:prstGeom>
+          <a:noFill/>
+          <a:ln/>
+        </p:spPr>
+        <p:txBody>
+          <a:bodyPr wrap="square" lIns="0" tIns="0" rIns="0" bIns="0" rtlCol="0" anchor="ctr"/>
+          <a:lstStyle/>
+          <a:p>
+            <a:pPr indent="0" marL="0">
+              <a:buNone/>
+            </a:pPr>
+            <a:r>
+              <a:rPr lang="en-US" sz="1400" b="1" dirty="0">
+                <a:solidFill>
+                  <a:srgbClr val="22A07F"/>
+                </a:solidFill>
+                <a:latin typeface="Calibri" pitchFamily="34" charset="0"/>
+                <a:ea typeface="Calibri" pitchFamily="34" charset="-122"/>
+                <a:cs typeface="Calibri" pitchFamily="34" charset="-120"/>
+              </a:rPr>
+              <a:t>Founder &amp; CEO</a:t>
+            </a:r>
+            <a:endParaRPr lang="en-US" sz="1400" dirty="0"/>
+          </a:p>
+        </p:txBody>
+      </p:sp>
+      <p:sp>
+        <p:nvSpPr>
+          <p:cNvPr id="9" name="Shape 7"/>
+          <p:cNvSpPr/>
+          <p:nvPr/>
+        </p:nvSpPr>
+        <p:spPr>
+          <a:xfrm>
+            <a:off x="777240" y="2926080"/>
+            <a:ext cx="146304" cy="146304"/>
+          </a:xfrm>
+          <a:prstGeom prst="ellipse">
+            <a:avLst/>
+          </a:prstGeom>
+          <a:solidFill>
+            <a:srgbClr val="22A07F"/>
+          </a:solidFill>
+          <a:ln w="12700">
+            <a:solidFill>
+              <a:srgbClr val="22A07F"/>
+            </a:solidFill>
+            <a:prstDash val="solid"/>
+          </a:ln>
+        </p:spPr>
+      </p:sp>
+      <p:sp>
+        <p:nvSpPr>
+          <p:cNvPr id="10" name="Text 8"/>
+          <p:cNvSpPr txBox="1"/>
+          <p:nvPr/>
+        </p:nvSpPr>
+        <p:spPr>
+          <a:xfrm>
+            <a:off x="1069848" y="2834640"/>
+            <a:ext cx="4828032" cy="640080"/>
+          </a:xfrm>
+          <a:prstGeom prst="rect">
+            <a:avLst/>
+          </a:prstGeom>
+          <a:noFill/>
+          <a:ln/>
+        </p:spPr>
+        <p:txBody>
+          <a:bodyPr wrap="square" lIns="0" tIns="0" rIns="0" bIns="0" rtlCol="0" anchor="t"/>
+          <a:lstStyle/>
+          <a:p>
+            <a:pPr indent="0" marL="0">
+              <a:buNone/>
+            </a:pPr>
+            <a:r>
+              <a:rPr lang="en-US" sz="1300" dirty="0">
+                <a:solidFill>
+                  <a:srgbClr val="F2F7F5"/>
+                </a:solidFill>
+                <a:latin typeface="Calibri" pitchFamily="34" charset="0"/>
+                <a:ea typeface="Calibri" pitchFamily="34" charset="-122"/>
+                <a:cs typeface="Calibri" pitchFamily="34" charset="-120"/>
+              </a:rPr>
+              <a:t>Former CTO of major Vietnamese corporations</a:t>
+            </a:r>
+            <a:endParaRPr lang="en-US" sz="1300" dirty="0"/>
+          </a:p>
+        </p:txBody>
+      </p:sp>
+      <p:sp>
+        <p:nvSpPr>
+          <p:cNvPr id="11" name="Shape 9"/>
+          <p:cNvSpPr/>
+          <p:nvPr/>
+        </p:nvSpPr>
+        <p:spPr>
+          <a:xfrm>
+            <a:off x="777240" y="3310128"/>
+            <a:ext cx="146304" cy="146304"/>
+          </a:xfrm>
+          <a:prstGeom prst="ellipse">
+            <a:avLst/>
+          </a:prstGeom>
+          <a:solidFill>
+            <a:srgbClr val="22A07F"/>
+          </a:solidFill>
+          <a:ln w="12700">
+            <a:solidFill>
+              <a:srgbClr val="22A07F"/>
+            </a:solidFill>
+            <a:prstDash val="solid"/>
+          </a:ln>
+        </p:spPr>
+      </p:sp>
+      <p:sp>
+        <p:nvSpPr>
+          <p:cNvPr id="12" name="Text 10"/>
+          <p:cNvSpPr txBox="1"/>
+          <p:nvPr/>
+        </p:nvSpPr>
+        <p:spPr>
+          <a:xfrm>
+            <a:off x="1069848" y="3218688"/>
+            <a:ext cx="4828032" cy="640080"/>
+          </a:xfrm>
+          <a:prstGeom prst="rect">
+            <a:avLst/>
+          </a:prstGeom>
+          <a:noFill/>
+          <a:ln/>
+        </p:spPr>
+        <p:txBody>
+          <a:bodyPr wrap="square" lIns="0" tIns="0" rIns="0" bIns="0" rtlCol="0" anchor="t"/>
+          <a:lstStyle/>
+          <a:p>
+            <a:pPr indent="0" marL="0">
+              <a:buNone/>
+            </a:pPr>
+            <a:r>
+              <a:rPr lang="en-US" sz="1300" dirty="0">
+                <a:solidFill>
+                  <a:srgbClr val="F2F7F5"/>
+                </a:solidFill>
+                <a:latin typeface="Calibri" pitchFamily="34" charset="0"/>
+                <a:ea typeface="Calibri" pitchFamily="34" charset="-122"/>
+                <a:cs typeface="Calibri" pitchFamily="34" charset="-120"/>
+              </a:rPr>
+              <a:t>Founded Vietnam Blockchain Corporation (2016) and Auschain (Sydney)</a:t>
+            </a:r>
+            <a:endParaRPr lang="en-US" sz="1300" dirty="0"/>
+          </a:p>
+        </p:txBody>
+      </p:sp>
+      <p:sp>
+        <p:nvSpPr>
+          <p:cNvPr id="13" name="Shape 11"/>
+          <p:cNvSpPr/>
+          <p:nvPr/>
+        </p:nvSpPr>
+        <p:spPr>
+          <a:xfrm>
+            <a:off x="777240" y="3694176"/>
+            <a:ext cx="146304" cy="146304"/>
+          </a:xfrm>
+          <a:prstGeom prst="ellipse">
+            <a:avLst/>
+          </a:prstGeom>
+          <a:solidFill>
+            <a:srgbClr val="22A07F"/>
+          </a:solidFill>
+          <a:ln w="12700">
+            <a:solidFill>
+              <a:srgbClr val="22A07F"/>
+            </a:solidFill>
+            <a:prstDash val="solid"/>
+          </a:ln>
+        </p:spPr>
+      </p:sp>
+      <p:sp>
+        <p:nvSpPr>
+          <p:cNvPr id="14" name="Text 12"/>
+          <p:cNvSpPr txBox="1"/>
+          <p:nvPr/>
+        </p:nvSpPr>
+        <p:spPr>
+          <a:xfrm>
+            <a:off x="1069848" y="3602736"/>
+            <a:ext cx="4828032" cy="640080"/>
+          </a:xfrm>
+          <a:prstGeom prst="rect">
+            <a:avLst/>
+          </a:prstGeom>
+          <a:noFill/>
+          <a:ln/>
+        </p:spPr>
+        <p:txBody>
+          <a:bodyPr wrap="square" lIns="0" tIns="0" rIns="0" bIns="0" rtlCol="0" anchor="t"/>
+          <a:lstStyle/>
+          <a:p>
+            <a:pPr indent="0" marL="0">
+              <a:buNone/>
+            </a:pPr>
+            <a:r>
+              <a:rPr lang="en-US" sz="1300" dirty="0">
+                <a:solidFill>
+                  <a:srgbClr val="F2F7F5"/>
+                </a:solidFill>
+                <a:latin typeface="Calibri" pitchFamily="34" charset="0"/>
+                <a:ea typeface="Calibri" pitchFamily="34" charset="-122"/>
+                <a:cs typeface="Calibri" pitchFamily="34" charset="-120"/>
+              </a:rPr>
+              <a:t>Built Agridential, national-scale blockchain traceability</a:t>
+            </a:r>
+            <a:endParaRPr lang="en-US" sz="1300" dirty="0"/>
+          </a:p>
+        </p:txBody>
+      </p:sp>
+      <p:sp>
+        <p:nvSpPr>
+          <p:cNvPr id="15" name="Shape 13"/>
+          <p:cNvSpPr/>
+          <p:nvPr/>
+        </p:nvSpPr>
+        <p:spPr>
+          <a:xfrm>
+            <a:off x="777240" y="3977640"/>
+            <a:ext cx="4983480" cy="347472"/>
+          </a:xfrm>
+          <a:prstGeom prst="roundRect">
+            <a:avLst>
+              <a:gd name="adj" fmla="val 21053"/>
+            </a:avLst>
+          </a:prstGeom>
+          <a:solidFill>
+            <a:srgbClr val="172A26"/>
+          </a:solidFill>
+          <a:ln w="12700">
+            <a:solidFill>
+              <a:srgbClr val="22A07F"/>
+            </a:solidFill>
+            <a:prstDash val="solid"/>
+          </a:ln>
+        </p:spPr>
+      </p:sp>
+      <p:sp>
+        <p:nvSpPr>
+          <p:cNvPr id="16" name="Text 14"/>
+          <p:cNvSpPr txBox="1"/>
+          <p:nvPr/>
+        </p:nvSpPr>
+        <p:spPr>
+          <a:xfrm>
+            <a:off x="777240" y="3977640"/>
+            <a:ext cx="4983480" cy="347472"/>
+          </a:xfrm>
+          <a:prstGeom prst="rect">
+            <a:avLst/>
+          </a:prstGeom>
+          <a:noFill/>
+          <a:ln/>
+        </p:spPr>
+        <p:txBody>
+          <a:bodyPr wrap="square" lIns="0" tIns="0" rIns="0" bIns="0" rtlCol="0" anchor="ctr"/>
+          <a:lstStyle/>
+          <a:p>
+            <a:pPr algn="ctr" indent="0" marL="0">
+              <a:buNone/>
+            </a:pPr>
+            <a:r>
+              <a:rPr lang="en-US" sz="1250" b="1" dirty="0">
+                <a:solidFill>
+                  <a:srgbClr val="F2F7F5"/>
+                </a:solidFill>
+                <a:latin typeface="Calibri" pitchFamily="34" charset="0"/>
+                <a:ea typeface="Calibri" pitchFamily="34" charset="-122"/>
+                <a:cs typeface="Calibri" pitchFamily="34" charset="-120"/>
+              </a:rPr>
+              <a:t>Australia Global Talent visa (subclass 858)</a:t>
+            </a:r>
+            <a:endParaRPr lang="en-US" sz="1250" dirty="0"/>
+          </a:p>
+        </p:txBody>
+      </p:sp>
+      <p:sp>
+        <p:nvSpPr>
+          <p:cNvPr id="17" name="Shape 15"/>
+          <p:cNvSpPr/>
+          <p:nvPr/>
+        </p:nvSpPr>
+        <p:spPr>
+          <a:xfrm>
+            <a:off x="6172200" y="1554480"/>
+            <a:ext cx="5532120" cy="2926080"/>
+          </a:xfrm>
+          <a:prstGeom prst="roundRect">
+            <a:avLst>
+              <a:gd name="adj" fmla="val 3750"/>
+            </a:avLst>
+          </a:prstGeom>
+          <a:solidFill>
+            <a:srgbClr val="12201D"/>
+          </a:solidFill>
+          <a:ln w="12700">
+            <a:solidFill>
+              <a:srgbClr val="E3A83A"/>
+            </a:solidFill>
+            <a:prstDash val="solid"/>
+          </a:ln>
+        </p:spPr>
+      </p:sp>
+      <p:sp>
+        <p:nvSpPr>
+          <p:cNvPr id="18" name="Shape 16"/>
+          <p:cNvSpPr/>
+          <p:nvPr/>
+        </p:nvSpPr>
+        <p:spPr>
+          <a:xfrm>
+            <a:off x="6446520" y="1783080"/>
+            <a:ext cx="868680" cy="868680"/>
+          </a:xfrm>
+          <a:prstGeom prst="ellipse">
+            <a:avLst/>
+          </a:prstGeom>
+          <a:solidFill>
+            <a:srgbClr val="E3A83A"/>
+          </a:solidFill>
+          <a:ln w="12700">
+            <a:solidFill>
+              <a:srgbClr val="E3A83A"/>
+            </a:solidFill>
+            <a:prstDash val="solid"/>
+          </a:ln>
+        </p:spPr>
+      </p:sp>
+      <p:sp>
+        <p:nvSpPr>
+          <p:cNvPr id="19" name="Text 17"/>
+          <p:cNvSpPr txBox="1"/>
+          <p:nvPr/>
+        </p:nvSpPr>
+        <p:spPr>
+          <a:xfrm>
+            <a:off x="6446520" y="1783080"/>
+            <a:ext cx="868680" cy="868680"/>
+          </a:xfrm>
+          <a:prstGeom prst="rect">
+            <a:avLst/>
+          </a:prstGeom>
+          <a:noFill/>
+          <a:ln/>
+        </p:spPr>
+        <p:txBody>
+          <a:bodyPr wrap="square" lIns="0" tIns="0" rIns="0" bIns="0" rtlCol="0" anchor="ctr"/>
+          <a:lstStyle/>
+          <a:p>
+            <a:pPr algn="ctr" indent="0" marL="0">
+              <a:buNone/>
+            </a:pPr>
+            <a:r>
+              <a:rPr lang="en-US" sz="2400" b="1" dirty="0">
+                <a:solidFill>
+                  <a:srgbClr val="0A1311"/>
+                </a:solidFill>
+                <a:latin typeface="Arial" pitchFamily="34" charset="0"/>
+                <a:ea typeface="Arial" pitchFamily="34" charset="-122"/>
+                <a:cs typeface="Arial" pitchFamily="34" charset="-120"/>
+              </a:rPr>
+              <a:t>TT</a:t>
+            </a:r>
+            <a:endParaRPr lang="en-US" sz="2400" dirty="0"/>
+          </a:p>
+        </p:txBody>
+      </p:sp>
+      <p:sp>
+        <p:nvSpPr>
+          <p:cNvPr id="20" name="Text 18"/>
+          <p:cNvSpPr txBox="1"/>
+          <p:nvPr/>
+        </p:nvSpPr>
+        <p:spPr>
+          <a:xfrm>
+            <a:off x="7498080" y="1783080"/>
+            <a:ext cx="4023360" cy="411480"/>
+          </a:xfrm>
+          <a:prstGeom prst="rect">
+            <a:avLst/>
+          </a:prstGeom>
+          <a:noFill/>
+          <a:ln/>
+        </p:spPr>
+        <p:txBody>
+          <a:bodyPr wrap="square" lIns="0" tIns="0" rIns="0" bIns="0" rtlCol="0" anchor="ctr"/>
+          <a:lstStyle/>
+          <a:p>
+            <a:pPr indent="0" marL="0">
+              <a:buNone/>
+            </a:pPr>
+            <a:r>
+              <a:rPr lang="en-US" sz="2100" b="1" dirty="0">
+                <a:solidFill>
+                  <a:srgbClr val="F2F7F5"/>
+                </a:solidFill>
+                <a:latin typeface="Arial" pitchFamily="34" charset="0"/>
+                <a:ea typeface="Arial" pitchFamily="34" charset="-122"/>
+                <a:cs typeface="Arial" pitchFamily="34" charset="-120"/>
+              </a:rPr>
+              <a:t>Truong Quoc Tuan</a:t>
+            </a:r>
+            <a:endParaRPr lang="en-US" sz="2100" dirty="0"/>
+          </a:p>
+        </p:txBody>
+      </p:sp>
+      <p:sp>
+        <p:nvSpPr>
+          <p:cNvPr id="21" name="Text 19"/>
+          <p:cNvSpPr txBox="1"/>
+          <p:nvPr/>
+        </p:nvSpPr>
+        <p:spPr>
+          <a:xfrm>
+            <a:off x="7498080" y="2212848"/>
+            <a:ext cx="4023360" cy="320040"/>
+          </a:xfrm>
+          <a:prstGeom prst="rect">
+            <a:avLst/>
+          </a:prstGeom>
+          <a:noFill/>
+          <a:ln/>
+        </p:spPr>
+        <p:txBody>
+          <a:bodyPr wrap="square" lIns="0" tIns="0" rIns="0" bIns="0" rtlCol="0" anchor="ctr"/>
+          <a:lstStyle/>
+          <a:p>
+            <a:pPr indent="0" marL="0">
+              <a:buNone/>
+            </a:pPr>
+            <a:r>
+              <a:rPr lang="en-US" sz="1400" b="1" dirty="0">
+                <a:solidFill>
+                  <a:srgbClr val="E3A83A"/>
+                </a:solidFill>
+                <a:latin typeface="Calibri" pitchFamily="34" charset="0"/>
+                <a:ea typeface="Calibri" pitchFamily="34" charset="-122"/>
+                <a:cs typeface="Calibri" pitchFamily="34" charset="-120"/>
+              </a:rPr>
+              <a:t>Co-founder</a:t>
+            </a:r>
+            <a:endParaRPr lang="en-US" sz="1400" dirty="0"/>
+          </a:p>
+        </p:txBody>
+      </p:sp>
+      <p:sp>
+        <p:nvSpPr>
+          <p:cNvPr id="22" name="Shape 20"/>
+          <p:cNvSpPr/>
+          <p:nvPr/>
+        </p:nvSpPr>
+        <p:spPr>
+          <a:xfrm>
+            <a:off x="6446520" y="2926080"/>
+            <a:ext cx="146304" cy="146304"/>
+          </a:xfrm>
+          <a:prstGeom prst="ellipse">
+            <a:avLst/>
+          </a:prstGeom>
+          <a:solidFill>
+            <a:srgbClr val="E3A83A"/>
+          </a:solidFill>
+          <a:ln w="12700">
+            <a:solidFill>
+              <a:srgbClr val="E3A83A"/>
+            </a:solidFill>
+            <a:prstDash val="solid"/>
+          </a:ln>
+        </p:spPr>
+      </p:sp>
+      <p:sp>
+        <p:nvSpPr>
+          <p:cNvPr id="23" name="Text 21"/>
+          <p:cNvSpPr txBox="1"/>
+          <p:nvPr/>
+        </p:nvSpPr>
+        <p:spPr>
+          <a:xfrm>
+            <a:off x="6739128" y="2834640"/>
+            <a:ext cx="4828032" cy="640080"/>
+          </a:xfrm>
+          <a:prstGeom prst="rect">
+            <a:avLst/>
+          </a:prstGeom>
+          <a:noFill/>
+          <a:ln/>
+        </p:spPr>
+        <p:txBody>
+          <a:bodyPr wrap="square" lIns="0" tIns="0" rIns="0" bIns="0" rtlCol="0" anchor="t"/>
+          <a:lstStyle/>
+          <a:p>
+            <a:pPr indent="0" marL="0">
+              <a:buNone/>
+            </a:pPr>
+            <a:r>
+              <a:rPr lang="en-US" sz="1300" dirty="0">
+                <a:solidFill>
+                  <a:srgbClr val="F2F7F5"/>
+                </a:solidFill>
+                <a:latin typeface="Calibri" pitchFamily="34" charset="0"/>
+                <a:ea typeface="Calibri" pitchFamily="34" charset="-122"/>
+                <a:cs typeface="Calibri" pitchFamily="34" charset="-120"/>
+              </a:rPr>
+              <a:t>Former CTO of major Vietnamese corporations</a:t>
+            </a:r>
+            <a:endParaRPr lang="en-US" sz="1300" dirty="0"/>
+          </a:p>
+        </p:txBody>
+      </p:sp>
+      <p:sp>
+        <p:nvSpPr>
+          <p:cNvPr id="24" name="Shape 22"/>
+          <p:cNvSpPr/>
+          <p:nvPr/>
+        </p:nvSpPr>
+        <p:spPr>
+          <a:xfrm>
+            <a:off x="6446520" y="3310128"/>
+            <a:ext cx="146304" cy="146304"/>
+          </a:xfrm>
+          <a:prstGeom prst="ellipse">
+            <a:avLst/>
+          </a:prstGeom>
+          <a:solidFill>
+            <a:srgbClr val="E3A83A"/>
+          </a:solidFill>
+          <a:ln w="12700">
+            <a:solidFill>
+              <a:srgbClr val="E3A83A"/>
+            </a:solidFill>
+            <a:prstDash val="solid"/>
+          </a:ln>
+        </p:spPr>
+      </p:sp>
+      <p:sp>
+        <p:nvSpPr>
+          <p:cNvPr id="25" name="Text 23"/>
+          <p:cNvSpPr txBox="1"/>
+          <p:nvPr/>
+        </p:nvSpPr>
+        <p:spPr>
+          <a:xfrm>
+            <a:off x="6739128" y="3218688"/>
+            <a:ext cx="4828032" cy="640080"/>
+          </a:xfrm>
+          <a:prstGeom prst="rect">
+            <a:avLst/>
+          </a:prstGeom>
+          <a:noFill/>
+          <a:ln/>
+        </p:spPr>
+        <p:txBody>
+          <a:bodyPr wrap="square" lIns="0" tIns="0" rIns="0" bIns="0" rtlCol="0" anchor="t"/>
+          <a:lstStyle/>
+          <a:p>
+            <a:pPr indent="0" marL="0">
+              <a:buNone/>
+            </a:pPr>
+            <a:r>
+              <a:rPr lang="en-US" sz="1300" dirty="0">
+                <a:solidFill>
+                  <a:srgbClr val="F2F7F5"/>
+                </a:solidFill>
+                <a:latin typeface="Calibri" pitchFamily="34" charset="0"/>
+                <a:ea typeface="Calibri" pitchFamily="34" charset="-122"/>
+                <a:cs typeface="Calibri" pitchFamily="34" charset="-120"/>
+              </a:rPr>
+              <a:t>Capital-markets experience (Dragon Capital Group)</a:t>
+            </a:r>
+            <a:endParaRPr lang="en-US" sz="1300" dirty="0"/>
+          </a:p>
+        </p:txBody>
+      </p:sp>
+      <p:sp>
+        <p:nvSpPr>
+          <p:cNvPr id="26" name="Shape 24"/>
+          <p:cNvSpPr/>
+          <p:nvPr/>
+        </p:nvSpPr>
+        <p:spPr>
+          <a:xfrm>
+            <a:off x="6446520" y="3694176"/>
+            <a:ext cx="146304" cy="146304"/>
+          </a:xfrm>
+          <a:prstGeom prst="ellipse">
+            <a:avLst/>
+          </a:prstGeom>
+          <a:solidFill>
+            <a:srgbClr val="E3A83A"/>
+          </a:solidFill>
+          <a:ln w="12700">
+            <a:solidFill>
+              <a:srgbClr val="E3A83A"/>
+            </a:solidFill>
+            <a:prstDash val="solid"/>
+          </a:ln>
+        </p:spPr>
+      </p:sp>
+      <p:sp>
+        <p:nvSpPr>
+          <p:cNvPr id="27" name="Text 25"/>
+          <p:cNvSpPr txBox="1"/>
+          <p:nvPr/>
+        </p:nvSpPr>
+        <p:spPr>
+          <a:xfrm>
+            <a:off x="6739128" y="3602736"/>
+            <a:ext cx="4828032" cy="640080"/>
+          </a:xfrm>
+          <a:prstGeom prst="rect">
+            <a:avLst/>
+          </a:prstGeom>
+          <a:noFill/>
+          <a:ln/>
+        </p:spPr>
+        <p:txBody>
+          <a:bodyPr wrap="square" lIns="0" tIns="0" rIns="0" bIns="0" rtlCol="0" anchor="t"/>
+          <a:lstStyle/>
+          <a:p>
+            <a:pPr indent="0" marL="0">
+              <a:buNone/>
+            </a:pPr>
+            <a:r>
+              <a:rPr lang="en-US" sz="1300" dirty="0">
+                <a:solidFill>
+                  <a:srgbClr val="F2F7F5"/>
+                </a:solidFill>
+                <a:latin typeface="Calibri" pitchFamily="34" charset="0"/>
+                <a:ea typeface="Calibri" pitchFamily="34" charset="-122"/>
+                <a:cs typeface="Calibri" pitchFamily="34" charset="-120"/>
+              </a:rPr>
+              <a:t>Investor, partner and finance side of BlockID</a:t>
+            </a:r>
+            <a:endParaRPr lang="en-US" sz="1300" dirty="0"/>
+          </a:p>
+        </p:txBody>
+      </p:sp>
+      <p:sp>
+        <p:nvSpPr>
+          <p:cNvPr id="28" name="Shape 26"/>
+          <p:cNvSpPr/>
+          <p:nvPr/>
+        </p:nvSpPr>
+        <p:spPr>
+          <a:xfrm>
+            <a:off x="6446520" y="3977640"/>
+            <a:ext cx="4983480" cy="347472"/>
+          </a:xfrm>
+          <a:prstGeom prst="roundRect">
+            <a:avLst>
+              <a:gd name="adj" fmla="val 21053"/>
+            </a:avLst>
+          </a:prstGeom>
+          <a:solidFill>
+            <a:srgbClr val="172A26"/>
+          </a:solidFill>
+          <a:ln w="12700">
+            <a:solidFill>
+              <a:srgbClr val="E3A83A"/>
+            </a:solidFill>
+            <a:prstDash val="solid"/>
+          </a:ln>
+        </p:spPr>
+      </p:sp>
+      <p:sp>
+        <p:nvSpPr>
+          <p:cNvPr id="29" name="Text 27"/>
+          <p:cNvSpPr txBox="1"/>
+          <p:nvPr/>
+        </p:nvSpPr>
+        <p:spPr>
+          <a:xfrm>
+            <a:off x="6446520" y="3977640"/>
+            <a:ext cx="4983480" cy="347472"/>
+          </a:xfrm>
+          <a:prstGeom prst="rect">
+            <a:avLst/>
+          </a:prstGeom>
+          <a:noFill/>
+          <a:ln/>
+        </p:spPr>
+        <p:txBody>
+          <a:bodyPr wrap="square" lIns="0" tIns="0" rIns="0" bIns="0" rtlCol="0" anchor="ctr"/>
+          <a:lstStyle/>
+          <a:p>
+            <a:pPr algn="ctr" indent="0" marL="0">
+              <a:buNone/>
+            </a:pPr>
+            <a:r>
+              <a:rPr lang="en-US" sz="1250" b="1" dirty="0">
+                <a:solidFill>
+                  <a:srgbClr val="F2F7F5"/>
+                </a:solidFill>
+                <a:latin typeface="Calibri" pitchFamily="34" charset="0"/>
+                <a:ea typeface="Calibri" pitchFamily="34" charset="-122"/>
+                <a:cs typeface="Calibri" pitchFamily="34" charset="-120"/>
+              </a:rPr>
+              <a:t>Australia Global Talent visa (subclass 858)</a:t>
+            </a:r>
+            <a:endParaRPr lang="en-US" sz="1250" dirty="0"/>
+          </a:p>
+        </p:txBody>
+      </p:sp>
+      <p:sp>
+        <p:nvSpPr>
+          <p:cNvPr id="30" name="Shape 28"/>
+          <p:cNvSpPr/>
+          <p:nvPr/>
+        </p:nvSpPr>
+        <p:spPr>
+          <a:xfrm>
+            <a:off x="502920" y="4663440"/>
+            <a:ext cx="3611880" cy="1463040"/>
+          </a:xfrm>
+          <a:prstGeom prst="roundRect">
+            <a:avLst>
+              <a:gd name="adj" fmla="val 7500"/>
+            </a:avLst>
+          </a:prstGeom>
+          <a:solidFill>
+            <a:srgbClr val="12201D"/>
+          </a:solidFill>
+          <a:ln w="12700">
+            <a:solidFill>
+              <a:srgbClr val="25403A"/>
+            </a:solidFill>
+            <a:prstDash val="solid"/>
+          </a:ln>
+        </p:spPr>
+      </p:sp>
+      <p:sp>
+        <p:nvSpPr>
+          <p:cNvPr id="31" name="Shape 29"/>
+          <p:cNvSpPr/>
+          <p:nvPr/>
+        </p:nvSpPr>
+        <p:spPr>
+          <a:xfrm>
+            <a:off x="685800" y="4828032"/>
+            <a:ext cx="548640" cy="548640"/>
+          </a:xfrm>
+          <a:prstGeom prst="ellipse">
+            <a:avLst/>
+          </a:prstGeom>
+          <a:solidFill>
+            <a:srgbClr val="5D8AD6"/>
+          </a:solidFill>
+          <a:ln w="12700">
+            <a:solidFill>
+              <a:srgbClr val="5D8AD6"/>
+            </a:solidFill>
+            <a:prstDash val="solid"/>
+          </a:ln>
+        </p:spPr>
+      </p:sp>
+      <p:pic>
+        <p:nvPicPr>
+          <p:cNvPr id="32" name="Image 0" descr="preencoded.png">    </p:cNvPr>
+          <p:cNvPicPr>
+            <a:picLocks noChangeAspect="1"/>
+          </p:cNvPicPr>
+          <p:nvPr/>
+        </p:nvPicPr>
+        <p:blipFill>
+          <a:blip r:embed="rId1"/>
+          <a:stretch>
+            <a:fillRect/>
+          </a:stretch>
+        </p:blipFill>
+        <p:spPr>
+          <a:xfrm>
+            <a:off x="822960" y="4965192"/>
+            <a:ext cx="274320" cy="274320"/>
+          </a:xfrm>
+          <a:prstGeom prst="rect">
+            <a:avLst/>
+          </a:prstGeom>
+        </p:spPr>
+      </p:pic>
+      <p:sp>
+        <p:nvSpPr>
+          <p:cNvPr id="33" name="Text 30"/>
+          <p:cNvSpPr txBox="1"/>
+          <p:nvPr/>
+        </p:nvSpPr>
+        <p:spPr>
+          <a:xfrm>
+            <a:off x="1371600" y="4800600"/>
+            <a:ext cx="2651760" cy="384048"/>
+          </a:xfrm>
+          <a:prstGeom prst="rect">
+            <a:avLst/>
+          </a:prstGeom>
+          <a:noFill/>
+          <a:ln/>
+        </p:spPr>
+        <p:txBody>
+          <a:bodyPr wrap="square" lIns="0" tIns="0" rIns="0" bIns="0" rtlCol="0" anchor="ctr"/>
+          <a:lstStyle/>
+          <a:p>
+            <a:pPr indent="0" marL="0">
+              <a:buNone/>
+            </a:pPr>
+            <a:r>
+              <a:rPr lang="en-US" sz="1400" b="1" dirty="0">
+                <a:solidFill>
+                  <a:srgbClr val="5D8AD6"/>
+                </a:solidFill>
+                <a:latin typeface="Arial" pitchFamily="34" charset="0"/>
+                <a:ea typeface="Arial" pitchFamily="34" charset="-122"/>
+                <a:cs typeface="Arial" pitchFamily="34" charset="-120"/>
+              </a:rPr>
+              <a:t>Tech team in Vietnam</a:t>
+            </a:r>
+            <a:endParaRPr lang="en-US" sz="1400" dirty="0"/>
+          </a:p>
+        </p:txBody>
+      </p:sp>
+      <p:sp>
+        <p:nvSpPr>
+          <p:cNvPr id="34" name="Text 31"/>
+          <p:cNvSpPr txBox="1"/>
+          <p:nvPr/>
+        </p:nvSpPr>
+        <p:spPr>
+          <a:xfrm>
+            <a:off x="1371600" y="5193792"/>
+            <a:ext cx="2651760" cy="868680"/>
+          </a:xfrm>
+          <a:prstGeom prst="rect">
+            <a:avLst/>
+          </a:prstGeom>
+          <a:noFill/>
+          <a:ln/>
+        </p:spPr>
+        <p:txBody>
+          <a:bodyPr wrap="square" lIns="0" tIns="0" rIns="0" bIns="0" rtlCol="0" anchor="t"/>
+          <a:lstStyle/>
+          <a:p>
+            <a:pPr indent="0" marL="0">
+              <a:buNone/>
+            </a:pPr>
+            <a:r>
+              <a:rPr lang="en-US" sz="1150" dirty="0">
+                <a:solidFill>
+                  <a:srgbClr val="A9BDB7"/>
+                </a:solidFill>
+                <a:latin typeface="Calibri" pitchFamily="34" charset="0"/>
+                <a:ea typeface="Calibri" pitchFamily="34" charset="-122"/>
+                <a:cs typeface="Calibri" pitchFamily="34" charset="-120"/>
+              </a:rPr>
+              <a:t>Blockchain, AI and fintech engineers (Vietnam Blockchain Corporation, since 2016)</a:t>
+            </a:r>
+            <a:endParaRPr lang="en-US" sz="1150" dirty="0"/>
+          </a:p>
+        </p:txBody>
+      </p:sp>
+      <p:sp>
+        <p:nvSpPr>
+          <p:cNvPr id="35" name="Shape 32"/>
+          <p:cNvSpPr/>
+          <p:nvPr/>
+        </p:nvSpPr>
+        <p:spPr>
+          <a:xfrm>
+            <a:off x="4279392" y="4663440"/>
+            <a:ext cx="3611880" cy="1463040"/>
+          </a:xfrm>
+          <a:prstGeom prst="roundRect">
+            <a:avLst>
+              <a:gd name="adj" fmla="val 7500"/>
+            </a:avLst>
+          </a:prstGeom>
+          <a:solidFill>
+            <a:srgbClr val="12201D"/>
+          </a:solidFill>
+          <a:ln w="12700">
+            <a:solidFill>
+              <a:srgbClr val="25403A"/>
+            </a:solidFill>
+            <a:prstDash val="solid"/>
+          </a:ln>
+        </p:spPr>
+      </p:sp>
+      <p:sp>
+        <p:nvSpPr>
+          <p:cNvPr id="36" name="Shape 33"/>
+          <p:cNvSpPr/>
+          <p:nvPr/>
+        </p:nvSpPr>
+        <p:spPr>
+          <a:xfrm>
+            <a:off x="4462272" y="4828032"/>
+            <a:ext cx="548640" cy="548640"/>
+          </a:xfrm>
+          <a:prstGeom prst="ellipse">
+            <a:avLst/>
+          </a:prstGeom>
+          <a:solidFill>
+            <a:srgbClr val="E3A83A"/>
+          </a:solidFill>
+          <a:ln w="12700">
+            <a:solidFill>
+              <a:srgbClr val="E3A83A"/>
+            </a:solidFill>
+            <a:prstDash val="solid"/>
+          </a:ln>
+        </p:spPr>
+      </p:sp>
+      <p:pic>
+        <p:nvPicPr>
+          <p:cNvPr id="37" name="Image 1" descr="preencoded.png">    </p:cNvPr>
+          <p:cNvPicPr>
+            <a:picLocks noChangeAspect="1"/>
+          </p:cNvPicPr>
+          <p:nvPr/>
+        </p:nvPicPr>
+        <p:blipFill>
+          <a:blip r:embed="rId2"/>
+          <a:stretch>
+            <a:fillRect/>
+          </a:stretch>
+        </p:blipFill>
+        <p:spPr>
+          <a:xfrm>
+            <a:off x="4599432" y="4965192"/>
+            <a:ext cx="274320" cy="274320"/>
+          </a:xfrm>
+          <a:prstGeom prst="rect">
+            <a:avLst/>
+          </a:prstGeom>
+        </p:spPr>
+      </p:pic>
+      <p:sp>
+        <p:nvSpPr>
+          <p:cNvPr id="38" name="Text 34"/>
+          <p:cNvSpPr txBox="1"/>
+          <p:nvPr/>
+        </p:nvSpPr>
+        <p:spPr>
+          <a:xfrm>
+            <a:off x="5148072" y="4800600"/>
+            <a:ext cx="2651760" cy="384048"/>
+          </a:xfrm>
+          <a:prstGeom prst="rect">
+            <a:avLst/>
+          </a:prstGeom>
+          <a:noFill/>
+          <a:ln/>
+        </p:spPr>
+        <p:txBody>
+          <a:bodyPr wrap="square" lIns="0" tIns="0" rIns="0" bIns="0" rtlCol="0" anchor="ctr"/>
+          <a:lstStyle/>
+          <a:p>
+            <a:pPr indent="0" marL="0">
+              <a:buNone/>
+            </a:pPr>
+            <a:r>
+              <a:rPr lang="en-US" sz="1400" b="1" dirty="0">
+                <a:solidFill>
+                  <a:srgbClr val="E3A83A"/>
+                </a:solidFill>
+                <a:latin typeface="Arial" pitchFamily="34" charset="0"/>
+                <a:ea typeface="Arial" pitchFamily="34" charset="-122"/>
+                <a:cs typeface="Arial" pitchFamily="34" charset="-120"/>
+              </a:rPr>
+              <a:t>Business team in Sydney</a:t>
+            </a:r>
+            <a:endParaRPr lang="en-US" sz="1400" dirty="0"/>
+          </a:p>
+        </p:txBody>
+      </p:sp>
+      <p:sp>
+        <p:nvSpPr>
+          <p:cNvPr id="39" name="Text 35"/>
+          <p:cNvSpPr txBox="1"/>
+          <p:nvPr/>
+        </p:nvSpPr>
+        <p:spPr>
+          <a:xfrm>
+            <a:off x="5148072" y="5193792"/>
+            <a:ext cx="2651760" cy="868680"/>
+          </a:xfrm>
+          <a:prstGeom prst="rect">
+            <a:avLst/>
+          </a:prstGeom>
+          <a:noFill/>
+          <a:ln/>
+        </p:spPr>
+        <p:txBody>
+          <a:bodyPr wrap="square" lIns="0" tIns="0" rIns="0" bIns="0" rtlCol="0" anchor="t"/>
+          <a:lstStyle/>
+          <a:p>
+            <a:pPr indent="0" marL="0">
+              <a:buNone/>
+            </a:pPr>
+            <a:r>
+              <a:rPr lang="en-US" sz="1150" dirty="0">
+                <a:solidFill>
+                  <a:srgbClr val="A9BDB7"/>
+                </a:solidFill>
+                <a:latin typeface="Calibri" pitchFamily="34" charset="0"/>
+                <a:ea typeface="Calibri" pitchFamily="34" charset="-122"/>
+                <a:cs typeface="Calibri" pitchFamily="34" charset="-120"/>
+              </a:rPr>
+              <a:t>Pilots, partners and licensing in Australia (Auschain)</a:t>
+            </a:r>
+            <a:endParaRPr lang="en-US" sz="1150" dirty="0"/>
+          </a:p>
+        </p:txBody>
+      </p:sp>
+      <p:sp>
+        <p:nvSpPr>
+          <p:cNvPr id="40" name="Shape 36"/>
+          <p:cNvSpPr/>
+          <p:nvPr/>
+        </p:nvSpPr>
+        <p:spPr>
+          <a:xfrm>
+            <a:off x="8055864" y="4663440"/>
+            <a:ext cx="3611880" cy="1463040"/>
+          </a:xfrm>
+          <a:prstGeom prst="roundRect">
+            <a:avLst>
+              <a:gd name="adj" fmla="val 7500"/>
+            </a:avLst>
+          </a:prstGeom>
+          <a:solidFill>
+            <a:srgbClr val="12201D"/>
+          </a:solidFill>
+          <a:ln w="12700">
+            <a:solidFill>
+              <a:srgbClr val="25403A"/>
+            </a:solidFill>
+            <a:prstDash val="solid"/>
+          </a:ln>
+        </p:spPr>
+      </p:sp>
+      <p:sp>
+        <p:nvSpPr>
+          <p:cNvPr id="41" name="Shape 37"/>
+          <p:cNvSpPr/>
+          <p:nvPr/>
+        </p:nvSpPr>
+        <p:spPr>
+          <a:xfrm>
+            <a:off x="8238744" y="4828032"/>
+            <a:ext cx="548640" cy="548640"/>
+          </a:xfrm>
+          <a:prstGeom prst="ellipse">
+            <a:avLst/>
+          </a:prstGeom>
+          <a:solidFill>
+            <a:srgbClr val="22A07F"/>
+          </a:solidFill>
+          <a:ln w="12700">
+            <a:solidFill>
+              <a:srgbClr val="22A07F"/>
+            </a:solidFill>
+            <a:prstDash val="solid"/>
+          </a:ln>
+        </p:spPr>
+      </p:sp>
+      <p:pic>
+        <p:nvPicPr>
+          <p:cNvPr id="42" name="Image 2" descr="preencoded.png">    </p:cNvPr>
+          <p:cNvPicPr>
+            <a:picLocks noChangeAspect="1"/>
+          </p:cNvPicPr>
+          <p:nvPr/>
+        </p:nvPicPr>
+        <p:blipFill>
+          <a:blip r:embed="rId3"/>
+          <a:stretch>
+            <a:fillRect/>
+          </a:stretch>
+        </p:blipFill>
+        <p:spPr>
+          <a:xfrm>
+            <a:off x="8375904" y="4965192"/>
+            <a:ext cx="274320" cy="274320"/>
+          </a:xfrm>
+          <a:prstGeom prst="rect">
+            <a:avLst/>
+          </a:prstGeom>
+        </p:spPr>
+      </p:pic>
+      <p:sp>
+        <p:nvSpPr>
+          <p:cNvPr id="43" name="Text 38"/>
+          <p:cNvSpPr txBox="1"/>
+          <p:nvPr/>
+        </p:nvSpPr>
+        <p:spPr>
+          <a:xfrm>
+            <a:off x="8924544" y="4800600"/>
+            <a:ext cx="2651760" cy="384048"/>
+          </a:xfrm>
+          <a:prstGeom prst="rect">
+            <a:avLst/>
+          </a:prstGeom>
+          <a:noFill/>
+          <a:ln/>
+        </p:spPr>
+        <p:txBody>
+          <a:bodyPr wrap="square" lIns="0" tIns="0" rIns="0" bIns="0" rtlCol="0" anchor="ctr"/>
+          <a:lstStyle/>
+          <a:p>
+            <a:pPr indent="0" marL="0">
+              <a:buNone/>
+            </a:pPr>
+            <a:r>
+              <a:rPr lang="en-US" sz="1400" b="1" dirty="0">
+                <a:solidFill>
+                  <a:srgbClr val="22A07F"/>
+                </a:solidFill>
+                <a:latin typeface="Arial" pitchFamily="34" charset="0"/>
+                <a:ea typeface="Arial" pitchFamily="34" charset="-122"/>
+                <a:cs typeface="Arial" pitchFamily="34" charset="-120"/>
+              </a:rPr>
+              <a:t>Built end to end, in house</a:t>
+            </a:r>
+            <a:endParaRPr lang="en-US" sz="1400" dirty="0"/>
+          </a:p>
+        </p:txBody>
+      </p:sp>
+      <p:sp>
+        <p:nvSpPr>
+          <p:cNvPr id="44" name="Text 39"/>
+          <p:cNvSpPr txBox="1"/>
+          <p:nvPr/>
+        </p:nvSpPr>
+        <p:spPr>
+          <a:xfrm>
+            <a:off x="8924544" y="5193792"/>
+            <a:ext cx="2651760" cy="868680"/>
+          </a:xfrm>
+          <a:prstGeom prst="rect">
+            <a:avLst/>
+          </a:prstGeom>
+          <a:noFill/>
+          <a:ln/>
+        </p:spPr>
+        <p:txBody>
+          <a:bodyPr wrap="square" lIns="0" tIns="0" rIns="0" bIns="0" rtlCol="0" anchor="t"/>
+          <a:lstStyle/>
+          <a:p>
+            <a:pPr indent="0" marL="0">
+              <a:buNone/>
+            </a:pPr>
+            <a:r>
+              <a:rPr lang="en-US" sz="1150" dirty="0">
+                <a:solidFill>
+                  <a:srgbClr val="A9BDB7"/>
+                </a:solidFill>
+                <a:latin typeface="Calibri" pitchFamily="34" charset="0"/>
+                <a:ea typeface="Calibri" pitchFamily="34" charset="-122"/>
+                <a:cs typeface="Calibri" pitchFamily="34" charset="-120"/>
+              </a:rPr>
+              <a:t>Smart contracts, AI agents, key-holding issuer, web app, 3 chains</a:t>
+            </a:r>
+            <a:endParaRPr lang="en-US" sz="1150" dirty="0"/>
+          </a:p>
+        </p:txBody>
+      </p:sp>
+      <p:sp>
+        <p:nvSpPr>
+          <p:cNvPr id="45" name="Text 40"/>
+          <p:cNvSpPr txBox="1"/>
+          <p:nvPr/>
+        </p:nvSpPr>
+        <p:spPr>
+          <a:xfrm>
+            <a:off x="502920" y="6473952"/>
+            <a:ext cx="11155680" cy="256032"/>
+          </a:xfrm>
+          <a:prstGeom prst="rect">
+            <a:avLst/>
+          </a:prstGeom>
+          <a:noFill/>
+          <a:ln/>
+        </p:spPr>
+        <p:txBody>
+          <a:bodyPr wrap="square" lIns="0" tIns="0" rIns="0" bIns="0" rtlCol="0" anchor="ctr"/>
+          <a:lstStyle/>
+          <a:p>
+            <a:pPr algn="r" indent="0" marL="0">
+              <a:buNone/>
+            </a:pPr>
+            <a:r>
+              <a:rPr lang="en-US" sz="950" dirty="0">
+                <a:solidFill>
+                  <a:srgbClr val="7E948F"/>
+                </a:solidFill>
+                <a:latin typeface="Calibri" pitchFamily="34" charset="0"/>
+                <a:ea typeface="Calibri" pitchFamily="34" charset="-122"/>
+                <a:cs typeface="Calibri" pitchFamily="34" charset="-120"/>
+              </a:rPr>
+              <a:t>eth.blockid.au  ·  Testnet demo. Not an offer of securities or financial advice.</a:t>
+            </a:r>
+            <a:endParaRPr lang="en-US" sz="950" dirty="0"/>
+          </a:p>
+        </p:txBody>
+      </p:sp>
+    </p:spTree>
+  </p:cSld>
+  <p:clrMapOvr>
+    <a:masterClrMapping/>
+  </p:clrMapOvr>
+</p:sld>
+</file>
+
+<file path=ppt/slides/slide13.xml><?xml version="1.0" encoding="utf-8"?>
+<p:sld xmlns:a="http://schemas.openxmlformats.org/drawingml/2006/main" xmlns:r="http://schemas.openxmlformats.org/officeDocument/2006/relationships" xmlns:p="http://schemas.openxmlformats.org/presentationml/2006/main">
+  <p:cSld name="Slide 13">
+    <p:bg>
+      <p:bgPr>
+        <a:solidFill>
+          <a:srgbClr val="0A1311"/>
+        </a:solidFill>
+      </p:bgPr>
+    </p:bg>
+    <p:spTree>
+      <p:nvGrpSpPr>
+        <p:cNvPr id="1" name=""/>
+        <p:cNvGrpSpPr/>
+        <p:nvPr/>
+      </p:nvGrpSpPr>
+      <p:grpSpPr>
+        <a:xfrm>
+          <a:off x="0" y="0"/>
+          <a:ext cx="0" cy="0"/>
+          <a:chOff x="0" y="0"/>
+          <a:chExt cx="0" cy="0"/>
+        </a:xfrm>
+      </p:grpSpPr>
+      <p:sp>
+        <p:nvSpPr>
+          <p:cNvPr id="2" name="Text 0"/>
+          <p:cNvSpPr txBox="1"/>
+          <p:nvPr/>
+        </p:nvSpPr>
+        <p:spPr>
+          <a:xfrm>
+            <a:off x="502920" y="320040"/>
+            <a:ext cx="8229600" cy="274320"/>
+          </a:xfrm>
+          <a:prstGeom prst="rect">
+            <a:avLst/>
+          </a:prstGeom>
+          <a:noFill/>
+          <a:ln/>
+        </p:spPr>
+        <p:txBody>
+          <a:bodyPr wrap="square" lIns="0" tIns="0" rIns="0" bIns="0" rtlCol="0" anchor="ctr"/>
+          <a:lstStyle/>
+          <a:p>
+            <a:pPr indent="0" marL="0">
+              <a:buNone/>
+            </a:pPr>
+            <a:r>
+              <a:rPr lang="en-US" sz="1150" b="1" spc="300" kern="0" dirty="0">
+                <a:solidFill>
+                  <a:srgbClr val="22A07F"/>
+                </a:solidFill>
+                <a:latin typeface="Calibri" pitchFamily="34" charset="0"/>
+                <a:ea typeface="Calibri" pitchFamily="34" charset="-122"/>
+                <a:cs typeface="Calibri" pitchFamily="34" charset="-120"/>
+              </a:rPr>
+              <a:t>13 / 13   ·   WORKING TODAY · THE ASK</a:t>
             </a:r>
             <a:endParaRPr lang="en-US" sz="1150" dirty="0"/>
           </a:p>
@@ -8168,7 +8088,7 @@
                 <a:ea typeface="Calibri" pitchFamily="34" charset="-122"/>
                 <a:cs typeface="Calibri" pitchFamily="34" charset="-120"/>
               </a:rPr>
-              <a:t>2 / 12   ·   THE PROBLEM</a:t>
+              <a:t>2 / 13   ·   THE PROBLEM</a:t>
             </a:r>
             <a:endParaRPr lang="en-US" sz="1150" dirty="0"/>
           </a:p>
@@ -8972,7 +8892,7 @@
                 <a:ea typeface="Calibri" pitchFamily="34" charset="-122"/>
                 <a:cs typeface="Calibri" pitchFamily="34" charset="-120"/>
               </a:rPr>
-              <a:t>3 / 12   ·   THE MARKET</a:t>
+              <a:t>3 / 13   ·   THE MARKET</a:t>
             </a:r>
             <a:endParaRPr lang="en-US" sz="1150" dirty="0"/>
           </a:p>
@@ -9557,7 +9477,7 @@
                 <a:ea typeface="Calibri" pitchFamily="34" charset="-122"/>
                 <a:cs typeface="Calibri" pitchFamily="34" charset="-120"/>
               </a:rPr>
-              <a:t>4 / 12   ·   THE SOLUTION</a:t>
+              <a:t>4 / 13   ·   THE SOLUTION</a:t>
             </a:r>
             <a:endParaRPr lang="en-US" sz="1150" dirty="0"/>
           </a:p>
@@ -10380,35 +10300,201 @@
         </p:nvSpPr>
         <p:spPr>
           <a:xfrm>
-            <a:off x="7360920" y="1554480"/>
-            <a:ext cx="4113753" cy="4663440"/>
+            <a:off x="6775704" y="1609344"/>
+            <a:ext cx="4965192" cy="3404997"/>
           </a:xfrm>
           <a:prstGeom prst="roundRect">
             <a:avLst>
-              <a:gd name="adj" fmla="val 1778"/>
+              <a:gd name="adj" fmla="val 1880"/>
             </a:avLst>
           </a:prstGeom>
           <a:solidFill>
-            <a:srgbClr val="25403A"/>
-          </a:solidFill>
-          <a:ln w="12700">
-            <a:solidFill>
-              <a:srgbClr val="25403A"/>
+            <a:srgbClr val="D9DFDD"/>
+          </a:solidFill>
+          <a:ln w="12700">
+            <a:solidFill>
+              <a:srgbClr val="D9DFDD"/>
             </a:solidFill>
             <a:prstDash val="solid"/>
           </a:ln>
           <a:effectLst>
-            <a:outerShdw sx="100000" sy="100000" kx="0" ky="0" algn="bl" rotWithShape="0" blurRad="177800" dist="63500" dir="5400000">
+            <a:outerShdw sx="100000" sy="100000" kx="0" ky="0" algn="bl" rotWithShape="0" blurRad="203200" dist="76200" dir="5400000">
               <a:srgbClr val="000000">
-                <a:alpha val="50000"/>
+                <a:alpha val="55000"/>
               </a:srgbClr>
             </a:outerShdw>
           </a:effectLst>
         </p:spPr>
       </p:sp>
+      <p:sp>
+        <p:nvSpPr>
+          <p:cNvPr id="30" name="Shape 23"/>
+          <p:cNvSpPr/>
+          <p:nvPr/>
+        </p:nvSpPr>
+        <p:spPr>
+          <a:xfrm>
+            <a:off x="6812280" y="1645920"/>
+            <a:ext cx="4892040" cy="274320"/>
+          </a:xfrm>
+          <a:prstGeom prst="rect">
+            <a:avLst/>
+          </a:prstGeom>
+          <a:solidFill>
+            <a:srgbClr val="ECEFEE"/>
+          </a:solidFill>
+          <a:ln w="12700">
+            <a:solidFill>
+              <a:srgbClr val="ECEFEE"/>
+            </a:solidFill>
+            <a:prstDash val="solid"/>
+          </a:ln>
+        </p:spPr>
+      </p:sp>
+      <p:sp>
+        <p:nvSpPr>
+          <p:cNvPr id="31" name="Shape 24"/>
+          <p:cNvSpPr/>
+          <p:nvPr/>
+        </p:nvSpPr>
+        <p:spPr>
+          <a:xfrm>
+            <a:off x="6922008" y="1732788"/>
+            <a:ext cx="100584" cy="100584"/>
+          </a:xfrm>
+          <a:prstGeom prst="ellipse">
+            <a:avLst/>
+          </a:prstGeom>
+          <a:solidFill>
+            <a:srgbClr val="FF5F57"/>
+          </a:solidFill>
+          <a:ln w="12700">
+            <a:solidFill>
+              <a:srgbClr val="FF5F57"/>
+            </a:solidFill>
+            <a:prstDash val="solid"/>
+          </a:ln>
+        </p:spPr>
+      </p:sp>
+      <p:sp>
+        <p:nvSpPr>
+          <p:cNvPr id="32" name="Shape 25"/>
+          <p:cNvSpPr/>
+          <p:nvPr/>
+        </p:nvSpPr>
+        <p:spPr>
+          <a:xfrm>
+            <a:off x="7077456" y="1732788"/>
+            <a:ext cx="100584" cy="100584"/>
+          </a:xfrm>
+          <a:prstGeom prst="ellipse">
+            <a:avLst/>
+          </a:prstGeom>
+          <a:solidFill>
+            <a:srgbClr val="FEBC2E"/>
+          </a:solidFill>
+          <a:ln w="12700">
+            <a:solidFill>
+              <a:srgbClr val="FEBC2E"/>
+            </a:solidFill>
+            <a:prstDash val="solid"/>
+          </a:ln>
+        </p:spPr>
+      </p:sp>
+      <p:sp>
+        <p:nvSpPr>
+          <p:cNvPr id="33" name="Shape 26"/>
+          <p:cNvSpPr/>
+          <p:nvPr/>
+        </p:nvSpPr>
+        <p:spPr>
+          <a:xfrm>
+            <a:off x="7232904" y="1732788"/>
+            <a:ext cx="100584" cy="100584"/>
+          </a:xfrm>
+          <a:prstGeom prst="ellipse">
+            <a:avLst/>
+          </a:prstGeom>
+          <a:solidFill>
+            <a:srgbClr val="28C840"/>
+          </a:solidFill>
+          <a:ln w="12700">
+            <a:solidFill>
+              <a:srgbClr val="28C840"/>
+            </a:solidFill>
+            <a:prstDash val="solid"/>
+          </a:ln>
+        </p:spPr>
+      </p:sp>
+      <p:sp>
+        <p:nvSpPr>
+          <p:cNvPr id="34" name="Shape 27"/>
+          <p:cNvSpPr/>
+          <p:nvPr/>
+        </p:nvSpPr>
+        <p:spPr>
+          <a:xfrm>
+            <a:off x="7452360" y="1691640"/>
+            <a:ext cx="3840480" cy="182880"/>
+          </a:xfrm>
+          <a:prstGeom prst="roundRect">
+            <a:avLst>
+              <a:gd name="adj" fmla="val 25000"/>
+            </a:avLst>
+          </a:prstGeom>
+          <a:solidFill>
+            <a:srgbClr val="FFFFFF"/>
+          </a:solidFill>
+          <a:ln w="12700">
+            <a:solidFill>
+              <a:srgbClr val="D9DFDD"/>
+            </a:solidFill>
+            <a:prstDash val="solid"/>
+          </a:ln>
+        </p:spPr>
+      </p:sp>
+      <p:sp>
+        <p:nvSpPr>
+          <p:cNvPr id="35" name="Text 28"/>
+          <p:cNvSpPr txBox="1"/>
+          <p:nvPr/>
+        </p:nvSpPr>
+        <p:spPr>
+          <a:xfrm>
+            <a:off x="7543800" y="1691640"/>
+            <a:ext cx="3657600" cy="182880"/>
+          </a:xfrm>
+          <a:prstGeom prst="rect">
+            <a:avLst/>
+          </a:prstGeom>
+          <a:noFill/>
+          <a:ln/>
+        </p:spPr>
+        <p:txBody>
+          <a:bodyPr wrap="square" lIns="0" tIns="0" rIns="0" bIns="0" rtlCol="0" anchor="ctr"/>
+          <a:lstStyle/>
+          <a:p>
+            <a:pPr indent="0" marL="0">
+              <a:buNone/>
+            </a:pPr>
+            <a:r>
+              <a:rPr lang="en-US" sz="850" dirty="0">
+                <a:solidFill>
+                  <a:srgbClr val="4A5A56"/>
+                </a:solidFill>
+                <a:latin typeface="Calibri" pitchFamily="34" charset="0"/>
+                <a:ea typeface="Calibri" pitchFamily="34" charset="-122"/>
+                <a:cs typeface="Calibri" pitchFamily="34" charset="-120"/>
+              </a:rPr>
+              <a:t>eth.blockid.au/i/demo/EBA</a:t>
+            </a:r>
+            <a:endParaRPr lang="en-US" sz="850" dirty="0"/>
+          </a:p>
+        </p:txBody>
+      </p:sp>
       <p:pic>
         <p:nvPicPr>
-          <p:cNvPr id="30" name="Image 5" descr="preencoded.png">    </p:cNvPr>
+          <p:cNvPr id="36" name="Image 5" descr="preencoded.png">    </p:cNvPr>
           <p:cNvPicPr>
             <a:picLocks noChangeAspect="1"/>
           </p:cNvPicPr>
@@ -10422,8 +10508,8 @@
         </p:blipFill>
         <p:spPr>
           <a:xfrm>
-            <a:off x="7406640" y="1600200"/>
-            <a:ext cx="4022313" cy="4572000"/>
+            <a:off x="6812280" y="1920240"/>
+            <a:ext cx="4892040" cy="3057525"/>
           </a:xfrm>
           <a:prstGeom prst="rect">
             <a:avLst/>
@@ -10432,7 +10518,7 @@
       </p:pic>
       <p:sp>
         <p:nvSpPr>
-          <p:cNvPr id="31" name="Text 23"/>
+          <p:cNvPr id="37" name="Text 29"/>
           <p:cNvSpPr txBox="1"/>
           <p:nvPr/>
         </p:nvSpPr>
@@ -10463,7 +10549,7 @@
                 <a:ea typeface="Calibri" pitchFamily="34" charset="-122"/>
                 <a:cs typeface="Calibri" pitchFamily="34" charset="-120"/>
               </a:rPr>
-              <a:t>What a shareholder sees</a:t>
+              <a:t>What a shareholder sees: the live demo account</a:t>
             </a:r>
             <a:endParaRPr lang="en-US" sz="1150" dirty="0"/>
           </a:p>
@@ -10471,7 +10557,7 @@
       </p:sp>
       <p:sp>
         <p:nvSpPr>
-          <p:cNvPr id="32" name="Text 24"/>
+          <p:cNvPr id="38" name="Text 30"/>
           <p:cNvSpPr txBox="1"/>
           <p:nvPr/>
         </p:nvSpPr>
@@ -10573,7 +10659,7 @@
                 <a:ea typeface="Calibri" pitchFamily="34" charset="-122"/>
                 <a:cs typeface="Calibri" pitchFamily="34" charset="-120"/>
               </a:rPr>
-              <a:t>5 / 12   ·   UNDERSTAND IT</a:t>
+              <a:t>5 / 13   ·   UNDERSTAND IT</a:t>
             </a:r>
             <a:endParaRPr lang="en-US" sz="1150" dirty="0"/>
           </a:p>
@@ -10626,35 +10712,201 @@
         </p:nvSpPr>
         <p:spPr>
           <a:xfrm>
-            <a:off x="457200" y="1554480"/>
-            <a:ext cx="6008180" cy="4754880"/>
+            <a:off x="466344" y="1563624"/>
+            <a:ext cx="6839712" cy="4576572"/>
           </a:xfrm>
           <a:prstGeom prst="roundRect">
             <a:avLst>
-              <a:gd name="adj" fmla="val 1538"/>
+              <a:gd name="adj" fmla="val 1399"/>
             </a:avLst>
           </a:prstGeom>
           <a:solidFill>
-            <a:srgbClr val="25403A"/>
-          </a:solidFill>
-          <a:ln w="12700">
-            <a:solidFill>
-              <a:srgbClr val="25403A"/>
+            <a:srgbClr val="D9DFDD"/>
+          </a:solidFill>
+          <a:ln w="12700">
+            <a:solidFill>
+              <a:srgbClr val="D9DFDD"/>
             </a:solidFill>
             <a:prstDash val="solid"/>
           </a:ln>
           <a:effectLst>
-            <a:outerShdw sx="100000" sy="100000" kx="0" ky="0" algn="bl" rotWithShape="0" blurRad="177800" dist="63500" dir="5400000">
+            <a:outerShdw sx="100000" sy="100000" kx="0" ky="0" algn="bl" rotWithShape="0" blurRad="203200" dist="76200" dir="5400000">
               <a:srgbClr val="000000">
-                <a:alpha val="50000"/>
+                <a:alpha val="55000"/>
               </a:srgbClr>
             </a:outerShdw>
           </a:effectLst>
         </p:spPr>
       </p:sp>
+      <p:sp>
+        <p:nvSpPr>
+          <p:cNvPr id="5" name="Shape 3"/>
+          <p:cNvSpPr/>
+          <p:nvPr/>
+        </p:nvSpPr>
+        <p:spPr>
+          <a:xfrm>
+            <a:off x="502920" y="1600200"/>
+            <a:ext cx="6766560" cy="274320"/>
+          </a:xfrm>
+          <a:prstGeom prst="rect">
+            <a:avLst/>
+          </a:prstGeom>
+          <a:solidFill>
+            <a:srgbClr val="ECEFEE"/>
+          </a:solidFill>
+          <a:ln w="12700">
+            <a:solidFill>
+              <a:srgbClr val="ECEFEE"/>
+            </a:solidFill>
+            <a:prstDash val="solid"/>
+          </a:ln>
+        </p:spPr>
+      </p:sp>
+      <p:sp>
+        <p:nvSpPr>
+          <p:cNvPr id="6" name="Shape 4"/>
+          <p:cNvSpPr/>
+          <p:nvPr/>
+        </p:nvSpPr>
+        <p:spPr>
+          <a:xfrm>
+            <a:off x="612648" y="1687068"/>
+            <a:ext cx="100584" cy="100584"/>
+          </a:xfrm>
+          <a:prstGeom prst="ellipse">
+            <a:avLst/>
+          </a:prstGeom>
+          <a:solidFill>
+            <a:srgbClr val="FF5F57"/>
+          </a:solidFill>
+          <a:ln w="12700">
+            <a:solidFill>
+              <a:srgbClr val="FF5F57"/>
+            </a:solidFill>
+            <a:prstDash val="solid"/>
+          </a:ln>
+        </p:spPr>
+      </p:sp>
+      <p:sp>
+        <p:nvSpPr>
+          <p:cNvPr id="7" name="Shape 5"/>
+          <p:cNvSpPr/>
+          <p:nvPr/>
+        </p:nvSpPr>
+        <p:spPr>
+          <a:xfrm>
+            <a:off x="768096" y="1687068"/>
+            <a:ext cx="100584" cy="100584"/>
+          </a:xfrm>
+          <a:prstGeom prst="ellipse">
+            <a:avLst/>
+          </a:prstGeom>
+          <a:solidFill>
+            <a:srgbClr val="FEBC2E"/>
+          </a:solidFill>
+          <a:ln w="12700">
+            <a:solidFill>
+              <a:srgbClr val="FEBC2E"/>
+            </a:solidFill>
+            <a:prstDash val="solid"/>
+          </a:ln>
+        </p:spPr>
+      </p:sp>
+      <p:sp>
+        <p:nvSpPr>
+          <p:cNvPr id="8" name="Shape 6"/>
+          <p:cNvSpPr/>
+          <p:nvPr/>
+        </p:nvSpPr>
+        <p:spPr>
+          <a:xfrm>
+            <a:off x="923544" y="1687068"/>
+            <a:ext cx="100584" cy="100584"/>
+          </a:xfrm>
+          <a:prstGeom prst="ellipse">
+            <a:avLst/>
+          </a:prstGeom>
+          <a:solidFill>
+            <a:srgbClr val="28C840"/>
+          </a:solidFill>
+          <a:ln w="12700">
+            <a:solidFill>
+              <a:srgbClr val="28C840"/>
+            </a:solidFill>
+            <a:prstDash val="solid"/>
+          </a:ln>
+        </p:spPr>
+      </p:sp>
+      <p:sp>
+        <p:nvSpPr>
+          <p:cNvPr id="9" name="Shape 7"/>
+          <p:cNvSpPr/>
+          <p:nvPr/>
+        </p:nvSpPr>
+        <p:spPr>
+          <a:xfrm>
+            <a:off x="1143000" y="1645920"/>
+            <a:ext cx="3840480" cy="182880"/>
+          </a:xfrm>
+          <a:prstGeom prst="roundRect">
+            <a:avLst>
+              <a:gd name="adj" fmla="val 25000"/>
+            </a:avLst>
+          </a:prstGeom>
+          <a:solidFill>
+            <a:srgbClr val="FFFFFF"/>
+          </a:solidFill>
+          <a:ln w="12700">
+            <a:solidFill>
+              <a:srgbClr val="D9DFDD"/>
+            </a:solidFill>
+            <a:prstDash val="solid"/>
+          </a:ln>
+        </p:spPr>
+      </p:sp>
+      <p:sp>
+        <p:nvSpPr>
+          <p:cNvPr id="10" name="Text 8"/>
+          <p:cNvSpPr txBox="1"/>
+          <p:nvPr/>
+        </p:nvSpPr>
+        <p:spPr>
+          <a:xfrm>
+            <a:off x="1234440" y="1645920"/>
+            <a:ext cx="3657600" cy="182880"/>
+          </a:xfrm>
+          <a:prstGeom prst="rect">
+            <a:avLst/>
+          </a:prstGeom>
+          <a:noFill/>
+          <a:ln/>
+        </p:spPr>
+        <p:txBody>
+          <a:bodyPr wrap="square" lIns="0" tIns="0" rIns="0" bIns="0" rtlCol="0" anchor="ctr"/>
+          <a:lstStyle/>
+          <a:p>
+            <a:pPr indent="0" marL="0">
+              <a:buNone/>
+            </a:pPr>
+            <a:r>
+              <a:rPr lang="en-US" sz="850" dirty="0">
+                <a:solidFill>
+                  <a:srgbClr val="4A5A56"/>
+                </a:solidFill>
+                <a:latin typeface="Calibri" pitchFamily="34" charset="0"/>
+                <a:ea typeface="Calibri" pitchFamily="34" charset="-122"/>
+                <a:cs typeface="Calibri" pitchFamily="34" charset="-120"/>
+              </a:rPr>
+              <a:t>eth.blockid.au/v/be5a8a832b474459/report  ·  Canva</a:t>
+            </a:r>
+            <a:endParaRPr lang="en-US" sz="850" dirty="0"/>
+          </a:p>
+        </p:txBody>
+      </p:sp>
       <p:pic>
         <p:nvPicPr>
-          <p:cNvPr id="5" name="Image 0" descr="preencoded.png">    </p:cNvPr>
+          <p:cNvPr id="11" name="Image 0" descr="preencoded.png">    </p:cNvPr>
           <p:cNvPicPr>
             <a:picLocks noChangeAspect="1"/>
           </p:cNvPicPr>
@@ -10668,8 +10920,8 @@
         </p:blipFill>
         <p:spPr>
           <a:xfrm>
-            <a:off x="502920" y="1600200"/>
-            <a:ext cx="5916740" cy="4663440"/>
+            <a:off x="502920" y="1874520"/>
+            <a:ext cx="6766560" cy="4229100"/>
           </a:xfrm>
           <a:prstGeom prst="rect">
             <a:avLst/>
@@ -10678,7 +10930,7 @@
       </p:pic>
       <p:sp>
         <p:nvSpPr>
-          <p:cNvPr id="6" name="Shape 3"/>
+          <p:cNvPr id="12" name="Shape 9"/>
           <p:cNvSpPr/>
           <p:nvPr/>
         </p:nvSpPr>
@@ -10705,7 +10957,7 @@
       </p:sp>
       <p:sp>
         <p:nvSpPr>
-          <p:cNvPr id="7" name="Shape 4"/>
+          <p:cNvPr id="13" name="Shape 10"/>
           <p:cNvSpPr/>
           <p:nvPr/>
         </p:nvSpPr>
@@ -10730,7 +10982,7 @@
       </p:sp>
       <p:sp>
         <p:nvSpPr>
-          <p:cNvPr id="8" name="Text 5"/>
+          <p:cNvPr id="14" name="Text 11"/>
           <p:cNvSpPr txBox="1"/>
           <p:nvPr/>
         </p:nvSpPr>
@@ -10769,7 +11021,7 @@
       </p:sp>
       <p:sp>
         <p:nvSpPr>
-          <p:cNvPr id="9" name="Shape 6"/>
+          <p:cNvPr id="15" name="Shape 12"/>
           <p:cNvSpPr/>
           <p:nvPr/>
         </p:nvSpPr>
@@ -10794,7 +11046,7 @@
       </p:sp>
       <p:sp>
         <p:nvSpPr>
-          <p:cNvPr id="10" name="Text 7"/>
+          <p:cNvPr id="16" name="Text 13"/>
           <p:cNvSpPr txBox="1"/>
           <p:nvPr/>
         </p:nvSpPr>
@@ -10833,7 +11085,7 @@
       </p:sp>
       <p:sp>
         <p:nvSpPr>
-          <p:cNvPr id="11" name="Shape 8"/>
+          <p:cNvPr id="17" name="Shape 14"/>
           <p:cNvSpPr/>
           <p:nvPr/>
         </p:nvSpPr>
@@ -10858,7 +11110,7 @@
       </p:sp>
       <p:sp>
         <p:nvSpPr>
-          <p:cNvPr id="12" name="Text 9"/>
+          <p:cNvPr id="18" name="Text 15"/>
           <p:cNvSpPr txBox="1"/>
           <p:nvPr/>
         </p:nvSpPr>
@@ -10897,7 +11149,7 @@
       </p:sp>
       <p:sp>
         <p:nvSpPr>
-          <p:cNvPr id="13" name="Shape 10"/>
+          <p:cNvPr id="19" name="Shape 16"/>
           <p:cNvSpPr/>
           <p:nvPr/>
         </p:nvSpPr>
@@ -10922,7 +11174,7 @@
       </p:sp>
       <p:sp>
         <p:nvSpPr>
-          <p:cNvPr id="14" name="Text 11"/>
+          <p:cNvPr id="20" name="Text 17"/>
           <p:cNvSpPr txBox="1"/>
           <p:nvPr/>
         </p:nvSpPr>
@@ -10961,7 +11213,7 @@
       </p:sp>
       <p:sp>
         <p:nvSpPr>
-          <p:cNvPr id="15" name="Text 12"/>
+          <p:cNvPr id="21" name="Text 18"/>
           <p:cNvSpPr txBox="1"/>
           <p:nvPr/>
         </p:nvSpPr>
@@ -11000,7 +11252,7 @@
       </p:sp>
       <p:sp>
         <p:nvSpPr>
-          <p:cNvPr id="16" name="Text 13"/>
+          <p:cNvPr id="22" name="Text 19"/>
           <p:cNvSpPr txBox="1"/>
           <p:nvPr/>
         </p:nvSpPr>
@@ -11102,7 +11354,7 @@
                 <a:ea typeface="Calibri" pitchFamily="34" charset="-122"/>
                 <a:cs typeface="Calibri" pitchFamily="34" charset="-120"/>
               </a:rPr>
-              <a:t>6 / 12   ·   OWN IT</a:t>
+              <a:t>6 / 13   ·   OWN IT</a:t>
             </a:r>
             <a:endParaRPr lang="en-US" sz="1150" dirty="0"/>
           </a:p>
@@ -11155,35 +11407,201 @@
         </p:nvSpPr>
         <p:spPr>
           <a:xfrm>
-            <a:off x="457200" y="1554480"/>
-            <a:ext cx="5943600" cy="4679063"/>
+            <a:off x="466344" y="1563624"/>
+            <a:ext cx="6153912" cy="4147947"/>
           </a:xfrm>
           <a:prstGeom prst="roundRect">
             <a:avLst>
-              <a:gd name="adj" fmla="val 1563"/>
+              <a:gd name="adj" fmla="val 1543"/>
             </a:avLst>
           </a:prstGeom>
           <a:solidFill>
-            <a:srgbClr val="25403A"/>
-          </a:solidFill>
-          <a:ln w="12700">
-            <a:solidFill>
-              <a:srgbClr val="25403A"/>
+            <a:srgbClr val="D9DFDD"/>
+          </a:solidFill>
+          <a:ln w="12700">
+            <a:solidFill>
+              <a:srgbClr val="D9DFDD"/>
             </a:solidFill>
             <a:prstDash val="solid"/>
           </a:ln>
           <a:effectLst>
-            <a:outerShdw sx="100000" sy="100000" kx="0" ky="0" algn="bl" rotWithShape="0" blurRad="177800" dist="63500" dir="5400000">
+            <a:outerShdw sx="100000" sy="100000" kx="0" ky="0" algn="bl" rotWithShape="0" blurRad="203200" dist="76200" dir="5400000">
               <a:srgbClr val="000000">
-                <a:alpha val="50000"/>
+                <a:alpha val="55000"/>
               </a:srgbClr>
             </a:outerShdw>
           </a:effectLst>
         </p:spPr>
       </p:sp>
+      <p:sp>
+        <p:nvSpPr>
+          <p:cNvPr id="5" name="Shape 3"/>
+          <p:cNvSpPr/>
+          <p:nvPr/>
+        </p:nvSpPr>
+        <p:spPr>
+          <a:xfrm>
+            <a:off x="502920" y="1600200"/>
+            <a:ext cx="6080760" cy="274320"/>
+          </a:xfrm>
+          <a:prstGeom prst="rect">
+            <a:avLst/>
+          </a:prstGeom>
+          <a:solidFill>
+            <a:srgbClr val="ECEFEE"/>
+          </a:solidFill>
+          <a:ln w="12700">
+            <a:solidFill>
+              <a:srgbClr val="ECEFEE"/>
+            </a:solidFill>
+            <a:prstDash val="solid"/>
+          </a:ln>
+        </p:spPr>
+      </p:sp>
+      <p:sp>
+        <p:nvSpPr>
+          <p:cNvPr id="6" name="Shape 4"/>
+          <p:cNvSpPr/>
+          <p:nvPr/>
+        </p:nvSpPr>
+        <p:spPr>
+          <a:xfrm>
+            <a:off x="612648" y="1687068"/>
+            <a:ext cx="100584" cy="100584"/>
+          </a:xfrm>
+          <a:prstGeom prst="ellipse">
+            <a:avLst/>
+          </a:prstGeom>
+          <a:solidFill>
+            <a:srgbClr val="FF5F57"/>
+          </a:solidFill>
+          <a:ln w="12700">
+            <a:solidFill>
+              <a:srgbClr val="FF5F57"/>
+            </a:solidFill>
+            <a:prstDash val="solid"/>
+          </a:ln>
+        </p:spPr>
+      </p:sp>
+      <p:sp>
+        <p:nvSpPr>
+          <p:cNvPr id="7" name="Shape 5"/>
+          <p:cNvSpPr/>
+          <p:nvPr/>
+        </p:nvSpPr>
+        <p:spPr>
+          <a:xfrm>
+            <a:off x="768096" y="1687068"/>
+            <a:ext cx="100584" cy="100584"/>
+          </a:xfrm>
+          <a:prstGeom prst="ellipse">
+            <a:avLst/>
+          </a:prstGeom>
+          <a:solidFill>
+            <a:srgbClr val="FEBC2E"/>
+          </a:solidFill>
+          <a:ln w="12700">
+            <a:solidFill>
+              <a:srgbClr val="FEBC2E"/>
+            </a:solidFill>
+            <a:prstDash val="solid"/>
+          </a:ln>
+        </p:spPr>
+      </p:sp>
+      <p:sp>
+        <p:nvSpPr>
+          <p:cNvPr id="8" name="Shape 6"/>
+          <p:cNvSpPr/>
+          <p:nvPr/>
+        </p:nvSpPr>
+        <p:spPr>
+          <a:xfrm>
+            <a:off x="923544" y="1687068"/>
+            <a:ext cx="100584" cy="100584"/>
+          </a:xfrm>
+          <a:prstGeom prst="ellipse">
+            <a:avLst/>
+          </a:prstGeom>
+          <a:solidFill>
+            <a:srgbClr val="28C840"/>
+          </a:solidFill>
+          <a:ln w="12700">
+            <a:solidFill>
+              <a:srgbClr val="28C840"/>
+            </a:solidFill>
+            <a:prstDash val="solid"/>
+          </a:ln>
+        </p:spPr>
+      </p:sp>
+      <p:sp>
+        <p:nvSpPr>
+          <p:cNvPr id="9" name="Shape 7"/>
+          <p:cNvSpPr/>
+          <p:nvPr/>
+        </p:nvSpPr>
+        <p:spPr>
+          <a:xfrm>
+            <a:off x="1143000" y="1645920"/>
+            <a:ext cx="3840480" cy="182880"/>
+          </a:xfrm>
+          <a:prstGeom prst="roundRect">
+            <a:avLst>
+              <a:gd name="adj" fmla="val 25000"/>
+            </a:avLst>
+          </a:prstGeom>
+          <a:solidFill>
+            <a:srgbClr val="FFFFFF"/>
+          </a:solidFill>
+          <a:ln w="12700">
+            <a:solidFill>
+              <a:srgbClr val="D9DFDD"/>
+            </a:solidFill>
+            <a:prstDash val="solid"/>
+          </a:ln>
+        </p:spPr>
+      </p:sp>
+      <p:sp>
+        <p:nvSpPr>
+          <p:cNvPr id="10" name="Text 8"/>
+          <p:cNvSpPr txBox="1"/>
+          <p:nvPr/>
+        </p:nvSpPr>
+        <p:spPr>
+          <a:xfrm>
+            <a:off x="1234440" y="1645920"/>
+            <a:ext cx="3657600" cy="182880"/>
+          </a:xfrm>
+          <a:prstGeom prst="rect">
+            <a:avLst/>
+          </a:prstGeom>
+          <a:noFill/>
+          <a:ln/>
+        </p:spPr>
+        <p:txBody>
+          <a:bodyPr wrap="square" lIns="0" tIns="0" rIns="0" bIns="0" rtlCol="0" anchor="ctr"/>
+          <a:lstStyle/>
+          <a:p>
+            <a:pPr indent="0" marL="0">
+              <a:buNone/>
+            </a:pPr>
+            <a:r>
+              <a:rPr lang="en-US" sz="850" dirty="0">
+                <a:solidFill>
+                  <a:srgbClr val="4A5A56"/>
+                </a:solidFill>
+                <a:latin typeface="Calibri" pitchFamily="34" charset="0"/>
+                <a:ea typeface="Calibri" pitchFamily="34" charset="-122"/>
+                <a:cs typeface="Calibri" pitchFamily="34" charset="-120"/>
+              </a:rPr>
+              <a:t>eth.blockid.au/c/ARW/cap-table</a:t>
+            </a:r>
+            <a:endParaRPr lang="en-US" sz="850" dirty="0"/>
+          </a:p>
+        </p:txBody>
+      </p:sp>
       <p:pic>
         <p:nvPicPr>
-          <p:cNvPr id="5" name="Image 0" descr="preencoded.png">    </p:cNvPr>
+          <p:cNvPr id="11" name="Image 0" descr="preencoded.png">    </p:cNvPr>
           <p:cNvPicPr>
             <a:picLocks noChangeAspect="1"/>
           </p:cNvPicPr>
@@ -11197,8 +11615,8 @@
         </p:blipFill>
         <p:spPr>
           <a:xfrm>
-            <a:off x="502920" y="1600200"/>
-            <a:ext cx="5852160" cy="4587623"/>
+            <a:off x="502920" y="1874520"/>
+            <a:ext cx="6080760" cy="3800475"/>
           </a:xfrm>
           <a:prstGeom prst="rect">
             <a:avLst/>
@@ -11207,7 +11625,7 @@
       </p:pic>
       <p:sp>
         <p:nvSpPr>
-          <p:cNvPr id="6" name="Shape 3"/>
+          <p:cNvPr id="12" name="Shape 9"/>
           <p:cNvSpPr/>
           <p:nvPr/>
         </p:nvSpPr>
@@ -11234,7 +11652,7 @@
       </p:sp>
       <p:sp>
         <p:nvSpPr>
-          <p:cNvPr id="7" name="Shape 4"/>
+          <p:cNvPr id="13" name="Shape 10"/>
           <p:cNvSpPr/>
           <p:nvPr/>
         </p:nvSpPr>
@@ -11259,7 +11677,7 @@
       </p:sp>
       <p:sp>
         <p:nvSpPr>
-          <p:cNvPr id="8" name="Text 5"/>
+          <p:cNvPr id="14" name="Text 11"/>
           <p:cNvSpPr txBox="1"/>
           <p:nvPr/>
         </p:nvSpPr>
@@ -11298,7 +11716,7 @@
       </p:sp>
       <p:sp>
         <p:nvSpPr>
-          <p:cNvPr id="9" name="Shape 6"/>
+          <p:cNvPr id="15" name="Shape 12"/>
           <p:cNvSpPr/>
           <p:nvPr/>
         </p:nvSpPr>
@@ -11323,7 +11741,7 @@
       </p:sp>
       <p:sp>
         <p:nvSpPr>
-          <p:cNvPr id="10" name="Text 7"/>
+          <p:cNvPr id="16" name="Text 13"/>
           <p:cNvSpPr txBox="1"/>
           <p:nvPr/>
         </p:nvSpPr>
@@ -11362,7 +11780,7 @@
       </p:sp>
       <p:sp>
         <p:nvSpPr>
-          <p:cNvPr id="11" name="Shape 8"/>
+          <p:cNvPr id="17" name="Shape 14"/>
           <p:cNvSpPr/>
           <p:nvPr/>
         </p:nvSpPr>
@@ -11387,7 +11805,7 @@
       </p:sp>
       <p:sp>
         <p:nvSpPr>
-          <p:cNvPr id="12" name="Text 9"/>
+          <p:cNvPr id="18" name="Text 15"/>
           <p:cNvSpPr txBox="1"/>
           <p:nvPr/>
         </p:nvSpPr>
@@ -11426,7 +11844,7 @@
       </p:sp>
       <p:sp>
         <p:nvSpPr>
-          <p:cNvPr id="13" name="Shape 10"/>
+          <p:cNvPr id="19" name="Shape 16"/>
           <p:cNvSpPr/>
           <p:nvPr/>
         </p:nvSpPr>
@@ -11451,7 +11869,7 @@
       </p:sp>
       <p:sp>
         <p:nvSpPr>
-          <p:cNvPr id="14" name="Text 11"/>
+          <p:cNvPr id="20" name="Text 17"/>
           <p:cNvSpPr txBox="1"/>
           <p:nvPr/>
         </p:nvSpPr>
@@ -11490,7 +11908,7 @@
       </p:sp>
       <p:sp>
         <p:nvSpPr>
-          <p:cNvPr id="15" name="Text 12"/>
+          <p:cNvPr id="21" name="Text 18"/>
           <p:cNvSpPr txBox="1"/>
           <p:nvPr/>
         </p:nvSpPr>
@@ -11529,7 +11947,7 @@
       </p:sp>
       <p:sp>
         <p:nvSpPr>
-          <p:cNvPr id="16" name="Text 13"/>
+          <p:cNvPr id="22" name="Text 19"/>
           <p:cNvSpPr txBox="1"/>
           <p:nvPr/>
         </p:nvSpPr>
@@ -11631,7 +12049,7 @@
                 <a:ea typeface="Calibri" pitchFamily="34" charset="-122"/>
                 <a:cs typeface="Calibri" pitchFamily="34" charset="-120"/>
               </a:rPr>
-              <a:t>7 / 12   ·   FOLLOW IT · GET PAID</a:t>
+              <a:t>7 / 13   ·   FOLLOW IT · GET PAID</a:t>
             </a:r>
             <a:endParaRPr lang="en-US" sz="1150" dirty="0"/>
           </a:p>
@@ -11684,35 +12102,201 @@
         </p:nvSpPr>
         <p:spPr>
           <a:xfrm>
-            <a:off x="777240" y="1554480"/>
-            <a:ext cx="4023360" cy="4560694"/>
+            <a:off x="466344" y="1609344"/>
+            <a:ext cx="4736592" cy="3262122"/>
           </a:xfrm>
           <a:prstGeom prst="roundRect">
             <a:avLst>
-              <a:gd name="adj" fmla="val 1818"/>
+              <a:gd name="adj" fmla="val 1962"/>
             </a:avLst>
           </a:prstGeom>
           <a:solidFill>
-            <a:srgbClr val="25403A"/>
-          </a:solidFill>
-          <a:ln w="12700">
-            <a:solidFill>
-              <a:srgbClr val="25403A"/>
+            <a:srgbClr val="D9DFDD"/>
+          </a:solidFill>
+          <a:ln w="12700">
+            <a:solidFill>
+              <a:srgbClr val="D9DFDD"/>
             </a:solidFill>
             <a:prstDash val="solid"/>
           </a:ln>
           <a:effectLst>
-            <a:outerShdw sx="100000" sy="100000" kx="0" ky="0" algn="bl" rotWithShape="0" blurRad="177800" dist="63500" dir="5400000">
+            <a:outerShdw sx="100000" sy="100000" kx="0" ky="0" algn="bl" rotWithShape="0" blurRad="203200" dist="76200" dir="5400000">
               <a:srgbClr val="000000">
-                <a:alpha val="50000"/>
+                <a:alpha val="55000"/>
               </a:srgbClr>
             </a:outerShdw>
           </a:effectLst>
         </p:spPr>
       </p:sp>
+      <p:sp>
+        <p:nvSpPr>
+          <p:cNvPr id="5" name="Shape 3"/>
+          <p:cNvSpPr/>
+          <p:nvPr/>
+        </p:nvSpPr>
+        <p:spPr>
+          <a:xfrm>
+            <a:off x="502920" y="1645920"/>
+            <a:ext cx="4663440" cy="274320"/>
+          </a:xfrm>
+          <a:prstGeom prst="rect">
+            <a:avLst/>
+          </a:prstGeom>
+          <a:solidFill>
+            <a:srgbClr val="ECEFEE"/>
+          </a:solidFill>
+          <a:ln w="12700">
+            <a:solidFill>
+              <a:srgbClr val="ECEFEE"/>
+            </a:solidFill>
+            <a:prstDash val="solid"/>
+          </a:ln>
+        </p:spPr>
+      </p:sp>
+      <p:sp>
+        <p:nvSpPr>
+          <p:cNvPr id="6" name="Shape 4"/>
+          <p:cNvSpPr/>
+          <p:nvPr/>
+        </p:nvSpPr>
+        <p:spPr>
+          <a:xfrm>
+            <a:off x="612648" y="1732788"/>
+            <a:ext cx="100584" cy="100584"/>
+          </a:xfrm>
+          <a:prstGeom prst="ellipse">
+            <a:avLst/>
+          </a:prstGeom>
+          <a:solidFill>
+            <a:srgbClr val="FF5F57"/>
+          </a:solidFill>
+          <a:ln w="12700">
+            <a:solidFill>
+              <a:srgbClr val="FF5F57"/>
+            </a:solidFill>
+            <a:prstDash val="solid"/>
+          </a:ln>
+        </p:spPr>
+      </p:sp>
+      <p:sp>
+        <p:nvSpPr>
+          <p:cNvPr id="7" name="Shape 5"/>
+          <p:cNvSpPr/>
+          <p:nvPr/>
+        </p:nvSpPr>
+        <p:spPr>
+          <a:xfrm>
+            <a:off x="768096" y="1732788"/>
+            <a:ext cx="100584" cy="100584"/>
+          </a:xfrm>
+          <a:prstGeom prst="ellipse">
+            <a:avLst/>
+          </a:prstGeom>
+          <a:solidFill>
+            <a:srgbClr val="FEBC2E"/>
+          </a:solidFill>
+          <a:ln w="12700">
+            <a:solidFill>
+              <a:srgbClr val="FEBC2E"/>
+            </a:solidFill>
+            <a:prstDash val="solid"/>
+          </a:ln>
+        </p:spPr>
+      </p:sp>
+      <p:sp>
+        <p:nvSpPr>
+          <p:cNvPr id="8" name="Shape 6"/>
+          <p:cNvSpPr/>
+          <p:nvPr/>
+        </p:nvSpPr>
+        <p:spPr>
+          <a:xfrm>
+            <a:off x="923544" y="1732788"/>
+            <a:ext cx="100584" cy="100584"/>
+          </a:xfrm>
+          <a:prstGeom prst="ellipse">
+            <a:avLst/>
+          </a:prstGeom>
+          <a:solidFill>
+            <a:srgbClr val="28C840"/>
+          </a:solidFill>
+          <a:ln w="12700">
+            <a:solidFill>
+              <a:srgbClr val="28C840"/>
+            </a:solidFill>
+            <a:prstDash val="solid"/>
+          </a:ln>
+        </p:spPr>
+      </p:sp>
+      <p:sp>
+        <p:nvSpPr>
+          <p:cNvPr id="9" name="Shape 7"/>
+          <p:cNvSpPr/>
+          <p:nvPr/>
+        </p:nvSpPr>
+        <p:spPr>
+          <a:xfrm>
+            <a:off x="1143000" y="1691640"/>
+            <a:ext cx="3840480" cy="182880"/>
+          </a:xfrm>
+          <a:prstGeom prst="roundRect">
+            <a:avLst>
+              <a:gd name="adj" fmla="val 25000"/>
+            </a:avLst>
+          </a:prstGeom>
+          <a:solidFill>
+            <a:srgbClr val="FFFFFF"/>
+          </a:solidFill>
+          <a:ln w="12700">
+            <a:solidFill>
+              <a:srgbClr val="D9DFDD"/>
+            </a:solidFill>
+            <a:prstDash val="solid"/>
+          </a:ln>
+        </p:spPr>
+      </p:sp>
+      <p:sp>
+        <p:nvSpPr>
+          <p:cNvPr id="10" name="Text 8"/>
+          <p:cNvSpPr txBox="1"/>
+          <p:nvPr/>
+        </p:nvSpPr>
+        <p:spPr>
+          <a:xfrm>
+            <a:off x="1234440" y="1691640"/>
+            <a:ext cx="3657600" cy="182880"/>
+          </a:xfrm>
+          <a:prstGeom prst="rect">
+            <a:avLst/>
+          </a:prstGeom>
+          <a:noFill/>
+          <a:ln/>
+        </p:spPr>
+        <p:txBody>
+          <a:bodyPr wrap="square" lIns="0" tIns="0" rIns="0" bIns="0" rtlCol="0" anchor="ctr"/>
+          <a:lstStyle/>
+          <a:p>
+            <a:pPr indent="0" marL="0">
+              <a:buNone/>
+            </a:pPr>
+            <a:r>
+              <a:rPr lang="en-US" sz="850" dirty="0">
+                <a:solidFill>
+                  <a:srgbClr val="4A5A56"/>
+                </a:solidFill>
+                <a:latin typeface="Calibri" pitchFamily="34" charset="0"/>
+                <a:ea typeface="Calibri" pitchFamily="34" charset="-122"/>
+                <a:cs typeface="Calibri" pitchFamily="34" charset="-120"/>
+              </a:rPr>
+              <a:t>eth.blockid.au/i/demo/EBA</a:t>
+            </a:r>
+            <a:endParaRPr lang="en-US" sz="850" dirty="0"/>
+          </a:p>
+        </p:txBody>
+      </p:sp>
       <p:pic>
         <p:nvPicPr>
-          <p:cNvPr id="5" name="Image 0" descr="preencoded.png">    </p:cNvPr>
+          <p:cNvPr id="11" name="Image 0" descr="preencoded.png">    </p:cNvPr>
           <p:cNvPicPr>
             <a:picLocks noChangeAspect="1"/>
           </p:cNvPicPr>
@@ -11726,8 +12310,8 @@
         </p:blipFill>
         <p:spPr>
           <a:xfrm>
-            <a:off x="822960" y="1600200"/>
-            <a:ext cx="3931920" cy="4469254"/>
+            <a:off x="502920" y="1920240"/>
+            <a:ext cx="4663440" cy="2914650"/>
           </a:xfrm>
           <a:prstGeom prst="rect">
             <a:avLst/>
@@ -11736,7 +12320,7 @@
       </p:pic>
       <p:sp>
         <p:nvSpPr>
-          <p:cNvPr id="6" name="Shape 3"/>
+          <p:cNvPr id="12" name="Shape 9"/>
           <p:cNvSpPr/>
           <p:nvPr/>
         </p:nvSpPr>
@@ -11763,7 +12347,7 @@
       </p:sp>
       <p:sp>
         <p:nvSpPr>
-          <p:cNvPr id="7" name="Shape 4"/>
+          <p:cNvPr id="13" name="Shape 10"/>
           <p:cNvSpPr/>
           <p:nvPr/>
         </p:nvSpPr>
@@ -11788,7 +12372,7 @@
       </p:sp>
       <p:sp>
         <p:nvSpPr>
-          <p:cNvPr id="8" name="Text 5"/>
+          <p:cNvPr id="14" name="Text 11"/>
           <p:cNvSpPr txBox="1"/>
           <p:nvPr/>
         </p:nvSpPr>
@@ -11827,7 +12411,7 @@
       </p:sp>
       <p:sp>
         <p:nvSpPr>
-          <p:cNvPr id="9" name="Text 6"/>
+          <p:cNvPr id="15" name="Text 12"/>
           <p:cNvSpPr txBox="1"/>
           <p:nvPr/>
         </p:nvSpPr>
@@ -11866,7 +12450,7 @@
       </p:sp>
       <p:sp>
         <p:nvSpPr>
-          <p:cNvPr id="10" name="Text 7"/>
+          <p:cNvPr id="16" name="Text 13"/>
           <p:cNvSpPr txBox="1"/>
           <p:nvPr/>
         </p:nvSpPr>
@@ -11905,7 +12489,7 @@
       </p:sp>
       <p:sp>
         <p:nvSpPr>
-          <p:cNvPr id="11" name="Shape 8"/>
+          <p:cNvPr id="17" name="Shape 14"/>
           <p:cNvSpPr/>
           <p:nvPr/>
         </p:nvSpPr>
@@ -11932,7 +12516,7 @@
       </p:sp>
       <p:sp>
         <p:nvSpPr>
-          <p:cNvPr id="12" name="Shape 9"/>
+          <p:cNvPr id="18" name="Shape 15"/>
           <p:cNvSpPr/>
           <p:nvPr/>
         </p:nvSpPr>
@@ -11957,7 +12541,7 @@
       </p:sp>
       <p:sp>
         <p:nvSpPr>
-          <p:cNvPr id="13" name="Text 10"/>
+          <p:cNvPr id="19" name="Text 16"/>
           <p:cNvSpPr txBox="1"/>
           <p:nvPr/>
         </p:nvSpPr>
@@ -11996,7 +12580,7 @@
       </p:sp>
       <p:sp>
         <p:nvSpPr>
-          <p:cNvPr id="14" name="Text 11"/>
+          <p:cNvPr id="20" name="Text 17"/>
           <p:cNvSpPr txBox="1"/>
           <p:nvPr/>
         </p:nvSpPr>
@@ -12035,7 +12619,7 @@
       </p:sp>
       <p:sp>
         <p:nvSpPr>
-          <p:cNvPr id="15" name="Text 12"/>
+          <p:cNvPr id="21" name="Text 18"/>
           <p:cNvSpPr txBox="1"/>
           <p:nvPr/>
         </p:nvSpPr>
@@ -12074,7 +12658,7 @@
       </p:sp>
       <p:sp>
         <p:nvSpPr>
-          <p:cNvPr id="16" name="Shape 13"/>
+          <p:cNvPr id="22" name="Shape 19"/>
           <p:cNvSpPr/>
           <p:nvPr/>
         </p:nvSpPr>
@@ -12101,7 +12685,7 @@
       </p:sp>
       <p:sp>
         <p:nvSpPr>
-          <p:cNvPr id="17" name="Shape 14"/>
+          <p:cNvPr id="23" name="Shape 20"/>
           <p:cNvSpPr/>
           <p:nvPr/>
         </p:nvSpPr>
@@ -12126,7 +12710,7 @@
       </p:sp>
       <p:sp>
         <p:nvSpPr>
-          <p:cNvPr id="18" name="Text 15"/>
+          <p:cNvPr id="24" name="Text 21"/>
           <p:cNvSpPr txBox="1"/>
           <p:nvPr/>
         </p:nvSpPr>
@@ -12165,7 +12749,7 @@
       </p:sp>
       <p:sp>
         <p:nvSpPr>
-          <p:cNvPr id="19" name="Text 16"/>
+          <p:cNvPr id="25" name="Text 22"/>
           <p:cNvSpPr txBox="1"/>
           <p:nvPr/>
         </p:nvSpPr>
@@ -12204,7 +12788,7 @@
       </p:sp>
       <p:sp>
         <p:nvSpPr>
-          <p:cNvPr id="20" name="Text 17"/>
+          <p:cNvPr id="26" name="Text 23"/>
           <p:cNvSpPr txBox="1"/>
           <p:nvPr/>
         </p:nvSpPr>
@@ -12243,7 +12827,7 @@
       </p:sp>
       <p:sp>
         <p:nvSpPr>
-          <p:cNvPr id="21" name="Shape 18"/>
+          <p:cNvPr id="27" name="Shape 24"/>
           <p:cNvSpPr/>
           <p:nvPr/>
         </p:nvSpPr>
@@ -12270,7 +12854,7 @@
       </p:sp>
       <p:sp>
         <p:nvSpPr>
-          <p:cNvPr id="22" name="Shape 19"/>
+          <p:cNvPr id="28" name="Shape 25"/>
           <p:cNvSpPr/>
           <p:nvPr/>
         </p:nvSpPr>
@@ -12295,7 +12879,7 @@
       </p:sp>
       <p:sp>
         <p:nvSpPr>
-          <p:cNvPr id="23" name="Text 20"/>
+          <p:cNvPr id="29" name="Text 26"/>
           <p:cNvSpPr txBox="1"/>
           <p:nvPr/>
         </p:nvSpPr>
@@ -12334,7 +12918,7 @@
       </p:sp>
       <p:sp>
         <p:nvSpPr>
-          <p:cNvPr id="24" name="Text 21"/>
+          <p:cNvPr id="30" name="Text 27"/>
           <p:cNvSpPr txBox="1"/>
           <p:nvPr/>
         </p:nvSpPr>
@@ -12373,7 +12957,7 @@
       </p:sp>
       <p:sp>
         <p:nvSpPr>
-          <p:cNvPr id="25" name="Text 22"/>
+          <p:cNvPr id="31" name="Text 28"/>
           <p:cNvSpPr txBox="1"/>
           <p:nvPr/>
         </p:nvSpPr>
@@ -12412,7 +12996,7 @@
       </p:sp>
       <p:sp>
         <p:nvSpPr>
-          <p:cNvPr id="26" name="Text 23"/>
+          <p:cNvPr id="32" name="Text 29"/>
           <p:cNvSpPr txBox="1"/>
           <p:nvPr/>
         </p:nvSpPr>
@@ -12514,7 +13098,7 @@
                 <a:ea typeface="Calibri" pitchFamily="34" charset="-122"/>
                 <a:cs typeface="Calibri" pitchFamily="34" charset="-120"/>
               </a:rPr>
-              <a:t>8 / 12   ·   CHECK IT</a:t>
+              <a:t>8 / 13   ·   CHECK IT</a:t>
             </a:r>
             <a:endParaRPr lang="en-US" sz="1150" dirty="0"/>
           </a:p>
@@ -12567,35 +13151,201 @@
         </p:nvSpPr>
         <p:spPr>
           <a:xfrm>
-            <a:off x="457200" y="1600200"/>
-            <a:ext cx="5532120" cy="1912885"/>
+            <a:off x="466344" y="1609344"/>
+            <a:ext cx="5513832" cy="2765552"/>
           </a:xfrm>
           <a:prstGeom prst="roundRect">
             <a:avLst>
-              <a:gd name="adj" fmla="val 3824"/>
+              <a:gd name="adj" fmla="val 2314"/>
             </a:avLst>
           </a:prstGeom>
           <a:solidFill>
-            <a:srgbClr val="25403A"/>
-          </a:solidFill>
-          <a:ln w="12700">
-            <a:solidFill>
-              <a:srgbClr val="25403A"/>
+            <a:srgbClr val="D9DFDD"/>
+          </a:solidFill>
+          <a:ln w="12700">
+            <a:solidFill>
+              <a:srgbClr val="D9DFDD"/>
             </a:solidFill>
             <a:prstDash val="solid"/>
           </a:ln>
           <a:effectLst>
-            <a:outerShdw sx="100000" sy="100000" kx="0" ky="0" algn="bl" rotWithShape="0" blurRad="177800" dist="63500" dir="5400000">
+            <a:outerShdw sx="100000" sy="100000" kx="0" ky="0" algn="bl" rotWithShape="0" blurRad="203200" dist="76200" dir="5400000">
               <a:srgbClr val="000000">
-                <a:alpha val="50000"/>
+                <a:alpha val="55000"/>
               </a:srgbClr>
             </a:outerShdw>
           </a:effectLst>
         </p:spPr>
       </p:sp>
+      <p:sp>
+        <p:nvSpPr>
+          <p:cNvPr id="5" name="Shape 3"/>
+          <p:cNvSpPr/>
+          <p:nvPr/>
+        </p:nvSpPr>
+        <p:spPr>
+          <a:xfrm>
+            <a:off x="502920" y="1645920"/>
+            <a:ext cx="5440680" cy="274320"/>
+          </a:xfrm>
+          <a:prstGeom prst="rect">
+            <a:avLst/>
+          </a:prstGeom>
+          <a:solidFill>
+            <a:srgbClr val="ECEFEE"/>
+          </a:solidFill>
+          <a:ln w="12700">
+            <a:solidFill>
+              <a:srgbClr val="ECEFEE"/>
+            </a:solidFill>
+            <a:prstDash val="solid"/>
+          </a:ln>
+        </p:spPr>
+      </p:sp>
+      <p:sp>
+        <p:nvSpPr>
+          <p:cNvPr id="6" name="Shape 4"/>
+          <p:cNvSpPr/>
+          <p:nvPr/>
+        </p:nvSpPr>
+        <p:spPr>
+          <a:xfrm>
+            <a:off x="612648" y="1732788"/>
+            <a:ext cx="100584" cy="100584"/>
+          </a:xfrm>
+          <a:prstGeom prst="ellipse">
+            <a:avLst/>
+          </a:prstGeom>
+          <a:solidFill>
+            <a:srgbClr val="FF5F57"/>
+          </a:solidFill>
+          <a:ln w="12700">
+            <a:solidFill>
+              <a:srgbClr val="FF5F57"/>
+            </a:solidFill>
+            <a:prstDash val="solid"/>
+          </a:ln>
+        </p:spPr>
+      </p:sp>
+      <p:sp>
+        <p:nvSpPr>
+          <p:cNvPr id="7" name="Shape 5"/>
+          <p:cNvSpPr/>
+          <p:nvPr/>
+        </p:nvSpPr>
+        <p:spPr>
+          <a:xfrm>
+            <a:off x="768096" y="1732788"/>
+            <a:ext cx="100584" cy="100584"/>
+          </a:xfrm>
+          <a:prstGeom prst="ellipse">
+            <a:avLst/>
+          </a:prstGeom>
+          <a:solidFill>
+            <a:srgbClr val="FEBC2E"/>
+          </a:solidFill>
+          <a:ln w="12700">
+            <a:solidFill>
+              <a:srgbClr val="FEBC2E"/>
+            </a:solidFill>
+            <a:prstDash val="solid"/>
+          </a:ln>
+        </p:spPr>
+      </p:sp>
+      <p:sp>
+        <p:nvSpPr>
+          <p:cNvPr id="8" name="Shape 6"/>
+          <p:cNvSpPr/>
+          <p:nvPr/>
+        </p:nvSpPr>
+        <p:spPr>
+          <a:xfrm>
+            <a:off x="923544" y="1732788"/>
+            <a:ext cx="100584" cy="100584"/>
+          </a:xfrm>
+          <a:prstGeom prst="ellipse">
+            <a:avLst/>
+          </a:prstGeom>
+          <a:solidFill>
+            <a:srgbClr val="28C840"/>
+          </a:solidFill>
+          <a:ln w="12700">
+            <a:solidFill>
+              <a:srgbClr val="28C840"/>
+            </a:solidFill>
+            <a:prstDash val="solid"/>
+          </a:ln>
+        </p:spPr>
+      </p:sp>
+      <p:sp>
+        <p:nvSpPr>
+          <p:cNvPr id="9" name="Shape 7"/>
+          <p:cNvSpPr/>
+          <p:nvPr/>
+        </p:nvSpPr>
+        <p:spPr>
+          <a:xfrm>
+            <a:off x="1143000" y="1691640"/>
+            <a:ext cx="3840480" cy="182880"/>
+          </a:xfrm>
+          <a:prstGeom prst="roundRect">
+            <a:avLst>
+              <a:gd name="adj" fmla="val 25000"/>
+            </a:avLst>
+          </a:prstGeom>
+          <a:solidFill>
+            <a:srgbClr val="FFFFFF"/>
+          </a:solidFill>
+          <a:ln w="12700">
+            <a:solidFill>
+              <a:srgbClr val="D9DFDD"/>
+            </a:solidFill>
+            <a:prstDash val="solid"/>
+          </a:ln>
+        </p:spPr>
+      </p:sp>
+      <p:sp>
+        <p:nvSpPr>
+          <p:cNvPr id="10" name="Text 8"/>
+          <p:cNvSpPr txBox="1"/>
+          <p:nvPr/>
+        </p:nvSpPr>
+        <p:spPr>
+          <a:xfrm>
+            <a:off x="1234440" y="1691640"/>
+            <a:ext cx="3657600" cy="182880"/>
+          </a:xfrm>
+          <a:prstGeom prst="rect">
+            <a:avLst/>
+          </a:prstGeom>
+          <a:noFill/>
+          <a:ln/>
+        </p:spPr>
+        <p:txBody>
+          <a:bodyPr wrap="square" lIns="0" tIns="0" rIns="0" bIns="0" rtlCol="0" anchor="ctr"/>
+          <a:lstStyle/>
+          <a:p>
+            <a:pPr indent="0" marL="0">
+              <a:buNone/>
+            </a:pPr>
+            <a:r>
+              <a:rPr lang="en-US" sz="850" dirty="0">
+                <a:solidFill>
+                  <a:srgbClr val="4A5A56"/>
+                </a:solidFill>
+                <a:latin typeface="Calibri" pitchFamily="34" charset="0"/>
+                <a:ea typeface="Calibri" pitchFamily="34" charset="-122"/>
+                <a:cs typeface="Calibri" pitchFamily="34" charset="-120"/>
+              </a:rPr>
+              <a:t>eth.blockid.au/verify/EBA</a:t>
+            </a:r>
+            <a:endParaRPr lang="en-US" sz="850" dirty="0"/>
+          </a:p>
+        </p:txBody>
+      </p:sp>
       <p:pic>
         <p:nvPicPr>
-          <p:cNvPr id="5" name="Image 0" descr="preencoded.png">    </p:cNvPr>
+          <p:cNvPr id="11" name="Image 0" descr="preencoded.png">    </p:cNvPr>
           <p:cNvPicPr>
             <a:picLocks noChangeAspect="1"/>
           </p:cNvPicPr>
@@ -12609,8 +13359,8 @@
         </p:blipFill>
         <p:spPr>
           <a:xfrm>
-            <a:off x="502920" y="1645920"/>
-            <a:ext cx="5440680" cy="1821445"/>
+            <a:off x="502920" y="1920240"/>
+            <a:ext cx="5440680" cy="2418080"/>
           </a:xfrm>
           <a:prstGeom prst="rect">
             <a:avLst/>
@@ -12619,41 +13369,207 @@
       </p:pic>
       <p:sp>
         <p:nvSpPr>
-          <p:cNvPr id="6" name="Shape 3"/>
-          <p:cNvSpPr/>
-          <p:nvPr/>
-        </p:nvSpPr>
-        <p:spPr>
-          <a:xfrm>
-            <a:off x="6217920" y="1600200"/>
-            <a:ext cx="5532120" cy="1912885"/>
+          <p:cNvPr id="12" name="Shape 9"/>
+          <p:cNvSpPr/>
+          <p:nvPr/>
+        </p:nvSpPr>
+        <p:spPr>
+          <a:xfrm>
+            <a:off x="6227064" y="1609344"/>
+            <a:ext cx="5513832" cy="2765552"/>
           </a:xfrm>
           <a:prstGeom prst="roundRect">
             <a:avLst>
-              <a:gd name="adj" fmla="val 3824"/>
+              <a:gd name="adj" fmla="val 2314"/>
             </a:avLst>
           </a:prstGeom>
           <a:solidFill>
-            <a:srgbClr val="25403A"/>
-          </a:solidFill>
-          <a:ln w="12700">
-            <a:solidFill>
-              <a:srgbClr val="25403A"/>
+            <a:srgbClr val="D9DFDD"/>
+          </a:solidFill>
+          <a:ln w="12700">
+            <a:solidFill>
+              <a:srgbClr val="D9DFDD"/>
             </a:solidFill>
             <a:prstDash val="solid"/>
           </a:ln>
           <a:effectLst>
-            <a:outerShdw sx="100000" sy="100000" kx="0" ky="0" algn="bl" rotWithShape="0" blurRad="177800" dist="63500" dir="5400000">
+            <a:outerShdw sx="100000" sy="100000" kx="0" ky="0" algn="bl" rotWithShape="0" blurRad="203200" dist="76200" dir="5400000">
               <a:srgbClr val="000000">
-                <a:alpha val="50000"/>
+                <a:alpha val="55000"/>
               </a:srgbClr>
             </a:outerShdw>
           </a:effectLst>
         </p:spPr>
       </p:sp>
+      <p:sp>
+        <p:nvSpPr>
+          <p:cNvPr id="13" name="Shape 10"/>
+          <p:cNvSpPr/>
+          <p:nvPr/>
+        </p:nvSpPr>
+        <p:spPr>
+          <a:xfrm>
+            <a:off x="6263640" y="1645920"/>
+            <a:ext cx="5440680" cy="274320"/>
+          </a:xfrm>
+          <a:prstGeom prst="rect">
+            <a:avLst/>
+          </a:prstGeom>
+          <a:solidFill>
+            <a:srgbClr val="ECEFEE"/>
+          </a:solidFill>
+          <a:ln w="12700">
+            <a:solidFill>
+              <a:srgbClr val="ECEFEE"/>
+            </a:solidFill>
+            <a:prstDash val="solid"/>
+          </a:ln>
+        </p:spPr>
+      </p:sp>
+      <p:sp>
+        <p:nvSpPr>
+          <p:cNvPr id="14" name="Shape 11"/>
+          <p:cNvSpPr/>
+          <p:nvPr/>
+        </p:nvSpPr>
+        <p:spPr>
+          <a:xfrm>
+            <a:off x="6373368" y="1732788"/>
+            <a:ext cx="100584" cy="100584"/>
+          </a:xfrm>
+          <a:prstGeom prst="ellipse">
+            <a:avLst/>
+          </a:prstGeom>
+          <a:solidFill>
+            <a:srgbClr val="FF5F57"/>
+          </a:solidFill>
+          <a:ln w="12700">
+            <a:solidFill>
+              <a:srgbClr val="FF5F57"/>
+            </a:solidFill>
+            <a:prstDash val="solid"/>
+          </a:ln>
+        </p:spPr>
+      </p:sp>
+      <p:sp>
+        <p:nvSpPr>
+          <p:cNvPr id="15" name="Shape 12"/>
+          <p:cNvSpPr/>
+          <p:nvPr/>
+        </p:nvSpPr>
+        <p:spPr>
+          <a:xfrm>
+            <a:off x="6528816" y="1732788"/>
+            <a:ext cx="100584" cy="100584"/>
+          </a:xfrm>
+          <a:prstGeom prst="ellipse">
+            <a:avLst/>
+          </a:prstGeom>
+          <a:solidFill>
+            <a:srgbClr val="FEBC2E"/>
+          </a:solidFill>
+          <a:ln w="12700">
+            <a:solidFill>
+              <a:srgbClr val="FEBC2E"/>
+            </a:solidFill>
+            <a:prstDash val="solid"/>
+          </a:ln>
+        </p:spPr>
+      </p:sp>
+      <p:sp>
+        <p:nvSpPr>
+          <p:cNvPr id="16" name="Shape 13"/>
+          <p:cNvSpPr/>
+          <p:nvPr/>
+        </p:nvSpPr>
+        <p:spPr>
+          <a:xfrm>
+            <a:off x="6684264" y="1732788"/>
+            <a:ext cx="100584" cy="100584"/>
+          </a:xfrm>
+          <a:prstGeom prst="ellipse">
+            <a:avLst/>
+          </a:prstGeom>
+          <a:solidFill>
+            <a:srgbClr val="28C840"/>
+          </a:solidFill>
+          <a:ln w="12700">
+            <a:solidFill>
+              <a:srgbClr val="28C840"/>
+            </a:solidFill>
+            <a:prstDash val="solid"/>
+          </a:ln>
+        </p:spPr>
+      </p:sp>
+      <p:sp>
+        <p:nvSpPr>
+          <p:cNvPr id="17" name="Shape 14"/>
+          <p:cNvSpPr/>
+          <p:nvPr/>
+        </p:nvSpPr>
+        <p:spPr>
+          <a:xfrm>
+            <a:off x="6903720" y="1691640"/>
+            <a:ext cx="3840480" cy="182880"/>
+          </a:xfrm>
+          <a:prstGeom prst="roundRect">
+            <a:avLst>
+              <a:gd name="adj" fmla="val 25000"/>
+            </a:avLst>
+          </a:prstGeom>
+          <a:solidFill>
+            <a:srgbClr val="FFFFFF"/>
+          </a:solidFill>
+          <a:ln w="12700">
+            <a:solidFill>
+              <a:srgbClr val="D9DFDD"/>
+            </a:solidFill>
+            <a:prstDash val="solid"/>
+          </a:ln>
+        </p:spPr>
+      </p:sp>
+      <p:sp>
+        <p:nvSpPr>
+          <p:cNvPr id="18" name="Text 15"/>
+          <p:cNvSpPr txBox="1"/>
+          <p:nvPr/>
+        </p:nvSpPr>
+        <p:spPr>
+          <a:xfrm>
+            <a:off x="6995160" y="1691640"/>
+            <a:ext cx="3657600" cy="182880"/>
+          </a:xfrm>
+          <a:prstGeom prst="rect">
+            <a:avLst/>
+          </a:prstGeom>
+          <a:noFill/>
+          <a:ln/>
+        </p:spPr>
+        <p:txBody>
+          <a:bodyPr wrap="square" lIns="0" tIns="0" rIns="0" bIns="0" rtlCol="0" anchor="ctr"/>
+          <a:lstStyle/>
+          <a:p>
+            <a:pPr indent="0" marL="0">
+              <a:buNone/>
+            </a:pPr>
+            <a:r>
+              <a:rPr lang="en-US" sz="850" dirty="0">
+                <a:solidFill>
+                  <a:srgbClr val="4A5A56"/>
+                </a:solidFill>
+                <a:latin typeface="Calibri" pitchFamily="34" charset="0"/>
+                <a:ea typeface="Calibri" pitchFamily="34" charset="-122"/>
+                <a:cs typeface="Calibri" pitchFamily="34" charset="-120"/>
+              </a:rPr>
+              <a:t>eth.blockid.au/verify/EBA  ·  tamper test</a:t>
+            </a:r>
+            <a:endParaRPr lang="en-US" sz="850" dirty="0"/>
+          </a:p>
+        </p:txBody>
+      </p:sp>
       <p:pic>
         <p:nvPicPr>
-          <p:cNvPr id="7" name="Image 1" descr="preencoded.png">    </p:cNvPr>
+          <p:cNvPr id="19" name="Image 1" descr="preencoded.png">    </p:cNvPr>
           <p:cNvPicPr>
             <a:picLocks noChangeAspect="1"/>
           </p:cNvPicPr>
@@ -12667,8 +13583,8 @@
         </p:blipFill>
         <p:spPr>
           <a:xfrm>
-            <a:off x="6263640" y="1645920"/>
-            <a:ext cx="5440680" cy="1821445"/>
+            <a:off x="6263640" y="1920240"/>
+            <a:ext cx="5440680" cy="2418080"/>
           </a:xfrm>
           <a:prstGeom prst="rect">
             <a:avLst/>
@@ -12677,13 +13593,13 @@
       </p:pic>
       <p:sp>
         <p:nvSpPr>
-          <p:cNvPr id="8" name="Shape 4"/>
-          <p:cNvSpPr/>
-          <p:nvPr/>
-        </p:nvSpPr>
-        <p:spPr>
-          <a:xfrm>
-            <a:off x="502920" y="3787405"/>
+          <p:cNvPr id="20" name="Shape 16"/>
+          <p:cNvSpPr/>
+          <p:nvPr/>
+        </p:nvSpPr>
+        <p:spPr>
+          <a:xfrm>
+            <a:off x="502920" y="4658360"/>
             <a:ext cx="5440680" cy="640080"/>
           </a:xfrm>
           <a:prstGeom prst="roundRect">
@@ -12704,13 +13620,13 @@
       </p:sp>
       <p:sp>
         <p:nvSpPr>
-          <p:cNvPr id="9" name="Text 5"/>
-          <p:cNvSpPr txBox="1"/>
-          <p:nvPr/>
-        </p:nvSpPr>
-        <p:spPr>
-          <a:xfrm>
-            <a:off x="685800" y="3787405"/>
+          <p:cNvPr id="21" name="Text 17"/>
+          <p:cNvSpPr txBox="1"/>
+          <p:nvPr/>
+        </p:nvSpPr>
+        <p:spPr>
+          <a:xfrm>
+            <a:off x="685800" y="4658360"/>
             <a:ext cx="5120640" cy="640080"/>
           </a:xfrm>
           <a:prstGeom prst="rect">
@@ -12743,13 +13659,13 @@
       </p:sp>
       <p:sp>
         <p:nvSpPr>
-          <p:cNvPr id="10" name="Shape 6"/>
-          <p:cNvSpPr/>
-          <p:nvPr/>
-        </p:nvSpPr>
-        <p:spPr>
-          <a:xfrm>
-            <a:off x="6263640" y="3787405"/>
+          <p:cNvPr id="22" name="Shape 18"/>
+          <p:cNvSpPr/>
+          <p:nvPr/>
+        </p:nvSpPr>
+        <p:spPr>
+          <a:xfrm>
+            <a:off x="6263640" y="4658360"/>
             <a:ext cx="5440680" cy="640080"/>
           </a:xfrm>
           <a:prstGeom prst="roundRect">
@@ -12770,13 +13686,13 @@
       </p:sp>
       <p:sp>
         <p:nvSpPr>
-          <p:cNvPr id="11" name="Text 7"/>
-          <p:cNvSpPr txBox="1"/>
-          <p:nvPr/>
-        </p:nvSpPr>
-        <p:spPr>
-          <a:xfrm>
-            <a:off x="6446520" y="3787405"/>
+          <p:cNvPr id="23" name="Text 19"/>
+          <p:cNvSpPr txBox="1"/>
+          <p:nvPr/>
+        </p:nvSpPr>
+        <p:spPr>
+          <a:xfrm>
+            <a:off x="6446520" y="4658360"/>
             <a:ext cx="5120640" cy="640080"/>
           </a:xfrm>
           <a:prstGeom prst="rect">
@@ -12809,13 +13725,13 @@
       </p:sp>
       <p:sp>
         <p:nvSpPr>
-          <p:cNvPr id="12" name="Shape 8"/>
-          <p:cNvSpPr/>
-          <p:nvPr/>
-        </p:nvSpPr>
-        <p:spPr>
-          <a:xfrm>
-            <a:off x="502920" y="4656085"/>
+          <p:cNvPr id="24" name="Shape 20"/>
+          <p:cNvSpPr/>
+          <p:nvPr/>
+        </p:nvSpPr>
+        <p:spPr>
+          <a:xfrm>
+            <a:off x="502920" y="5527040"/>
             <a:ext cx="3611880" cy="731520"/>
           </a:xfrm>
           <a:prstGeom prst="roundRect">
@@ -12836,13 +13752,13 @@
       </p:sp>
       <p:sp>
         <p:nvSpPr>
-          <p:cNvPr id="13" name="Shape 9"/>
-          <p:cNvSpPr/>
-          <p:nvPr/>
-        </p:nvSpPr>
-        <p:spPr>
-          <a:xfrm>
-            <a:off x="640080" y="4765813"/>
+          <p:cNvPr id="25" name="Shape 21"/>
+          <p:cNvSpPr/>
+          <p:nvPr/>
+        </p:nvSpPr>
+        <p:spPr>
+          <a:xfrm>
+            <a:off x="640080" y="5636768"/>
             <a:ext cx="512064" cy="512064"/>
           </a:xfrm>
           <a:prstGeom prst="ellipse">
@@ -12861,7 +13777,7 @@
       </p:sp>
       <p:pic>
         <p:nvPicPr>
-          <p:cNvPr id="14" name="Image 2" descr="preencoded.png">    </p:cNvPr>
+          <p:cNvPr id="26" name="Image 2" descr="preencoded.png">    </p:cNvPr>
           <p:cNvPicPr>
             <a:picLocks noChangeAspect="1"/>
           </p:cNvPicPr>
@@ -12875,7 +13791,7 @@
         </p:blipFill>
         <p:spPr>
           <a:xfrm>
-            <a:off x="768096" y="4893829"/>
+            <a:off x="768096" y="5764784"/>
             <a:ext cx="256032" cy="256032"/>
           </a:xfrm>
           <a:prstGeom prst="rect">
@@ -12885,13 +13801,13 @@
       </p:pic>
       <p:sp>
         <p:nvSpPr>
-          <p:cNvPr id="15" name="Text 10"/>
-          <p:cNvSpPr txBox="1"/>
-          <p:nvPr/>
-        </p:nvSpPr>
-        <p:spPr>
-          <a:xfrm>
-            <a:off x="1280160" y="4656085"/>
+          <p:cNvPr id="27" name="Text 22"/>
+          <p:cNvSpPr txBox="1"/>
+          <p:nvPr/>
+        </p:nvSpPr>
+        <p:spPr>
+          <a:xfrm>
+            <a:off x="1280160" y="5527040"/>
             <a:ext cx="2743200" cy="731520"/>
           </a:xfrm>
           <a:prstGeom prst="rect">
@@ -12924,13 +13840,13 @@
       </p:sp>
       <p:sp>
         <p:nvSpPr>
-          <p:cNvPr id="16" name="Shape 11"/>
-          <p:cNvSpPr/>
-          <p:nvPr/>
-        </p:nvSpPr>
-        <p:spPr>
-          <a:xfrm>
-            <a:off x="4270248" y="4656085"/>
+          <p:cNvPr id="28" name="Shape 23"/>
+          <p:cNvSpPr/>
+          <p:nvPr/>
+        </p:nvSpPr>
+        <p:spPr>
+          <a:xfrm>
+            <a:off x="4270248" y="5527040"/>
             <a:ext cx="3611880" cy="731520"/>
           </a:xfrm>
           <a:prstGeom prst="roundRect">
@@ -12951,13 +13867,13 @@
       </p:sp>
       <p:sp>
         <p:nvSpPr>
-          <p:cNvPr id="17" name="Shape 12"/>
-          <p:cNvSpPr/>
-          <p:nvPr/>
-        </p:nvSpPr>
-        <p:spPr>
-          <a:xfrm>
-            <a:off x="4407408" y="4765813"/>
+          <p:cNvPr id="29" name="Shape 24"/>
+          <p:cNvSpPr/>
+          <p:nvPr/>
+        </p:nvSpPr>
+        <p:spPr>
+          <a:xfrm>
+            <a:off x="4407408" y="5636768"/>
             <a:ext cx="512064" cy="512064"/>
           </a:xfrm>
           <a:prstGeom prst="ellipse">
@@ -12976,7 +13892,7 @@
       </p:sp>
       <p:pic>
         <p:nvPicPr>
-          <p:cNvPr id="18" name="Image 3" descr="preencoded.png">    </p:cNvPr>
+          <p:cNvPr id="30" name="Image 3" descr="preencoded.png">    </p:cNvPr>
           <p:cNvPicPr>
             <a:picLocks noChangeAspect="1"/>
           </p:cNvPicPr>
@@ -12990,7 +13906,7 @@
         </p:blipFill>
         <p:spPr>
           <a:xfrm>
-            <a:off x="4535424" y="4893829"/>
+            <a:off x="4535424" y="5764784"/>
             <a:ext cx="256032" cy="256032"/>
           </a:xfrm>
           <a:prstGeom prst="rect">
@@ -13000,13 +13916,13 @@
       </p:pic>
       <p:sp>
         <p:nvSpPr>
-          <p:cNvPr id="19" name="Text 13"/>
-          <p:cNvSpPr txBox="1"/>
-          <p:nvPr/>
-        </p:nvSpPr>
-        <p:spPr>
-          <a:xfrm>
-            <a:off x="5047488" y="4656085"/>
+          <p:cNvPr id="31" name="Text 25"/>
+          <p:cNvSpPr txBox="1"/>
+          <p:nvPr/>
+        </p:nvSpPr>
+        <p:spPr>
+          <a:xfrm>
+            <a:off x="5047488" y="5527040"/>
             <a:ext cx="2743200" cy="731520"/>
           </a:xfrm>
           <a:prstGeom prst="rect">
@@ -13039,13 +13955,13 @@
       </p:sp>
       <p:sp>
         <p:nvSpPr>
-          <p:cNvPr id="20" name="Shape 14"/>
-          <p:cNvSpPr/>
-          <p:nvPr/>
-        </p:nvSpPr>
-        <p:spPr>
-          <a:xfrm>
-            <a:off x="8037576" y="4656085"/>
+          <p:cNvPr id="32" name="Shape 26"/>
+          <p:cNvSpPr/>
+          <p:nvPr/>
+        </p:nvSpPr>
+        <p:spPr>
+          <a:xfrm>
+            <a:off x="8037576" y="5527040"/>
             <a:ext cx="3611880" cy="731520"/>
           </a:xfrm>
           <a:prstGeom prst="roundRect">
@@ -13066,13 +13982,13 @@
       </p:sp>
       <p:sp>
         <p:nvSpPr>
-          <p:cNvPr id="21" name="Shape 15"/>
-          <p:cNvSpPr/>
-          <p:nvPr/>
-        </p:nvSpPr>
-        <p:spPr>
-          <a:xfrm>
-            <a:off x="8174736" y="4765813"/>
+          <p:cNvPr id="33" name="Shape 27"/>
+          <p:cNvSpPr/>
+          <p:nvPr/>
+        </p:nvSpPr>
+        <p:spPr>
+          <a:xfrm>
+            <a:off x="8174736" y="5636768"/>
             <a:ext cx="512064" cy="512064"/>
           </a:xfrm>
           <a:prstGeom prst="ellipse">
@@ -13091,7 +14007,7 @@
       </p:sp>
       <p:pic>
         <p:nvPicPr>
-          <p:cNvPr id="22" name="Image 4" descr="preencoded.png">    </p:cNvPr>
+          <p:cNvPr id="34" name="Image 4" descr="preencoded.png">    </p:cNvPr>
           <p:cNvPicPr>
             <a:picLocks noChangeAspect="1"/>
           </p:cNvPicPr>
@@ -13105,7 +14021,7 @@
         </p:blipFill>
         <p:spPr>
           <a:xfrm>
-            <a:off x="8302752" y="4893829"/>
+            <a:off x="8302752" y="5764784"/>
             <a:ext cx="256032" cy="256032"/>
           </a:xfrm>
           <a:prstGeom prst="rect">
@@ -13115,13 +14031,13 @@
       </p:pic>
       <p:sp>
         <p:nvSpPr>
-          <p:cNvPr id="23" name="Text 16"/>
-          <p:cNvSpPr txBox="1"/>
-          <p:nvPr/>
-        </p:nvSpPr>
-        <p:spPr>
-          <a:xfrm>
-            <a:off x="8814816" y="4656085"/>
+          <p:cNvPr id="35" name="Text 28"/>
+          <p:cNvSpPr txBox="1"/>
+          <p:nvPr/>
+        </p:nvSpPr>
+        <p:spPr>
+          <a:xfrm>
+            <a:off x="8814816" y="5527040"/>
             <a:ext cx="2743200" cy="731520"/>
           </a:xfrm>
           <a:prstGeom prst="rect">
@@ -13154,46 +14070,7 @@
       </p:sp>
       <p:sp>
         <p:nvSpPr>
-          <p:cNvPr id="24" name="Text 17"/>
-          <p:cNvSpPr txBox="1"/>
-          <p:nvPr/>
-        </p:nvSpPr>
-        <p:spPr>
-          <a:xfrm>
-            <a:off x="502920" y="5570485"/>
-            <a:ext cx="11155680" cy="365760"/>
-          </a:xfrm>
-          <a:prstGeom prst="rect">
-            <a:avLst/>
-          </a:prstGeom>
-          <a:noFill/>
-          <a:ln/>
-        </p:spPr>
-        <p:txBody>
-          <a:bodyPr wrap="square" lIns="0" tIns="0" rIns="0" bIns="0" rtlCol="0" anchor="ctr"/>
-          <a:lstStyle/>
-          <a:p>
-            <a:pPr algn="ctr" indent="0" marL="0">
-              <a:buNone/>
-            </a:pPr>
-            <a:r>
-              <a:rPr lang="en-US" sz="1600" b="1" dirty="0">
-                <a:solidFill>
-                  <a:srgbClr val="7FE0C2"/>
-                </a:solidFill>
-                <a:latin typeface="Calibri" pitchFamily="34" charset="0"/>
-                <a:ea typeface="Calibri" pitchFamily="34" charset="-122"/>
-                <a:cs typeface="Calibri" pitchFamily="34" charset="-120"/>
-              </a:rPr>
-              <a:t>No login needed: eth.blockid.au/verify</a:t>
-            </a:r>
-            <a:endParaRPr lang="en-US" sz="1600" dirty="0"/>
-          </a:p>
-        </p:txBody>
-      </p:sp>
-      <p:sp>
-        <p:nvSpPr>
-          <p:cNvPr id="25" name="Text 18"/>
+          <p:cNvPr id="36" name="Text 29"/>
           <p:cNvSpPr txBox="1"/>
           <p:nvPr/>
         </p:nvSpPr>
@@ -13295,7 +14172,7 @@
                 <a:ea typeface="Calibri" pitchFamily="34" charset="-122"/>
                 <a:cs typeface="Calibri" pitchFamily="34" charset="-120"/>
               </a:rPr>
-              <a:t>9 / 12   ·   INVESTOR PROTECTION</a:t>
+              <a:t>9 / 13   ·   INVESTOR PROTECTION</a:t>
             </a:r>
             <a:endParaRPr lang="en-US" sz="1150" dirty="0"/>
           </a:p>

--- a/docs/pitch/out/BlockID-Business-Passport-3min.pptx
+++ b/docs/pitch/out/BlockID-Business-Passport-3min.pptx
@@ -1305,7 +1305,7 @@
           <a:p>
             <a:r>
               <a:rPr lang="en-US" dirty="0"/>
-              <a:t>[1:57–2:15] This also prepares for tokenised assets. Tokenised real-world assets on-chain grew from about seven to thirty-nine billion dollars in nineteen months (rwa.xyz), and Citi expects five and a half trillion by 2030. New rules in Europe, Vietnam and Australia require proper custody. In BlockID, keys sit only in an isolated issuer, every holder is verified, every record is anchored on three chains, and a licensed custodian can plug in.</a:t>
+              <a:t>[1:57–2:15] This also prepares for tokenised assets. Tokenised real-world assets on-chain grew from about seven to thirty-nine billion dollars in nineteen months (rwa.xyz), and Citi expects five and a half trillion by 2030. New rules in Europe, Vietnam and Australia require proper custody. In BlockID, keys sit in one locked-down signing service, every holder is verified, every record is on three chains, and a licensed custodian can plug in.</a:t>
             </a:r>
             <a:endParaRPr lang="en-US" dirty="0"/>
           </a:p>
@@ -1393,7 +1393,7 @@
           <a:p>
             <a:r>
               <a:rPr lang="en-US" dirty="0"/>
-              <a:t>[2:15–2:30] Under the hood, only approved actions reach the chain. AI runs with no keys, an admin wallet signs one approval, and only then does the isolated issuer act. Our AgentProvenance contract on HashKey Chain records who proposed and who approved. Agents propose. Humans approve. Chains prove.</a:t>
+              <a:t>[2:15–2:30] How it works. Research tools draft, but they never touch keys. A named person reviews and approves every valuation, new share and dividend, and no one can approve their own request. Only then is it written to the chain, and anyone can check the record. It runs on any EVM chain, layer 1 or layer 2: today BlockID Chain, Ethereum and HashKey Chain.</a:t>
             </a:r>
             <a:endParaRPr lang="en-US" dirty="0"/>
           </a:p>
@@ -1569,7 +1569,7 @@
           <a:p>
             <a:r>
               <a:rPr lang="en-US" dirty="0"/>
-              <a:t>[2:45–3:00] The whole flow works on testnet today: fourteen sample listings and forty-two token contracts on three chains, with no real users yet. Next: pilot businesses in Australia and Vietnam, investor communities and licensed custody partners. Businesses pay a listing fee, a register subscription and small transfer and dividend fees. Try it at eth.blockid.au. Thank you.</a:t>
+              <a:t>[2:45–3:00] Everything you saw runs today on testnet, across BlockID Chain, Ethereum and HashKey Chain. We invite Ethereum investors to back our first pilots in Australia and Vietnam, and layer one and layer two teams to run BlockID on their chain as a real-world-asset case. Licensed partners can bring custody and offerings. Know the business you invest in. Try it at eth.blockid.au.</a:t>
             </a:r>
             <a:endParaRPr lang="en-US" dirty="0"/>
           </a:p>
@@ -1921,7 +1921,7 @@
           <a:p>
             <a:r>
               <a:rPr lang="en-US" dirty="0"/>
-              <a:t>[0:52–1:05] Understand it. Paste a website and get a plain report in minutes: a grade from A to E and a low, mid and high value. AI agents do the research but hold no keys; every figure links to its source, and a person approves it.</a:t>
+              <a:t>[0:52–1:05] Understand it. Paste a website and get a plain report in minutes: a grade from A to E and a low, mid and high value. Independent research does the legwork, every figure links to its source, and a person approves it before anyone sees it.</a:t>
             </a:r>
             <a:endParaRPr lang="en-US" dirty="0"/>
           </a:p>
@@ -2798,7 +2798,7 @@
                 <a:ea typeface="Calibri" pitchFamily="34" charset="-122"/>
                 <a:cs typeface="Calibri" pitchFamily="34" charset="-120"/>
               </a:rPr>
-              <a:t>BlockID Business Passport gives every shareholder, large or small, a live view of the business they own: AI-analysed, human-approved updates and valuations, an on-chain share register as proof of ownership, and dividends paid straight to their wallet.</a:t>
+              <a:t>BlockID Business Passport gives every shareholder, large or small, a live view of the business they own: updates and valuations checked and approved by people, a share register on blockchain as proof of ownership, and dividends paid straight to their wallet.</a:t>
             </a:r>
             <a:endParaRPr lang="en-US" sz="1700" dirty="0"/>
           </a:p>
@@ -3193,7 +3193,7 @@
                 <a:ea typeface="Calibri" pitchFamily="34" charset="-122"/>
                 <a:cs typeface="Calibri" pitchFamily="34" charset="-120"/>
               </a:rPr>
-              <a:t>sample listings (demo data)</a:t>
+              <a:t>sample listings, live on testnet</a:t>
             </a:r>
             <a:endParaRPr lang="en-US" sz="1100" dirty="0"/>
           </a:p>
@@ -3403,7 +3403,7 @@
                 <a:ea typeface="Calibri" pitchFamily="34" charset="-122"/>
                 <a:cs typeface="Calibri" pitchFamily="34" charset="-120"/>
               </a:rPr>
-              <a:t>blockchains, every record checkable</a:t>
+              <a:t>chains, every record checkable</a:t>
             </a:r>
             <a:endParaRPr lang="en-US" sz="1100" dirty="0"/>
           </a:p>
@@ -3412,45 +3412,6 @@
       <p:sp>
         <p:nvSpPr>
           <p:cNvPr id="25" name="Text 21"/>
-          <p:cNvSpPr txBox="1"/>
-          <p:nvPr/>
-        </p:nvSpPr>
-        <p:spPr>
-          <a:xfrm>
-            <a:off x="6035040" y="6257925"/>
-            <a:ext cx="5715000" cy="320040"/>
-          </a:xfrm>
-          <a:prstGeom prst="rect">
-            <a:avLst/>
-          </a:prstGeom>
-          <a:noFill/>
-          <a:ln/>
-        </p:spPr>
-        <p:txBody>
-          <a:bodyPr wrap="square" lIns="0" tIns="0" rIns="0" bIns="0" rtlCol="0" anchor="ctr"/>
-          <a:lstStyle/>
-          <a:p>
-            <a:pPr algn="ctr" indent="0" marL="0">
-              <a:buNone/>
-            </a:pPr>
-            <a:r>
-              <a:rPr lang="en-US" sz="1300" i="1" dirty="0">
-                <a:solidFill>
-                  <a:srgbClr val="7E948F"/>
-                </a:solidFill>
-                <a:latin typeface="Calibri" pitchFamily="34" charset="0"/>
-                <a:ea typeface="Calibri" pitchFamily="34" charset="-122"/>
-                <a:cs typeface="Calibri" pitchFamily="34" charset="-120"/>
-              </a:rPr>
-              <a:t>Working end to end on testnet at eth.blockid.au</a:t>
-            </a:r>
-            <a:endParaRPr lang="en-US" sz="1300" dirty="0"/>
-          </a:p>
-        </p:txBody>
-      </p:sp>
-      <p:sp>
-        <p:nvSpPr>
-          <p:cNvPr id="26" name="Text 22"/>
           <p:cNvSpPr txBox="1"/>
           <p:nvPr/>
         </p:nvSpPr>
@@ -4090,7 +4051,7 @@
                 <a:ea typeface="Calibri" pitchFamily="34" charset="-122"/>
                 <a:cs typeface="Calibri" pitchFamily="34" charset="-120"/>
               </a:rPr>
-              <a:t>Keys only in an isolated issuer · every holder verified (KYC) · register anchored on 3 chains · a licensed custodian plugs in, investors keep proof</a:t>
+              <a:t>Keys sit in one locked-down signing service, never with the research tools · every holder verified (KYC) · records on 3 chains · a licensed custodian plugs in, investors keep the proof</a:t>
             </a:r>
             <a:endParaRPr lang="en-US" sz="1250" dirty="0"/>
           </a:p>
@@ -4200,7 +4161,7 @@
                 <a:ea typeface="Calibri" pitchFamily="34" charset="-122"/>
                 <a:cs typeface="Calibri" pitchFamily="34" charset="-120"/>
               </a:rPr>
-              <a:t>11 / 13   ·   HOW IT'S BUILT</a:t>
+              <a:t>11 / 13   ·   HOW IT WORKS</a:t>
             </a:r>
             <a:endParaRPr lang="en-US" sz="1150" dirty="0"/>
           </a:p>
@@ -4239,7 +4200,7 @@
                 <a:ea typeface="Arial" pitchFamily="34" charset="-122"/>
                 <a:cs typeface="Arial" pitchFamily="34" charset="-120"/>
               </a:rPr>
-              <a:t>Agents propose. Humans approve. Chains prove.</a:t>
+              <a:t>People decide. Every step is on the record.</a:t>
             </a:r>
             <a:endParaRPr lang="en-US" sz="3000" dirty="0"/>
           </a:p>
@@ -4439,7 +4400,7 @@
                 <a:ea typeface="Calibri" pitchFamily="34" charset="-122"/>
                 <a:cs typeface="Calibri" pitchFamily="34" charset="-120"/>
               </a:rPr>
-              <a:t>eth.blockid.au/admin  ·  a person approves</a:t>
+              <a:t>eth.blockid.au/admin  ·  every step waits for a person</a:t>
             </a:r>
             <a:endParaRPr lang="en-US" sz="850" dirty="0"/>
           </a:p>
@@ -4753,7 +4714,7 @@
                 <a:ea typeface="Arial" pitchFamily="34" charset="-122"/>
                 <a:cs typeface="Arial" pitchFamily="34" charset="-120"/>
               </a:rPr>
-              <a:t>AI agents propose</a:t>
+              <a:t>Research drafts</a:t>
             </a:r>
             <a:endParaRPr lang="en-US" sz="1400" dirty="0"/>
           </a:p>
@@ -4792,7 +4753,7 @@
                 <a:ea typeface="Calibri" pitchFamily="34" charset="-122"/>
                 <a:cs typeface="Calibri" pitchFamily="34" charset="-120"/>
               </a:rPr>
-              <a:t>research and value; no keys, no network path to keys</a:t>
+              <a:t>public sources gathered and checked; drafts only, no access to keys</a:t>
             </a:r>
             <a:endParaRPr lang="en-US" sz="1050" dirty="0"/>
           </a:p>
@@ -4936,7 +4897,7 @@
                 <a:ea typeface="Calibri" pitchFamily="34" charset="-122"/>
                 <a:cs typeface="Calibri" pitchFamily="34" charset="-120"/>
               </a:rPr>
-              <a:t>admin wallet signs one approval, four-eyes rule on chain</a:t>
+              <a:t>a named reviewer signs; no one can approve their own request</a:t>
             </a:r>
             <a:endParaRPr lang="en-US" sz="1050" dirty="0"/>
           </a:p>
@@ -5041,7 +5002,7 @@
                 <a:ea typeface="Arial" pitchFamily="34" charset="-122"/>
                 <a:cs typeface="Arial" pitchFamily="34" charset="-120"/>
               </a:rPr>
-              <a:t>Isolated issuer acts</a:t>
+              <a:t>Recorded on chain</a:t>
             </a:r>
             <a:endParaRPr lang="en-US" sz="1400" dirty="0"/>
           </a:p>
@@ -5080,7 +5041,7 @@
                 <a:ea typeface="Calibri" pitchFamily="34" charset="-122"/>
                 <a:cs typeface="Calibri" pitchFamily="34" charset="-120"/>
               </a:rPr>
-              <a:t>only key holder; writes BlockID Chain, mirrors Ethereum + HashKey</a:t>
+              <a:t>any EVM chain, L1 or L2; live on BlockID Chain, Ethereum and HashKey</a:t>
             </a:r>
             <a:endParaRPr lang="en-US" sz="1050" dirty="0"/>
           </a:p>
@@ -6545,7 +6506,7 @@
                 <a:ea typeface="Calibri" pitchFamily="34" charset="-122"/>
                 <a:cs typeface="Calibri" pitchFamily="34" charset="-120"/>
               </a:rPr>
-              <a:t>Smart contracts, AI agents, key-holding issuer, web app, 3 chains</a:t>
+              <a:t>Smart contracts, research tools, secure signing service, web app, 3 chains</a:t>
             </a:r>
             <a:endParaRPr lang="en-US" sz="1150" dirty="0"/>
           </a:p>
@@ -6655,7 +6616,7 @@
                 <a:ea typeface="Calibri" pitchFamily="34" charset="-122"/>
                 <a:cs typeface="Calibri" pitchFamily="34" charset="-120"/>
               </a:rPr>
-              <a:t>13 / 13   ·   WORKING TODAY · THE ASK</a:t>
+              <a:t>13 / 13   ·   JOIN US</a:t>
             </a:r>
             <a:endParaRPr lang="en-US" sz="1150" dirty="0"/>
           </a:p>
@@ -6694,7 +6655,7 @@
                 <a:ea typeface="Arial" pitchFamily="34" charset="-122"/>
                 <a:cs typeface="Arial" pitchFamily="34" charset="-120"/>
               </a:rPr>
-              <a:t>Working on testnet. Looking for our first pilot businesses.</a:t>
+              <a:t>A real app, ready to run on your chain.</a:t>
             </a:r>
             <a:endParaRPr lang="en-US" sz="3000" dirty="0"/>
           </a:p>
@@ -6709,11 +6670,11 @@
         <p:spPr>
           <a:xfrm>
             <a:off x="502920" y="1600200"/>
-            <a:ext cx="1737360" cy="1325880"/>
+            <a:ext cx="2350008" cy="1097280"/>
           </a:xfrm>
           <a:prstGeom prst="roundRect">
             <a:avLst>
-              <a:gd name="adj" fmla="val 8276"/>
+              <a:gd name="adj" fmla="val 10000"/>
             </a:avLst>
           </a:prstGeom>
           <a:solidFill>
@@ -6735,8 +6696,8 @@
         </p:nvSpPr>
         <p:spPr>
           <a:xfrm>
-            <a:off x="640080" y="1673352"/>
-            <a:ext cx="1508760" cy="640080"/>
+            <a:off x="667512" y="1645920"/>
+            <a:ext cx="2011680" cy="548640"/>
           </a:xfrm>
           <a:prstGeom prst="rect">
             <a:avLst/>
@@ -6752,7 +6713,7 @@
               <a:buNone/>
             </a:pPr>
             <a:r>
-              <a:rPr lang="en-US" sz="2800" b="1" dirty="0">
+              <a:rPr lang="en-US" sz="2600" b="1" dirty="0">
                 <a:solidFill>
                   <a:srgbClr val="22A07F"/>
                 </a:solidFill>
@@ -6762,7 +6723,7 @@
               </a:rPr>
               <a:t>14</a:t>
             </a:r>
-            <a:endParaRPr lang="en-US" sz="2800" dirty="0"/>
+            <a:endParaRPr lang="en-US" sz="2600" dirty="0"/>
           </a:p>
         </p:txBody>
       </p:sp>
@@ -6774,8 +6735,8 @@
         </p:nvSpPr>
         <p:spPr>
           <a:xfrm>
-            <a:off x="640080" y="2331720"/>
-            <a:ext cx="1508760" cy="548640"/>
+            <a:off x="667512" y="2194560"/>
+            <a:ext cx="2103120" cy="457200"/>
           </a:xfrm>
           <a:prstGeom prst="rect">
             <a:avLst/>
@@ -6799,7 +6760,7 @@
                 <a:ea typeface="Calibri" pitchFamily="34" charset="-122"/>
                 <a:cs typeface="Calibri" pitchFamily="34" charset="-120"/>
               </a:rPr>
-              <a:t>sample listings built from public data</a:t>
+              <a:t>sample listings live on testnet</a:t>
             </a:r>
             <a:endParaRPr lang="en-US" sz="1150" dirty="0"/>
           </a:p>
@@ -6813,12 +6774,12 @@
         </p:nvSpPr>
         <p:spPr>
           <a:xfrm>
-            <a:off x="2377440" y="1600200"/>
-            <a:ext cx="1737360" cy="1325880"/>
+            <a:off x="2990088" y="1600200"/>
+            <a:ext cx="2350008" cy="1097280"/>
           </a:xfrm>
           <a:prstGeom prst="roundRect">
             <a:avLst>
-              <a:gd name="adj" fmla="val 8276"/>
+              <a:gd name="adj" fmla="val 10000"/>
             </a:avLst>
           </a:prstGeom>
           <a:solidFill>
@@ -6840,8 +6801,8 @@
         </p:nvSpPr>
         <p:spPr>
           <a:xfrm>
-            <a:off x="2514600" y="1673352"/>
-            <a:ext cx="1508760" cy="640080"/>
+            <a:off x="3154680" y="1645920"/>
+            <a:ext cx="2011680" cy="548640"/>
           </a:xfrm>
           <a:prstGeom prst="rect">
             <a:avLst/>
@@ -6857,7 +6818,7 @@
               <a:buNone/>
             </a:pPr>
             <a:r>
-              <a:rPr lang="en-US" sz="2800" b="1" dirty="0">
+              <a:rPr lang="en-US" sz="2600" b="1" dirty="0">
                 <a:solidFill>
                   <a:srgbClr val="E3A83A"/>
                 </a:solidFill>
@@ -6867,7 +6828,7 @@
               </a:rPr>
               <a:t>42</a:t>
             </a:r>
-            <a:endParaRPr lang="en-US" sz="2800" dirty="0"/>
+            <a:endParaRPr lang="en-US" sz="2600" dirty="0"/>
           </a:p>
         </p:txBody>
       </p:sp>
@@ -6879,8 +6840,8 @@
         </p:nvSpPr>
         <p:spPr>
           <a:xfrm>
-            <a:off x="2514600" y="2331720"/>
-            <a:ext cx="1508760" cy="548640"/>
+            <a:off x="3154680" y="2194560"/>
+            <a:ext cx="2103120" cy="457200"/>
           </a:xfrm>
           <a:prstGeom prst="rect">
             <a:avLst/>
@@ -6904,7 +6865,7 @@
                 <a:ea typeface="Calibri" pitchFamily="34" charset="-122"/>
                 <a:cs typeface="Calibri" pitchFamily="34" charset="-120"/>
               </a:rPr>
-              <a:t>share records on blockchain</a:t>
+              <a:t>share-token contracts</a:t>
             </a:r>
             <a:endParaRPr lang="en-US" sz="1150" dirty="0"/>
           </a:p>
@@ -6918,12 +6879,12 @@
         </p:nvSpPr>
         <p:spPr>
           <a:xfrm>
-            <a:off x="4251960" y="1600200"/>
-            <a:ext cx="1737360" cy="1325880"/>
+            <a:off x="5477256" y="1600200"/>
+            <a:ext cx="2350008" cy="1097280"/>
           </a:xfrm>
           <a:prstGeom prst="roundRect">
             <a:avLst>
-              <a:gd name="adj" fmla="val 8276"/>
+              <a:gd name="adj" fmla="val 10000"/>
             </a:avLst>
           </a:prstGeom>
           <a:solidFill>
@@ -6945,8 +6906,8 @@
         </p:nvSpPr>
         <p:spPr>
           <a:xfrm>
-            <a:off x="4389120" y="1673352"/>
-            <a:ext cx="1508760" cy="640080"/>
+            <a:off x="5641848" y="1645920"/>
+            <a:ext cx="2011680" cy="548640"/>
           </a:xfrm>
           <a:prstGeom prst="rect">
             <a:avLst/>
@@ -6962,7 +6923,7 @@
               <a:buNone/>
             </a:pPr>
             <a:r>
-              <a:rPr lang="en-US" sz="2800" b="1" dirty="0">
+              <a:rPr lang="en-US" sz="2600" b="1" dirty="0">
                 <a:solidFill>
                   <a:srgbClr val="22A07F"/>
                 </a:solidFill>
@@ -6972,7 +6933,7 @@
               </a:rPr>
               <a:t>3</a:t>
             </a:r>
-            <a:endParaRPr lang="en-US" sz="2800" dirty="0"/>
+            <a:endParaRPr lang="en-US" sz="2600" dirty="0"/>
           </a:p>
         </p:txBody>
       </p:sp>
@@ -6984,8 +6945,8 @@
         </p:nvSpPr>
         <p:spPr>
           <a:xfrm>
-            <a:off x="4389120" y="2331720"/>
-            <a:ext cx="1508760" cy="548640"/>
+            <a:off x="5641848" y="2194560"/>
+            <a:ext cx="2103120" cy="457200"/>
           </a:xfrm>
           <a:prstGeom prst="rect">
             <a:avLst/>
@@ -7009,7 +6970,7 @@
                 <a:ea typeface="Calibri" pitchFamily="34" charset="-122"/>
                 <a:cs typeface="Calibri" pitchFamily="34" charset="-120"/>
               </a:rPr>
-              <a:t>blockchains, every record checkable</a:t>
+              <a:t>chains: BlockID L1, Ethereum, HashKey L2</a:t>
             </a:r>
             <a:endParaRPr lang="en-US" sz="1150" dirty="0"/>
           </a:p>
@@ -7023,12 +6984,12 @@
         </p:nvSpPr>
         <p:spPr>
           <a:xfrm>
-            <a:off x="6126480" y="1600200"/>
-            <a:ext cx="1737360" cy="1325880"/>
+            <a:off x="502920" y="2880360"/>
+            <a:ext cx="7269480" cy="960120"/>
           </a:xfrm>
           <a:prstGeom prst="roundRect">
             <a:avLst>
-              <a:gd name="adj" fmla="val 8276"/>
+              <a:gd name="adj" fmla="val 11429"/>
             </a:avLst>
           </a:prstGeom>
           <a:solidFill>
@@ -7036,7 +6997,7 @@
           </a:solidFill>
           <a:ln w="12700">
             <a:solidFill>
-              <a:srgbClr val="25403A"/>
+              <a:srgbClr val="22A07F"/>
             </a:solidFill>
             <a:prstDash val="solid"/>
           </a:ln>
@@ -7050,8 +7011,8 @@
         </p:nvSpPr>
         <p:spPr>
           <a:xfrm>
-            <a:off x="6263640" y="1673352"/>
-            <a:ext cx="1508760" cy="640080"/>
+            <a:off x="731520" y="2953512"/>
+            <a:ext cx="6858000" cy="365760"/>
           </a:xfrm>
           <a:prstGeom prst="rect">
             <a:avLst/>
@@ -7067,17 +7028,17 @@
               <a:buNone/>
             </a:pPr>
             <a:r>
-              <a:rPr lang="en-US" sz="2800" b="1" dirty="0">
-                <a:solidFill>
-                  <a:srgbClr val="E3A83A"/>
+              <a:rPr lang="en-US" sz="1600" b="1" dirty="0">
+                <a:solidFill>
+                  <a:srgbClr val="22A07F"/>
                 </a:solidFill>
                 <a:latin typeface="Arial" pitchFamily="34" charset="0"/>
                 <a:ea typeface="Arial" pitchFamily="34" charset="-122"/>
                 <a:cs typeface="Arial" pitchFamily="34" charset="-120"/>
               </a:rPr>
-              <a:t>Next</a:t>
-            </a:r>
-            <a:endParaRPr lang="en-US" sz="2800" dirty="0"/>
+              <a:t>Ethereum investors</a:t>
+            </a:r>
+            <a:endParaRPr lang="en-US" sz="1600" dirty="0"/>
           </a:p>
         </p:txBody>
       </p:sp>
@@ -7089,8 +7050,8 @@
         </p:nvSpPr>
         <p:spPr>
           <a:xfrm>
-            <a:off x="6263640" y="2331720"/>
-            <a:ext cx="1508760" cy="548640"/>
+            <a:off x="731520" y="3319272"/>
+            <a:ext cx="6858000" cy="475488"/>
           </a:xfrm>
           <a:prstGeom prst="rect">
             <a:avLst/>
@@ -7106,17 +7067,17 @@
               <a:buNone/>
             </a:pPr>
             <a:r>
-              <a:rPr lang="en-US" sz="1150" dirty="0">
-                <a:solidFill>
-                  <a:srgbClr val="A9BDB7"/>
+              <a:rPr lang="en-US" sz="1250" dirty="0">
+                <a:solidFill>
+                  <a:srgbClr val="F2F7F5"/>
                 </a:solidFill>
                 <a:latin typeface="Calibri" pitchFamily="34" charset="0"/>
                 <a:ea typeface="Calibri" pitchFamily="34" charset="-122"/>
                 <a:cs typeface="Calibri" pitchFamily="34" charset="-120"/>
               </a:rPr>
-              <a:t>first real pilots in AU · VN</a:t>
-            </a:r>
-            <a:endParaRPr lang="en-US" sz="1150" dirty="0"/>
+              <a:t>Back our first pilots in Australia and Vietnam: real businesses, real shareholders, on Ethereum rails.</a:t>
+            </a:r>
+            <a:endParaRPr lang="en-US" sz="1250" dirty="0"/>
           </a:p>
         </p:txBody>
       </p:sp>
@@ -7128,12 +7089,12 @@
         </p:nvSpPr>
         <p:spPr>
           <a:xfrm>
-            <a:off x="502920" y="3108960"/>
-            <a:ext cx="3611880" cy="3063240"/>
+            <a:off x="502920" y="3977640"/>
+            <a:ext cx="7269480" cy="960120"/>
           </a:xfrm>
           <a:prstGeom prst="roundRect">
             <a:avLst>
-              <a:gd name="adj" fmla="val 3582"/>
+              <a:gd name="adj" fmla="val 11429"/>
             </a:avLst>
           </a:prstGeom>
           <a:solidFill>
@@ -7141,7 +7102,7 @@
           </a:solidFill>
           <a:ln w="12700">
             <a:solidFill>
-              <a:srgbClr val="25403A"/>
+              <a:srgbClr val="E3A83A"/>
             </a:solidFill>
             <a:prstDash val="solid"/>
           </a:ln>
@@ -7155,8 +7116,8 @@
         </p:nvSpPr>
         <p:spPr>
           <a:xfrm>
-            <a:off x="731520" y="3246120"/>
-            <a:ext cx="3200400" cy="274320"/>
+            <a:off x="731520" y="4050792"/>
+            <a:ext cx="6858000" cy="365760"/>
           </a:xfrm>
           <a:prstGeom prst="rect">
             <a:avLst/>
@@ -7172,71 +7133,151 @@
               <a:buNone/>
             </a:pPr>
             <a:r>
-              <a:rPr lang="en-US" sz="1150" b="1" spc="300" kern="0" dirty="0">
+              <a:rPr lang="en-US" sz="1600" b="1" dirty="0">
                 <a:solidFill>
                   <a:srgbClr val="E3A83A"/>
+                </a:solidFill>
+                <a:latin typeface="Arial" pitchFamily="34" charset="0"/>
+                <a:ea typeface="Arial" pitchFamily="34" charset="-122"/>
+                <a:cs typeface="Arial" pitchFamily="34" charset="-120"/>
+              </a:rPr>
+              <a:t>L1 and L2 teams</a:t>
+            </a:r>
+            <a:endParaRPr lang="en-US" sz="1600" dirty="0"/>
+          </a:p>
+        </p:txBody>
+      </p:sp>
+      <p:sp>
+        <p:nvSpPr>
+          <p:cNvPr id="18" name="Text 16"/>
+          <p:cNvSpPr txBox="1"/>
+          <p:nvPr/>
+        </p:nvSpPr>
+        <p:spPr>
+          <a:xfrm>
+            <a:off x="731520" y="4416552"/>
+            <a:ext cx="6858000" cy="475488"/>
+          </a:xfrm>
+          <a:prstGeom prst="rect">
+            <a:avLst/>
+          </a:prstGeom>
+          <a:noFill/>
+          <a:ln/>
+        </p:spPr>
+        <p:txBody>
+          <a:bodyPr wrap="square" lIns="0" tIns="0" rIns="0" bIns="0" rtlCol="0" anchor="ctr"/>
+          <a:lstStyle/>
+          <a:p>
+            <a:pPr indent="0" marL="0">
+              <a:buNone/>
+            </a:pPr>
+            <a:r>
+              <a:rPr lang="en-US" sz="1250" dirty="0">
+                <a:solidFill>
+                  <a:srgbClr val="F2F7F5"/>
                 </a:solidFill>
                 <a:latin typeface="Calibri" pitchFamily="34" charset="0"/>
                 <a:ea typeface="Calibri" pitchFamily="34" charset="-122"/>
                 <a:cs typeface="Calibri" pitchFamily="34" charset="-120"/>
               </a:rPr>
-              <a:t>WHO PAYS</a:t>
-            </a:r>
-            <a:endParaRPr lang="en-US" sz="1150" dirty="0"/>
-          </a:p>
-        </p:txBody>
-      </p:sp>
-      <p:sp>
-        <p:nvSpPr>
-          <p:cNvPr id="18" name="Shape 16"/>
+              <a:t>Run BlockID on your chain as a real-world-asset case: share registers, updates, dividends and checks. Any EVM chain.</a:t>
+            </a:r>
+            <a:endParaRPr lang="en-US" sz="1250" dirty="0"/>
+          </a:p>
+        </p:txBody>
+      </p:sp>
+      <p:sp>
+        <p:nvSpPr>
+          <p:cNvPr id="19" name="Shape 17"/>
           <p:cNvSpPr/>
           <p:nvPr/>
         </p:nvSpPr>
         <p:spPr>
           <a:xfrm>
-            <a:off x="731520" y="3703320"/>
-            <a:ext cx="146304" cy="146304"/>
-          </a:xfrm>
-          <a:prstGeom prst="ellipse">
-            <a:avLst/>
-          </a:prstGeom>
-          <a:solidFill>
-            <a:srgbClr val="E3A83A"/>
+            <a:off x="502920" y="5074920"/>
+            <a:ext cx="7269480" cy="960120"/>
+          </a:xfrm>
+          <a:prstGeom prst="roundRect">
+            <a:avLst>
+              <a:gd name="adj" fmla="val 11429"/>
+            </a:avLst>
+          </a:prstGeom>
+          <a:solidFill>
+            <a:srgbClr val="12201D"/>
           </a:solidFill>
           <a:ln w="12700">
             <a:solidFill>
-              <a:srgbClr val="E3A83A"/>
-            </a:solidFill>
-            <a:prstDash val="solid"/>
-          </a:ln>
-        </p:spPr>
-      </p:sp>
-      <p:sp>
-        <p:nvSpPr>
-          <p:cNvPr id="19" name="Text 17"/>
-          <p:cNvSpPr txBox="1"/>
-          <p:nvPr/>
-        </p:nvSpPr>
-        <p:spPr>
-          <a:xfrm>
-            <a:off x="1024128" y="3611880"/>
-            <a:ext cx="2953512" cy="640080"/>
-          </a:xfrm>
-          <a:prstGeom prst="rect">
-            <a:avLst/>
-          </a:prstGeom>
-          <a:noFill/>
-          <a:ln/>
-        </p:spPr>
-        <p:txBody>
-          <a:bodyPr wrap="square" lIns="0" tIns="0" rIns="0" bIns="0" rtlCol="0" anchor="t"/>
-          <a:lstStyle/>
-          <a:p>
-            <a:pPr indent="0" marL="0">
-              <a:buNone/>
-            </a:pPr>
-            <a:r>
-              <a:rPr lang="en-US" sz="1350" dirty="0">
+              <a:srgbClr val="9B7BD4"/>
+            </a:solidFill>
+            <a:prstDash val="solid"/>
+          </a:ln>
+        </p:spPr>
+      </p:sp>
+      <p:sp>
+        <p:nvSpPr>
+          <p:cNvPr id="20" name="Text 18"/>
+          <p:cNvSpPr txBox="1"/>
+          <p:nvPr/>
+        </p:nvSpPr>
+        <p:spPr>
+          <a:xfrm>
+            <a:off x="731520" y="5148072"/>
+            <a:ext cx="6858000" cy="365760"/>
+          </a:xfrm>
+          <a:prstGeom prst="rect">
+            <a:avLst/>
+          </a:prstGeom>
+          <a:noFill/>
+          <a:ln/>
+        </p:spPr>
+        <p:txBody>
+          <a:bodyPr wrap="square" lIns="0" tIns="0" rIns="0" bIns="0" rtlCol="0" anchor="ctr"/>
+          <a:lstStyle/>
+          <a:p>
+            <a:pPr indent="0" marL="0">
+              <a:buNone/>
+            </a:pPr>
+            <a:r>
+              <a:rPr lang="en-US" sz="1600" b="1" dirty="0">
+                <a:solidFill>
+                  <a:srgbClr val="9B7BD4"/>
+                </a:solidFill>
+                <a:latin typeface="Arial" pitchFamily="34" charset="0"/>
+                <a:ea typeface="Arial" pitchFamily="34" charset="-122"/>
+                <a:cs typeface="Arial" pitchFamily="34" charset="-120"/>
+              </a:rPr>
+              <a:t>Licensed partners</a:t>
+            </a:r>
+            <a:endParaRPr lang="en-US" sz="1600" dirty="0"/>
+          </a:p>
+        </p:txBody>
+      </p:sp>
+      <p:sp>
+        <p:nvSpPr>
+          <p:cNvPr id="21" name="Text 19"/>
+          <p:cNvSpPr txBox="1"/>
+          <p:nvPr/>
+        </p:nvSpPr>
+        <p:spPr>
+          <a:xfrm>
+            <a:off x="731520" y="5513832"/>
+            <a:ext cx="6858000" cy="475488"/>
+          </a:xfrm>
+          <a:prstGeom prst="rect">
+            <a:avLst/>
+          </a:prstGeom>
+          <a:noFill/>
+          <a:ln/>
+        </p:spPr>
+        <p:txBody>
+          <a:bodyPr wrap="square" lIns="0" tIns="0" rIns="0" bIns="0" rtlCol="0" anchor="ctr"/>
+          <a:lstStyle/>
+          <a:p>
+            <a:pPr indent="0" marL="0">
+              <a:buNone/>
+            </a:pPr>
+            <a:r>
+              <a:rPr lang="en-US" sz="1250" dirty="0">
                 <a:solidFill>
                   <a:srgbClr val="F2F7F5"/>
                 </a:solidFill>
@@ -7244,401 +7285,54 @@
                 <a:ea typeface="Calibri" pitchFamily="34" charset="-122"/>
                 <a:cs typeface="Calibri" pitchFamily="34" charset="-120"/>
               </a:rPr>
-              <a:t>Businesses: listing fee + share-register subscription</a:t>
-            </a:r>
-            <a:endParaRPr lang="en-US" sz="1350" dirty="0"/>
-          </a:p>
-        </p:txBody>
-      </p:sp>
-      <p:sp>
-        <p:nvSpPr>
-          <p:cNvPr id="20" name="Shape 18"/>
-          <p:cNvSpPr/>
-          <p:nvPr/>
-        </p:nvSpPr>
-        <p:spPr>
-          <a:xfrm>
-            <a:off x="731520" y="4361688"/>
-            <a:ext cx="146304" cy="146304"/>
-          </a:xfrm>
-          <a:prstGeom prst="ellipse">
-            <a:avLst/>
-          </a:prstGeom>
-          <a:solidFill>
-            <a:srgbClr val="E3A83A"/>
-          </a:solidFill>
-          <a:ln w="12700">
-            <a:solidFill>
-              <a:srgbClr val="E3A83A"/>
-            </a:solidFill>
-            <a:prstDash val="solid"/>
-          </a:ln>
-        </p:spPr>
-      </p:sp>
-      <p:sp>
-        <p:nvSpPr>
-          <p:cNvPr id="21" name="Text 19"/>
-          <p:cNvSpPr txBox="1"/>
-          <p:nvPr/>
-        </p:nvSpPr>
-        <p:spPr>
-          <a:xfrm>
-            <a:off x="1024128" y="4270248"/>
-            <a:ext cx="2953512" cy="640080"/>
-          </a:xfrm>
-          <a:prstGeom prst="rect">
-            <a:avLst/>
-          </a:prstGeom>
-          <a:noFill/>
-          <a:ln/>
-        </p:spPr>
-        <p:txBody>
-          <a:bodyPr wrap="square" lIns="0" tIns="0" rIns="0" bIns="0" rtlCol="0" anchor="t"/>
-          <a:lstStyle/>
-          <a:p>
-            <a:pPr indent="0" marL="0">
-              <a:buNone/>
-            </a:pPr>
-            <a:r>
-              <a:rPr lang="en-US" sz="1350" dirty="0">
-                <a:solidFill>
-                  <a:srgbClr val="F2F7F5"/>
+              <a:t>Custody, offerings and transfer services, so investors keep their rights and their proof.</a:t>
+            </a:r>
+            <a:endParaRPr lang="en-US" sz="1250" dirty="0"/>
+          </a:p>
+        </p:txBody>
+      </p:sp>
+      <p:sp>
+        <p:nvSpPr>
+          <p:cNvPr id="22" name="Text 20"/>
+          <p:cNvSpPr txBox="1"/>
+          <p:nvPr/>
+        </p:nvSpPr>
+        <p:spPr>
+          <a:xfrm>
+            <a:off x="502920" y="6199632"/>
+            <a:ext cx="7269480" cy="274320"/>
+          </a:xfrm>
+          <a:prstGeom prst="rect">
+            <a:avLst/>
+          </a:prstGeom>
+          <a:noFill/>
+          <a:ln/>
+        </p:spPr>
+        <p:txBody>
+          <a:bodyPr wrap="square" lIns="0" tIns="0" rIns="0" bIns="0" rtlCol="0" anchor="ctr"/>
+          <a:lstStyle/>
+          <a:p>
+            <a:pPr indent="0" marL="0">
+              <a:buNone/>
+            </a:pPr>
+            <a:r>
+              <a:rPr lang="en-US" sz="1100" dirty="0">
+                <a:solidFill>
+                  <a:srgbClr val="7E948F"/>
                 </a:solidFill>
                 <a:latin typeface="Calibri" pitchFamily="34" charset="0"/>
                 <a:ea typeface="Calibri" pitchFamily="34" charset="-122"/>
                 <a:cs typeface="Calibri" pitchFamily="34" charset="-120"/>
               </a:rPr>
-              <a:t>Per share transfer fee</a:t>
-            </a:r>
-            <a:endParaRPr lang="en-US" sz="1350" dirty="0"/>
-          </a:p>
-        </p:txBody>
-      </p:sp>
-      <p:sp>
-        <p:nvSpPr>
-          <p:cNvPr id="22" name="Shape 20"/>
-          <p:cNvSpPr/>
-          <p:nvPr/>
-        </p:nvSpPr>
-        <p:spPr>
-          <a:xfrm>
-            <a:off x="731520" y="5020056"/>
-            <a:ext cx="146304" cy="146304"/>
-          </a:xfrm>
-          <a:prstGeom prst="ellipse">
-            <a:avLst/>
-          </a:prstGeom>
-          <a:solidFill>
-            <a:srgbClr val="E3A83A"/>
-          </a:solidFill>
-          <a:ln w="12700">
-            <a:solidFill>
-              <a:srgbClr val="E3A83A"/>
-            </a:solidFill>
-            <a:prstDash val="solid"/>
-          </a:ln>
-        </p:spPr>
-      </p:sp>
-      <p:sp>
-        <p:nvSpPr>
-          <p:cNvPr id="23" name="Text 21"/>
-          <p:cNvSpPr txBox="1"/>
-          <p:nvPr/>
-        </p:nvSpPr>
-        <p:spPr>
-          <a:xfrm>
-            <a:off x="1024128" y="4928616"/>
-            <a:ext cx="2953512" cy="640080"/>
-          </a:xfrm>
-          <a:prstGeom prst="rect">
-            <a:avLst/>
-          </a:prstGeom>
-          <a:noFill/>
-          <a:ln/>
-        </p:spPr>
-        <p:txBody>
-          <a:bodyPr wrap="square" lIns="0" tIns="0" rIns="0" bIns="0" rtlCol="0" anchor="t"/>
-          <a:lstStyle/>
-          <a:p>
-            <a:pPr indent="0" marL="0">
-              <a:buNone/>
-            </a:pPr>
-            <a:r>
-              <a:rPr lang="en-US" sz="1350" dirty="0">
-                <a:solidFill>
-                  <a:srgbClr val="F2F7F5"/>
-                </a:solidFill>
-                <a:latin typeface="Calibri" pitchFamily="34" charset="0"/>
-                <a:ea typeface="Calibri" pitchFamily="34" charset="-122"/>
-                <a:cs typeface="Calibri" pitchFamily="34" charset="-120"/>
-              </a:rPr>
-              <a:t>0.5–1% of each dividend round</a:t>
-            </a:r>
-            <a:endParaRPr lang="en-US" sz="1350" dirty="0"/>
-          </a:p>
-        </p:txBody>
-      </p:sp>
-      <p:sp>
-        <p:nvSpPr>
-          <p:cNvPr id="24" name="Shape 22"/>
-          <p:cNvSpPr/>
-          <p:nvPr/>
-        </p:nvSpPr>
-        <p:spPr>
-          <a:xfrm>
-            <a:off x="4251960" y="3108960"/>
-            <a:ext cx="3520440" cy="3063240"/>
-          </a:xfrm>
-          <a:prstGeom prst="roundRect">
-            <a:avLst>
-              <a:gd name="adj" fmla="val 3582"/>
-            </a:avLst>
-          </a:prstGeom>
-          <a:solidFill>
-            <a:srgbClr val="12201D"/>
-          </a:solidFill>
-          <a:ln w="12700">
-            <a:solidFill>
-              <a:srgbClr val="25403A"/>
-            </a:solidFill>
-            <a:prstDash val="solid"/>
-          </a:ln>
-        </p:spPr>
-      </p:sp>
-      <p:sp>
-        <p:nvSpPr>
-          <p:cNvPr id="25" name="Text 23"/>
-          <p:cNvSpPr txBox="1"/>
-          <p:nvPr/>
-        </p:nvSpPr>
-        <p:spPr>
-          <a:xfrm>
-            <a:off x="4480560" y="3246120"/>
-            <a:ext cx="3200400" cy="274320"/>
-          </a:xfrm>
-          <a:prstGeom prst="rect">
-            <a:avLst/>
-          </a:prstGeom>
-          <a:noFill/>
-          <a:ln/>
-        </p:spPr>
-        <p:txBody>
-          <a:bodyPr wrap="square" lIns="0" tIns="0" rIns="0" bIns="0" rtlCol="0" anchor="ctr"/>
-          <a:lstStyle/>
-          <a:p>
-            <a:pPr indent="0" marL="0">
-              <a:buNone/>
-            </a:pPr>
-            <a:r>
-              <a:rPr lang="en-US" sz="1150" b="1" spc="300" kern="0" dirty="0">
-                <a:solidFill>
-                  <a:srgbClr val="22A07F"/>
-                </a:solidFill>
-                <a:latin typeface="Calibri" pitchFamily="34" charset="0"/>
-                <a:ea typeface="Calibri" pitchFamily="34" charset="-122"/>
-                <a:cs typeface="Calibri" pitchFamily="34" charset="-120"/>
-              </a:rPr>
-              <a:t>WHO IT'S FOR</a:t>
-            </a:r>
-            <a:endParaRPr lang="en-US" sz="1150" dirty="0"/>
-          </a:p>
-        </p:txBody>
-      </p:sp>
-      <p:sp>
-        <p:nvSpPr>
-          <p:cNvPr id="26" name="Shape 24"/>
-          <p:cNvSpPr/>
-          <p:nvPr/>
-        </p:nvSpPr>
-        <p:spPr>
-          <a:xfrm>
-            <a:off x="4480560" y="3703320"/>
-            <a:ext cx="146304" cy="146304"/>
-          </a:xfrm>
-          <a:prstGeom prst="ellipse">
-            <a:avLst/>
-          </a:prstGeom>
-          <a:solidFill>
-            <a:srgbClr val="22A07F"/>
-          </a:solidFill>
-          <a:ln w="12700">
-            <a:solidFill>
-              <a:srgbClr val="22A07F"/>
-            </a:solidFill>
-            <a:prstDash val="solid"/>
-          </a:ln>
-        </p:spPr>
-      </p:sp>
-      <p:sp>
-        <p:nvSpPr>
-          <p:cNvPr id="27" name="Text 25"/>
-          <p:cNvSpPr txBox="1"/>
-          <p:nvPr/>
-        </p:nvSpPr>
-        <p:spPr>
-          <a:xfrm>
-            <a:off x="4773168" y="3611880"/>
-            <a:ext cx="2862072" cy="640080"/>
-          </a:xfrm>
-          <a:prstGeom prst="rect">
-            <a:avLst/>
-          </a:prstGeom>
-          <a:noFill/>
-          <a:ln/>
-        </p:spPr>
-        <p:txBody>
-          <a:bodyPr wrap="square" lIns="0" tIns="0" rIns="0" bIns="0" rtlCol="0" anchor="t"/>
-          <a:lstStyle/>
-          <a:p>
-            <a:pPr indent="0" marL="0">
-              <a:buNone/>
-            </a:pPr>
-            <a:r>
-              <a:rPr lang="en-US" sz="1350" dirty="0">
-                <a:solidFill>
-                  <a:srgbClr val="F2F7F5"/>
-                </a:solidFill>
-                <a:latin typeface="Calibri" pitchFamily="34" charset="0"/>
-                <a:ea typeface="Calibri" pitchFamily="34" charset="-122"/>
-                <a:cs typeface="Calibri" pitchFamily="34" charset="-120"/>
-              </a:rPr>
-              <a:t>Investors, retail and professional</a:t>
-            </a:r>
-            <a:endParaRPr lang="en-US" sz="1350" dirty="0"/>
-          </a:p>
-        </p:txBody>
-      </p:sp>
-      <p:sp>
-        <p:nvSpPr>
-          <p:cNvPr id="28" name="Shape 26"/>
-          <p:cNvSpPr/>
-          <p:nvPr/>
-        </p:nvSpPr>
-        <p:spPr>
-          <a:xfrm>
-            <a:off x="4480560" y="4361688"/>
-            <a:ext cx="146304" cy="146304"/>
-          </a:xfrm>
-          <a:prstGeom prst="ellipse">
-            <a:avLst/>
-          </a:prstGeom>
-          <a:solidFill>
-            <a:srgbClr val="22A07F"/>
-          </a:solidFill>
-          <a:ln w="12700">
-            <a:solidFill>
-              <a:srgbClr val="22A07F"/>
-            </a:solidFill>
-            <a:prstDash val="solid"/>
-          </a:ln>
-        </p:spPr>
-      </p:sp>
-      <p:sp>
-        <p:nvSpPr>
-          <p:cNvPr id="29" name="Text 27"/>
-          <p:cNvSpPr txBox="1"/>
-          <p:nvPr/>
-        </p:nvSpPr>
-        <p:spPr>
-          <a:xfrm>
-            <a:off x="4773168" y="4270248"/>
-            <a:ext cx="2862072" cy="640080"/>
-          </a:xfrm>
-          <a:prstGeom prst="rect">
-            <a:avLst/>
-          </a:prstGeom>
-          <a:noFill/>
-          <a:ln/>
-        </p:spPr>
-        <p:txBody>
-          <a:bodyPr wrap="square" lIns="0" tIns="0" rIns="0" bIns="0" rtlCol="0" anchor="t"/>
-          <a:lstStyle/>
-          <a:p>
-            <a:pPr indent="0" marL="0">
-              <a:buNone/>
-            </a:pPr>
-            <a:r>
-              <a:rPr lang="en-US" sz="1350" dirty="0">
-                <a:solidFill>
-                  <a:srgbClr val="F2F7F5"/>
-                </a:solidFill>
-                <a:latin typeface="Calibri" pitchFamily="34" charset="0"/>
-                <a:ea typeface="Calibri" pitchFamily="34" charset="-122"/>
-                <a:cs typeface="Calibri" pitchFamily="34" charset="-120"/>
-              </a:rPr>
-              <a:t>Businesses raising from them (AU · VN)</a:t>
-            </a:r>
-            <a:endParaRPr lang="en-US" sz="1350" dirty="0"/>
-          </a:p>
-        </p:txBody>
-      </p:sp>
-      <p:sp>
-        <p:nvSpPr>
-          <p:cNvPr id="30" name="Shape 28"/>
-          <p:cNvSpPr/>
-          <p:nvPr/>
-        </p:nvSpPr>
-        <p:spPr>
-          <a:xfrm>
-            <a:off x="4480560" y="5020056"/>
-            <a:ext cx="146304" cy="146304"/>
-          </a:xfrm>
-          <a:prstGeom prst="ellipse">
-            <a:avLst/>
-          </a:prstGeom>
-          <a:solidFill>
-            <a:srgbClr val="22A07F"/>
-          </a:solidFill>
-          <a:ln w="12700">
-            <a:solidFill>
-              <a:srgbClr val="22A07F"/>
-            </a:solidFill>
-            <a:prstDash val="solid"/>
-          </a:ln>
-        </p:spPr>
-      </p:sp>
-      <p:sp>
-        <p:nvSpPr>
-          <p:cNvPr id="31" name="Text 29"/>
-          <p:cNvSpPr txBox="1"/>
-          <p:nvPr/>
-        </p:nvSpPr>
-        <p:spPr>
-          <a:xfrm>
-            <a:off x="4773168" y="4928616"/>
-            <a:ext cx="2862072" cy="640080"/>
-          </a:xfrm>
-          <a:prstGeom prst="rect">
-            <a:avLst/>
-          </a:prstGeom>
-          <a:noFill/>
-          <a:ln/>
-        </p:spPr>
-        <p:txBody>
-          <a:bodyPr wrap="square" lIns="0" tIns="0" rIns="0" bIns="0" rtlCol="0" anchor="t"/>
-          <a:lstStyle/>
-          <a:p>
-            <a:pPr indent="0" marL="0">
-              <a:buNone/>
-            </a:pPr>
-            <a:r>
-              <a:rPr lang="en-US" sz="1350" dirty="0">
-                <a:solidFill>
-                  <a:srgbClr val="F2F7F5"/>
-                </a:solidFill>
-                <a:latin typeface="Calibri" pitchFamily="34" charset="0"/>
-                <a:ea typeface="Calibri" pitchFamily="34" charset="-122"/>
-                <a:cs typeface="Calibri" pitchFamily="34" charset="-120"/>
-              </a:rPr>
-              <a:t>Accelerators, VCs, licensed partners</a:t>
-            </a:r>
-            <a:endParaRPr lang="en-US" sz="1350" dirty="0"/>
-          </a:p>
-        </p:txBody>
-      </p:sp>
-      <p:sp>
-        <p:nvSpPr>
-          <p:cNvPr id="32" name="Shape 30"/>
+              <a:t>Revenue: listing fee · share-register subscription · small transfer and dividend fees</a:t>
+            </a:r>
+            <a:endParaRPr lang="en-US" sz="1100" dirty="0"/>
+          </a:p>
+        </p:txBody>
+      </p:sp>
+      <p:sp>
+        <p:nvSpPr>
+          <p:cNvPr id="23" name="Shape 21"/>
           <p:cNvSpPr/>
           <p:nvPr/>
         </p:nvSpPr>
@@ -7665,7 +7359,7 @@
       </p:sp>
       <p:pic>
         <p:nvPicPr>
-          <p:cNvPr id="33" name="Image 0" descr="img/founder-qr.jpg">    </p:cNvPr>
+          <p:cNvPr id="24" name="Image 0" descr="img/founder-qr.jpg">    </p:cNvPr>
           <p:cNvPicPr>
             <a:picLocks noChangeAspect="1"/>
           </p:cNvPicPr>
@@ -7689,7 +7383,7 @@
       </p:pic>
       <p:sp>
         <p:nvSpPr>
-          <p:cNvPr id="34" name="Text 31"/>
+          <p:cNvPr id="25" name="Text 22"/>
           <p:cNvSpPr txBox="1"/>
           <p:nvPr/>
         </p:nvSpPr>
@@ -7728,7 +7422,7 @@
       </p:sp>
       <p:pic>
         <p:nvPicPr>
-          <p:cNvPr id="35" name="Image 1" descr="preencoded.png">    </p:cNvPr>
+          <p:cNvPr id="26" name="Image 1" descr="preencoded.png">    </p:cNvPr>
           <p:cNvPicPr>
             <a:picLocks noChangeAspect="1"/>
           </p:cNvPicPr>
@@ -7752,7 +7446,7 @@
       </p:pic>
       <p:sp>
         <p:nvSpPr>
-          <p:cNvPr id="36" name="Text 32"/>
+          <p:cNvPr id="27" name="Text 23"/>
           <p:cNvSpPr txBox="1"/>
           <p:nvPr/>
         </p:nvSpPr>
@@ -7791,7 +7485,7 @@
       </p:sp>
       <p:sp>
         <p:nvSpPr>
-          <p:cNvPr id="37" name="Text 33"/>
+          <p:cNvPr id="28" name="Text 24"/>
           <p:cNvSpPr txBox="1"/>
           <p:nvPr/>
         </p:nvSpPr>
@@ -7830,14 +7524,14 @@
       </p:sp>
       <p:sp>
         <p:nvSpPr>
-          <p:cNvPr id="38" name="Text 34"/>
+          <p:cNvPr id="29" name="Text 25"/>
           <p:cNvSpPr txBox="1"/>
           <p:nvPr/>
         </p:nvSpPr>
         <p:spPr>
           <a:xfrm>
             <a:off x="8183880" y="4315968"/>
-            <a:ext cx="3291840" cy="320040"/>
+            <a:ext cx="3291840" cy="640080"/>
           </a:xfrm>
           <a:prstGeom prst="rect">
             <a:avLst/>
@@ -7861,7 +7555,7 @@
                 <a:ea typeface="Arial" pitchFamily="34" charset="-122"/>
                 <a:cs typeface="Arial" pitchFamily="34" charset="-120"/>
               </a:rPr>
-              <a:t>We're looking for</a:t>
+              <a:t>Know the business you invest in.</a:t>
             </a:r>
             <a:endParaRPr lang="en-US" sz="1600" dirty="0"/>
           </a:p>
@@ -7869,14 +7563,14 @@
       </p:sp>
       <p:sp>
         <p:nvSpPr>
-          <p:cNvPr id="39" name="Text 35"/>
-          <p:cNvSpPr txBox="1"/>
-          <p:nvPr/>
-        </p:nvSpPr>
-        <p:spPr>
-          <a:xfrm>
-            <a:off x="8183880" y="4636008"/>
-            <a:ext cx="3291840" cy="640080"/>
+          <p:cNvPr id="30" name="Text 26"/>
+          <p:cNvSpPr txBox="1"/>
+          <p:nvPr/>
+        </p:nvSpPr>
+        <p:spPr>
+          <a:xfrm>
+            <a:off x="8183880" y="5029200"/>
+            <a:ext cx="3291840" cy="320040"/>
           </a:xfrm>
           <a:prstGeom prst="rect">
             <a:avLst/>
@@ -7892,29 +7586,29 @@
               <a:buNone/>
             </a:pPr>
             <a:r>
-              <a:rPr lang="en-US" sz="1350" dirty="0">
-                <a:solidFill>
-                  <a:srgbClr val="F2F7F5"/>
+              <a:rPr lang="en-US" sz="1300" dirty="0">
+                <a:solidFill>
+                  <a:srgbClr val="A9BDB7"/>
                 </a:solidFill>
                 <a:latin typeface="Calibri" pitchFamily="34" charset="0"/>
                 <a:ea typeface="Calibri" pitchFamily="34" charset="-122"/>
                 <a:cs typeface="Calibri" pitchFamily="34" charset="-120"/>
               </a:rPr>
-              <a:t>Pilot businesses · investor communities · licensed partners</a:t>
-            </a:r>
-            <a:endParaRPr lang="en-US" sz="1350" dirty="0"/>
-          </a:p>
-        </p:txBody>
-      </p:sp>
-      <p:sp>
-        <p:nvSpPr>
-          <p:cNvPr id="40" name="Text 36"/>
-          <p:cNvSpPr txBox="1"/>
-          <p:nvPr/>
-        </p:nvSpPr>
-        <p:spPr>
-          <a:xfrm>
-            <a:off x="8183880" y="5349240"/>
+              <a:t>Long Do · admin@blockid.au</a:t>
+            </a:r>
+            <a:endParaRPr lang="en-US" sz="1300" dirty="0"/>
+          </a:p>
+        </p:txBody>
+      </p:sp>
+      <p:sp>
+        <p:nvSpPr>
+          <p:cNvPr id="31" name="Text 27"/>
+          <p:cNvSpPr txBox="1"/>
+          <p:nvPr/>
+        </p:nvSpPr>
+        <p:spPr>
+          <a:xfrm>
+            <a:off x="8183880" y="5321808"/>
             <a:ext cx="3291840" cy="320040"/>
           </a:xfrm>
           <a:prstGeom prst="rect">
@@ -7931,29 +7625,29 @@
               <a:buNone/>
             </a:pPr>
             <a:r>
-              <a:rPr lang="en-US" sz="1300" dirty="0">
-                <a:solidFill>
-                  <a:srgbClr val="A9BDB7"/>
+              <a:rPr lang="en-US" sz="1150" dirty="0">
+                <a:solidFill>
+                  <a:srgbClr val="7E948F"/>
                 </a:solidFill>
                 <a:latin typeface="Calibri" pitchFamily="34" charset="0"/>
                 <a:ea typeface="Calibri" pitchFamily="34" charset="-122"/>
                 <a:cs typeface="Calibri" pitchFamily="34" charset="-120"/>
               </a:rPr>
-              <a:t>Long Do · admin@blockid.au</a:t>
-            </a:r>
-            <a:endParaRPr lang="en-US" sz="1300" dirty="0"/>
-          </a:p>
-        </p:txBody>
-      </p:sp>
-      <p:sp>
-        <p:nvSpPr>
-          <p:cNvPr id="41" name="Text 37"/>
-          <p:cNvSpPr txBox="1"/>
-          <p:nvPr/>
-        </p:nvSpPr>
-        <p:spPr>
-          <a:xfrm>
-            <a:off x="8183880" y="5641848"/>
+              <a:t>linkedin.com/in/dovanlong</a:t>
+            </a:r>
+            <a:endParaRPr lang="en-US" sz="1150" dirty="0"/>
+          </a:p>
+        </p:txBody>
+      </p:sp>
+      <p:sp>
+        <p:nvSpPr>
+          <p:cNvPr id="32" name="Text 28"/>
+          <p:cNvSpPr txBox="1"/>
+          <p:nvPr/>
+        </p:nvSpPr>
+        <p:spPr>
+          <a:xfrm>
+            <a:off x="8183880" y="5614416"/>
             <a:ext cx="3291840" cy="320040"/>
           </a:xfrm>
           <a:prstGeom prst="rect">
@@ -7972,13 +7666,13 @@
             <a:r>
               <a:rPr lang="en-US" sz="1150" dirty="0">
                 <a:solidFill>
-                  <a:srgbClr val="7E948F"/>
+                  <a:srgbClr val="22A07F"/>
                 </a:solidFill>
                 <a:latin typeface="Calibri" pitchFamily="34" charset="0"/>
                 <a:ea typeface="Calibri" pitchFamily="34" charset="-122"/>
                 <a:cs typeface="Calibri" pitchFamily="34" charset="-120"/>
               </a:rPr>
-              <a:t>linkedin.com/in/dovanlong</a:t>
+              <a:t>eth.blockid.au · hr.blockid.au</a:t>
             </a:r>
             <a:endParaRPr lang="en-US" sz="1150" dirty="0"/>
           </a:p>
@@ -7986,7 +7680,7 @@
       </p:sp>
       <p:sp>
         <p:nvSpPr>
-          <p:cNvPr id="42" name="Text 38"/>
+          <p:cNvPr id="33" name="Text 29"/>
           <p:cNvSpPr txBox="1"/>
           <p:nvPr/>
         </p:nvSpPr>
